--- a/si-portal/catalogues/TerraEmbodiment_Catalogue.pptx
+++ b/si-portal/catalogues/TerraEmbodiment_Catalogue.pptx
@@ -6,11 +6,12 @@
   </p:sldMasterIdLst>
   <p:sldIdLst>
     <p:sldId id="256" r:id="rId7"/>
-    <p:sldId id="257" r:id="rId8"/>
-    <p:sldId id="258" r:id="rId9"/>
-    <p:sldId id="259" r:id="rId10"/>
-    <p:sldId id="260" r:id="rId11"/>
-    <p:sldId id="261" r:id="rId12"/>
+    <p:sldId id="257" r:id="rId9"/>
+    <p:sldId id="258" r:id="rId10"/>
+    <p:sldId id="259" r:id="rId11"/>
+    <p:sldId id="260" r:id="rId12"/>
+    <p:sldId id="261" r:id="rId13"/>
+    <p:sldId id="262" r:id="rId14"/>
   </p:sldIdLst>
   <p:sldSz cx="12191695" cy="6858000" type="screen4x3"/>
   <p:notesSz cx="6858000" cy="9144000"/>
@@ -110,6 +111,1177 @@
     </a:lvl9pPr>
   </p:defaultTextStyle>
 </p:presentation>
+</file>
+
+<file path=ppt/notesMasters/notesMaster1.xml><?xml version="1.0" encoding="utf-8"?>
+<p:notesMaster xmlns:a="http://schemas.openxmlformats.org/drawingml/2006/main" xmlns:p="http://schemas.openxmlformats.org/presentationml/2006/main" xmlns:r="http://schemas.openxmlformats.org/officeDocument/2006/relationships">
+  <p:cSld>
+    <p:bg>
+      <p:bgRef idx="1001">
+        <a:schemeClr val="bg1"/>
+      </p:bgRef>
+    </p:bg>
+    <p:spTree>
+      <p:nvGrpSpPr>
+        <p:cNvPr id="1" name=""/>
+        <p:cNvGrpSpPr/>
+        <p:nvPr/>
+      </p:nvGrpSpPr>
+      <p:grpSpPr>
+        <a:xfrm>
+          <a:off x="0" y="0"/>
+          <a:ext cx="0" cy="0"/>
+          <a:chOff x="0" y="0"/>
+          <a:chExt cx="0" cy="0"/>
+        </a:xfrm>
+      </p:grpSpPr>
+      <p:sp>
+        <p:nvSpPr>
+          <p:cNvPr id="2" name="Header Placeholder 1"/>
+          <p:cNvSpPr>
+            <a:spLocks noGrp="1"/>
+          </p:cNvSpPr>
+          <p:nvPr>
+            <p:ph type="hdr" sz="quarter"/>
+          </p:nvPr>
+        </p:nvSpPr>
+        <p:spPr>
+          <a:xfrm>
+            <a:off x="0" y="0"/>
+            <a:ext cx="2971800" cy="457200"/>
+          </a:xfrm>
+          <a:prstGeom prst="rect">
+            <a:avLst/>
+          </a:prstGeom>
+        </p:spPr>
+        <p:txBody>
+          <a:bodyPr vert="horz" lIns="91440" tIns="45720" rIns="91440" bIns="45720" rtlCol="0"/>
+          <a:lstStyle>
+            <a:lvl1pPr algn="l">
+              <a:defRPr sz="1200"/>
+            </a:lvl1pPr>
+          </a:lstStyle>
+          <a:p>
+            <a:endParaRPr lang="en-US"/>
+          </a:p>
+        </p:txBody>
+      </p:sp>
+      <p:sp>
+        <p:nvSpPr>
+          <p:cNvPr id="3" name="Date Placeholder 2"/>
+          <p:cNvSpPr>
+            <a:spLocks noGrp="1"/>
+          </p:cNvSpPr>
+          <p:nvPr>
+            <p:ph type="dt" idx="1"/>
+          </p:nvPr>
+        </p:nvSpPr>
+        <p:spPr>
+          <a:xfrm>
+            <a:off x="3884613" y="0"/>
+            <a:ext cx="2971800" cy="457200"/>
+          </a:xfrm>
+          <a:prstGeom prst="rect">
+            <a:avLst/>
+          </a:prstGeom>
+        </p:spPr>
+        <p:txBody>
+          <a:bodyPr vert="horz" lIns="91440" tIns="45720" rIns="91440" bIns="45720" rtlCol="0"/>
+          <a:lstStyle>
+            <a:lvl1pPr algn="r">
+              <a:defRPr sz="1200"/>
+            </a:lvl1pPr>
+          </a:lstStyle>
+          <a:p>
+            <a:fld id="{0F89C1C7-3DCD-1040-A9CF-14679D8B5DDD}" type="datetimeFigureOut">
+              <a:rPr lang="en-US" smtClean="0"/>
+              <a:t>10/17/16</a:t>
+            </a:fld>
+            <a:endParaRPr lang="en-US"/>
+          </a:p>
+        </p:txBody>
+      </p:sp>
+      <p:sp>
+        <p:nvSpPr>
+          <p:cNvPr id="4" name="Slide Image Placeholder 3"/>
+          <p:cNvSpPr>
+            <a:spLocks noGrp="1" noRot="1" noChangeAspect="1"/>
+          </p:cNvSpPr>
+          <p:nvPr>
+            <p:ph type="sldImg" idx="2"/>
+          </p:nvPr>
+        </p:nvSpPr>
+        <p:spPr>
+          <a:xfrm>
+            <a:off x="1143000" y="685800"/>
+            <a:ext cx="4572000" cy="3429000"/>
+          </a:xfrm>
+          <a:prstGeom prst="rect">
+            <a:avLst/>
+          </a:prstGeom>
+          <a:noFill/>
+          <a:ln w="12700">
+            <a:solidFill>
+              <a:prstClr val="black"/>
+            </a:solidFill>
+          </a:ln>
+        </p:spPr>
+        <p:txBody>
+          <a:bodyPr vert="horz" lIns="91440" tIns="45720" rIns="91440" bIns="45720" rtlCol="0" anchor="ctr"/>
+          <a:lstStyle/>
+          <a:p>
+            <a:endParaRPr lang="en-US"/>
+          </a:p>
+        </p:txBody>
+      </p:sp>
+      <p:sp>
+        <p:nvSpPr>
+          <p:cNvPr id="5" name="Notes Placeholder 4"/>
+          <p:cNvSpPr>
+            <a:spLocks noGrp="1"/>
+          </p:cNvSpPr>
+          <p:nvPr>
+            <p:ph type="body" sz="quarter" idx="3"/>
+          </p:nvPr>
+        </p:nvSpPr>
+        <p:spPr>
+          <a:xfrm>
+            <a:off x="685800" y="4343400"/>
+            <a:ext cx="5486400" cy="4114800"/>
+          </a:xfrm>
+          <a:prstGeom prst="rect">
+            <a:avLst/>
+          </a:prstGeom>
+        </p:spPr>
+        <p:txBody>
+          <a:bodyPr vert="horz" lIns="91440" tIns="45720" rIns="91440" bIns="45720" rtlCol="0"/>
+          <a:lstStyle/>
+          <a:p>
+            <a:pPr lvl="0"/>
+            <a:r>
+              <a:rPr lang="en-US" smtClean="0"/>
+              <a:t>Click to edit Master text styles</a:t>
+            </a:r>
+          </a:p>
+          <a:p>
+            <a:pPr lvl="1"/>
+            <a:r>
+              <a:rPr lang="en-US" smtClean="0"/>
+              <a:t>Second level</a:t>
+            </a:r>
+          </a:p>
+          <a:p>
+            <a:pPr lvl="2"/>
+            <a:r>
+              <a:rPr lang="en-US" smtClean="0"/>
+              <a:t>Third level</a:t>
+            </a:r>
+          </a:p>
+          <a:p>
+            <a:pPr lvl="3"/>
+            <a:r>
+              <a:rPr lang="en-US" smtClean="0"/>
+              <a:t>Fourth level</a:t>
+            </a:r>
+          </a:p>
+          <a:p>
+            <a:pPr lvl="4"/>
+            <a:r>
+              <a:rPr lang="en-US" smtClean="0"/>
+              <a:t>Fifth level</a:t>
+            </a:r>
+            <a:endParaRPr lang="en-US"/>
+          </a:p>
+        </p:txBody>
+      </p:sp>
+      <p:sp>
+        <p:nvSpPr>
+          <p:cNvPr id="6" name="Footer Placeholder 5"/>
+          <p:cNvSpPr>
+            <a:spLocks noGrp="1"/>
+          </p:cNvSpPr>
+          <p:nvPr>
+            <p:ph type="ftr" sz="quarter" idx="4"/>
+          </p:nvPr>
+        </p:nvSpPr>
+        <p:spPr>
+          <a:xfrm>
+            <a:off x="0" y="8685213"/>
+            <a:ext cx="2971800" cy="457200"/>
+          </a:xfrm>
+          <a:prstGeom prst="rect">
+            <a:avLst/>
+          </a:prstGeom>
+        </p:spPr>
+        <p:txBody>
+          <a:bodyPr vert="horz" lIns="91440" tIns="45720" rIns="91440" bIns="45720" rtlCol="0" anchor="b"/>
+          <a:lstStyle>
+            <a:lvl1pPr algn="l">
+              <a:defRPr sz="1200"/>
+            </a:lvl1pPr>
+          </a:lstStyle>
+          <a:p>
+            <a:endParaRPr lang="en-US"/>
+          </a:p>
+        </p:txBody>
+      </p:sp>
+      <p:sp>
+        <p:nvSpPr>
+          <p:cNvPr id="7" name="Slide Number Placeholder 6"/>
+          <p:cNvSpPr>
+            <a:spLocks noGrp="1"/>
+          </p:cNvSpPr>
+          <p:nvPr>
+            <p:ph type="sldNum" sz="quarter" idx="5"/>
+          </p:nvPr>
+        </p:nvSpPr>
+        <p:spPr>
+          <a:xfrm>
+            <a:off x="3884613" y="8685213"/>
+            <a:ext cx="2971800" cy="457200"/>
+          </a:xfrm>
+          <a:prstGeom prst="rect">
+            <a:avLst/>
+          </a:prstGeom>
+        </p:spPr>
+        <p:txBody>
+          <a:bodyPr vert="horz" lIns="91440" tIns="45720" rIns="91440" bIns="45720" rtlCol="0" anchor="b"/>
+          <a:lstStyle>
+            <a:lvl1pPr algn="r">
+              <a:defRPr sz="1200"/>
+            </a:lvl1pPr>
+          </a:lstStyle>
+          <a:p>
+            <a:fld id="{BB5E49A5-4136-284D-997B-48E1D791AD67}" type="slidenum">
+              <a:rPr lang="en-US" smtClean="0"/>
+              <a:t>‹#›</a:t>
+            </a:fld>
+            <a:endParaRPr lang="en-US"/>
+          </a:p>
+        </p:txBody>
+      </p:sp>
+    </p:spTree>
+    <p:extLst>
+      <p:ext uri="{BB962C8B-B14F-4D97-AF65-F5344CB8AC3E}">
+        <p14:creationId xmlns:p14="http://schemas.microsoft.com/office/powerpoint/2010/main" val="2623252185"/>
+      </p:ext>
+    </p:extLst>
+  </p:cSld>
+  <p:clrMap bg1="lt1" tx1="dk1" bg2="lt2" tx2="dk2" accent1="accent1" accent2="accent2" accent3="accent3" accent4="accent4" accent5="accent5" accent6="accent6" hlink="hlink" folHlink="folHlink"/>
+  <p:notesStyle>
+    <a:lvl1pPr marL="0" algn="l" defTabSz="457200" rtl="0" eaLnBrk="1" latinLnBrk="0" hangingPunct="1">
+      <a:defRPr sz="1200" kern="1200">
+        <a:solidFill>
+          <a:schemeClr val="tx1"/>
+        </a:solidFill>
+        <a:latin typeface="+mn-lt"/>
+        <a:ea typeface="+mn-ea"/>
+        <a:cs typeface="+mn-cs"/>
+      </a:defRPr>
+    </a:lvl1pPr>
+    <a:lvl2pPr marL="457200" algn="l" defTabSz="457200" rtl="0" eaLnBrk="1" latinLnBrk="0" hangingPunct="1">
+      <a:defRPr sz="1200" kern="1200">
+        <a:solidFill>
+          <a:schemeClr val="tx1"/>
+        </a:solidFill>
+        <a:latin typeface="+mn-lt"/>
+        <a:ea typeface="+mn-ea"/>
+        <a:cs typeface="+mn-cs"/>
+      </a:defRPr>
+    </a:lvl2pPr>
+    <a:lvl3pPr marL="914400" algn="l" defTabSz="457200" rtl="0" eaLnBrk="1" latinLnBrk="0" hangingPunct="1">
+      <a:defRPr sz="1200" kern="1200">
+        <a:solidFill>
+          <a:schemeClr val="tx1"/>
+        </a:solidFill>
+        <a:latin typeface="+mn-lt"/>
+        <a:ea typeface="+mn-ea"/>
+        <a:cs typeface="+mn-cs"/>
+      </a:defRPr>
+    </a:lvl3pPr>
+    <a:lvl4pPr marL="1371600" algn="l" defTabSz="457200" rtl="0" eaLnBrk="1" latinLnBrk="0" hangingPunct="1">
+      <a:defRPr sz="1200" kern="1200">
+        <a:solidFill>
+          <a:schemeClr val="tx1"/>
+        </a:solidFill>
+        <a:latin typeface="+mn-lt"/>
+        <a:ea typeface="+mn-ea"/>
+        <a:cs typeface="+mn-cs"/>
+      </a:defRPr>
+    </a:lvl4pPr>
+    <a:lvl5pPr marL="1828800" algn="l" defTabSz="457200" rtl="0" eaLnBrk="1" latinLnBrk="0" hangingPunct="1">
+      <a:defRPr sz="1200" kern="1200">
+        <a:solidFill>
+          <a:schemeClr val="tx1"/>
+        </a:solidFill>
+        <a:latin typeface="+mn-lt"/>
+        <a:ea typeface="+mn-ea"/>
+        <a:cs typeface="+mn-cs"/>
+      </a:defRPr>
+    </a:lvl5pPr>
+    <a:lvl6pPr marL="2286000" algn="l" defTabSz="457200" rtl="0" eaLnBrk="1" latinLnBrk="0" hangingPunct="1">
+      <a:defRPr sz="1200" kern="1200">
+        <a:solidFill>
+          <a:schemeClr val="tx1"/>
+        </a:solidFill>
+        <a:latin typeface="+mn-lt"/>
+        <a:ea typeface="+mn-ea"/>
+        <a:cs typeface="+mn-cs"/>
+      </a:defRPr>
+    </a:lvl6pPr>
+    <a:lvl7pPr marL="2743200" algn="l" defTabSz="457200" rtl="0" eaLnBrk="1" latinLnBrk="0" hangingPunct="1">
+      <a:defRPr sz="1200" kern="1200">
+        <a:solidFill>
+          <a:schemeClr val="tx1"/>
+        </a:solidFill>
+        <a:latin typeface="+mn-lt"/>
+        <a:ea typeface="+mn-ea"/>
+        <a:cs typeface="+mn-cs"/>
+      </a:defRPr>
+    </a:lvl7pPr>
+    <a:lvl8pPr marL="3200400" algn="l" defTabSz="457200" rtl="0" eaLnBrk="1" latinLnBrk="0" hangingPunct="1">
+      <a:defRPr sz="1200" kern="1200">
+        <a:solidFill>
+          <a:schemeClr val="tx1"/>
+        </a:solidFill>
+        <a:latin typeface="+mn-lt"/>
+        <a:ea typeface="+mn-ea"/>
+        <a:cs typeface="+mn-cs"/>
+      </a:defRPr>
+    </a:lvl8pPr>
+    <a:lvl9pPr marL="3657600" algn="l" defTabSz="457200" rtl="0" eaLnBrk="1" latinLnBrk="0" hangingPunct="1">
+      <a:defRPr sz="1200" kern="1200">
+        <a:solidFill>
+          <a:schemeClr val="tx1"/>
+        </a:solidFill>
+        <a:latin typeface="+mn-lt"/>
+        <a:ea typeface="+mn-ea"/>
+        <a:cs typeface="+mn-cs"/>
+      </a:defRPr>
+    </a:lvl9pPr>
+  </p:notesStyle>
+</p:notesMaster>
+</file>
+
+<file path=ppt/notesSlides/notesSlide1.xml><?xml version="1.0" encoding="utf-8"?>
+<p:notes xmlns:a="http://schemas.openxmlformats.org/drawingml/2006/main" xmlns:p="http://schemas.openxmlformats.org/presentationml/2006/main" xmlns:r="http://schemas.openxmlformats.org/officeDocument/2006/relationships">
+  <p:cSld>
+    <p:spTree>
+      <p:nvGrpSpPr>
+        <p:cNvPr id="1" name=""/>
+        <p:cNvGrpSpPr/>
+        <p:nvPr/>
+      </p:nvGrpSpPr>
+      <p:grpSpPr>
+        <a:xfrm>
+          <a:off x="0" y="0"/>
+          <a:ext cx="0" cy="0"/>
+          <a:chOff x="0" y="0"/>
+          <a:chExt cx="0" cy="0"/>
+        </a:xfrm>
+      </p:grpSpPr>
+      <p:sp>
+        <p:nvSpPr>
+          <p:cNvPr id="2" name="Slide Image Placeholder 1"/>
+          <p:cNvSpPr>
+            <a:spLocks noGrp="1"/>
+          </p:cNvSpPr>
+          <p:nvPr>
+            <p:ph type="sldImg" idx="2"/>
+          </p:nvPr>
+        </p:nvSpPr>
+        <p:spPr/>
+      </p:sp>
+      <p:sp>
+        <p:nvSpPr>
+          <p:cNvPr id="3" name="Notes Placeholder 2"/>
+          <p:cNvSpPr>
+            <a:spLocks noGrp="1"/>
+          </p:cNvSpPr>
+          <p:nvPr>
+            <p:ph type="body" idx="3" sz="quarter"/>
+          </p:nvPr>
+        </p:nvSpPr>
+        <p:spPr/>
+        <p:txBody>
+          <a:bodyPr/>
+          <a:lstStyle/>
+          <a:p>
+            <a:r>
+              <a:t>TerraEmbodiment - Enterprise Product Specification</a:t>
+            </a:r>
+          </a:p>
+          <a:p>
+            <a:r>
+              <a:t>Tagline: Autonomous Ground-Floor Physical AI Actuation &amp; OT Edge Execution</a:t>
+            </a:r>
+          </a:p>
+          <a:p/>
+          <a:p>
+            <a:r>
+              <a:t>Outcome Quote:</a:t>
+            </a:r>
+          </a:p>
+          <a:p>
+            <a:r>
+              <a:t>“Taking action on floor with AI: autonomous or human assisted — controlling PLCs, controllers, robotics, or UAVs directly with TerraAI.” (— THE OUTCOME-BASED REVOLUTION)</a:t>
+            </a:r>
+          </a:p>
+          <a:p/>
+          <a:p>
+            <a:r>
+              <a:t>Executive Overview:</a:t>
+            </a:r>
+          </a:p>
+          <a:p>
+            <a:r>
+              <a:t>TerraEmbodiment bridges cognitive AI decisions with physical reality on the industrial floor. Deploying hardened, containerized edge runtimes directly on industrial IPCs, it injects deterministic setpoints into PLCs, RTUs, robotic manipulators, and autonomous inspection drones, eliminating human risk in dangerous environments.</a:t>
+            </a:r>
+          </a:p>
+          <a:p/>
+          <a:p>
+            <a:r>
+              <a:t>Key Telemetry Metrics:</a:t>
+            </a:r>
+          </a:p>
+          <a:p>
+            <a:r>
+              <a:t>- SWARM DRONE LINK:: 2.4/5.8 GHz Mesh</a:t>
+            </a:r>
+          </a:p>
+          <a:p>
+            <a:r>
+              <a:t>- AGV LOCALIZATION:: SLAM ±2.5cm</a:t>
+            </a:r>
+          </a:p>
+          <a:p>
+            <a:r>
+              <a:t>- SAFETY RATING:: SIL 2 / PL d</a:t>
+            </a:r>
+          </a:p>
+          <a:p>
+            <a:r>
+              <a:t>- CONTROL LATENCY:: 8 ms Deterministic</a:t>
+            </a:r>
+          </a:p>
+        </p:txBody>
+      </p:sp>
+      <p:sp>
+        <p:nvSpPr>
+          <p:cNvPr id="4" name="Slide Number Placeholder 3"/>
+          <p:cNvSpPr>
+            <a:spLocks noGrp="1"/>
+          </p:cNvSpPr>
+          <p:nvPr>
+            <p:ph type="sldNum" idx="5" sz="quarter"/>
+          </p:nvPr>
+        </p:nvSpPr>
+        <p:spPr/>
+      </p:sp>
+    </p:spTree>
+  </p:cSld>
+  <p:clrMapOvr>
+    <a:masterClrMapping/>
+  </p:clrMapOvr>
+</p:notes>
+</file>
+
+<file path=ppt/notesSlides/notesSlide2.xml><?xml version="1.0" encoding="utf-8"?>
+<p:notes xmlns:a="http://schemas.openxmlformats.org/drawingml/2006/main" xmlns:p="http://schemas.openxmlformats.org/presentationml/2006/main" xmlns:r="http://schemas.openxmlformats.org/officeDocument/2006/relationships">
+  <p:cSld>
+    <p:spTree>
+      <p:nvGrpSpPr>
+        <p:cNvPr id="1" name=""/>
+        <p:cNvGrpSpPr/>
+        <p:nvPr/>
+      </p:nvGrpSpPr>
+      <p:grpSpPr>
+        <a:xfrm>
+          <a:off x="0" y="0"/>
+          <a:ext cx="0" cy="0"/>
+          <a:chOff x="0" y="0"/>
+          <a:chExt cx="0" cy="0"/>
+        </a:xfrm>
+      </p:grpSpPr>
+      <p:sp>
+        <p:nvSpPr>
+          <p:cNvPr id="2" name="Slide Image Placeholder 1"/>
+          <p:cNvSpPr>
+            <a:spLocks noGrp="1"/>
+          </p:cNvSpPr>
+          <p:nvPr>
+            <p:ph type="sldImg" idx="2"/>
+          </p:nvPr>
+        </p:nvSpPr>
+        <p:spPr/>
+      </p:sp>
+      <p:sp>
+        <p:nvSpPr>
+          <p:cNvPr id="3" name="Notes Placeholder 2"/>
+          <p:cNvSpPr>
+            <a:spLocks noGrp="1"/>
+          </p:cNvSpPr>
+          <p:nvPr>
+            <p:ph type="body" idx="3" sz="quarter"/>
+          </p:nvPr>
+        </p:nvSpPr>
+        <p:spPr/>
+        <p:txBody>
+          <a:bodyPr/>
+          <a:lstStyle/>
+          <a:p>
+            <a:r>
+              <a:t>TerraEmbodiment - ANSI/ISA-101 Verified Operational Interface</a:t>
+            </a:r>
+          </a:p>
+          <a:p>
+            <a:r>
+              <a:t>Representation: TerraEmbodiment ANSI/ISA-101 Operational Interface &amp; Real-Time System Representation</a:t>
+            </a:r>
+          </a:p>
+          <a:p>
+            <a:r>
+              <a:t>Compliance: ANSI/ISA-101 Verified HMI</a:t>
+            </a:r>
+          </a:p>
+          <a:p>
+            <a:r>
+              <a:t>Asset File: terra_embodiment_isa101_showcase.jpg</a:t>
+            </a:r>
+          </a:p>
+        </p:txBody>
+      </p:sp>
+      <p:sp>
+        <p:nvSpPr>
+          <p:cNvPr id="4" name="Slide Number Placeholder 3"/>
+          <p:cNvSpPr>
+            <a:spLocks noGrp="1"/>
+          </p:cNvSpPr>
+          <p:nvPr>
+            <p:ph type="sldNum" idx="5" sz="quarter"/>
+          </p:nvPr>
+        </p:nvSpPr>
+        <p:spPr/>
+      </p:sp>
+    </p:spTree>
+  </p:cSld>
+  <p:clrMapOvr>
+    <a:masterClrMapping/>
+  </p:clrMapOvr>
+</p:notes>
+</file>
+
+<file path=ppt/notesSlides/notesSlide3.xml><?xml version="1.0" encoding="utf-8"?>
+<p:notes xmlns:a="http://schemas.openxmlformats.org/drawingml/2006/main" xmlns:p="http://schemas.openxmlformats.org/presentationml/2006/main" xmlns:r="http://schemas.openxmlformats.org/officeDocument/2006/relationships">
+  <p:cSld>
+    <p:spTree>
+      <p:nvGrpSpPr>
+        <p:cNvPr id="1" name=""/>
+        <p:cNvGrpSpPr/>
+        <p:nvPr/>
+      </p:nvGrpSpPr>
+      <p:grpSpPr>
+        <a:xfrm>
+          <a:off x="0" y="0"/>
+          <a:ext cx="0" cy="0"/>
+          <a:chOff x="0" y="0"/>
+          <a:chExt cx="0" cy="0"/>
+        </a:xfrm>
+      </p:grpSpPr>
+      <p:sp>
+        <p:nvSpPr>
+          <p:cNvPr id="2" name="Slide Image Placeholder 1"/>
+          <p:cNvSpPr>
+            <a:spLocks noGrp="1"/>
+          </p:cNvSpPr>
+          <p:nvPr>
+            <p:ph type="sldImg" idx="2"/>
+          </p:nvPr>
+        </p:nvSpPr>
+        <p:spPr/>
+      </p:sp>
+      <p:sp>
+        <p:nvSpPr>
+          <p:cNvPr id="3" name="Notes Placeholder 2"/>
+          <p:cNvSpPr>
+            <a:spLocks noGrp="1"/>
+          </p:cNvSpPr>
+          <p:nvPr>
+            <p:ph type="body" idx="3" sz="quarter"/>
+          </p:nvPr>
+        </p:nvSpPr>
+        <p:spPr/>
+        <p:txBody>
+          <a:bodyPr/>
+          <a:lstStyle/>
+          <a:p>
+            <a:r>
+              <a:t>What TerraEmbodiment Will Do:</a:t>
+            </a:r>
+          </a:p>
+          <a:p>
+            <a:r>
+              <a:t>[1] Direct OT Actuation:</a:t>
+            </a:r>
+          </a:p>
+          <a:p>
+            <a:r>
+              <a:t>Sub-millisecond deterministic setpoint injection to industrial field controllers and PLCs.</a:t>
+            </a:r>
+          </a:p>
+          <a:p/>
+          <a:p>
+            <a:r>
+              <a:t>[2] Autonomous / Assisted Execution Modes:</a:t>
+            </a:r>
+          </a:p>
+          <a:p>
+            <a:r>
+              <a:t>Configurable execution governance: from closed-loop autonomy to supervised operator sign-off.</a:t>
+            </a:r>
+          </a:p>
+          <a:p/>
+          <a:p>
+            <a:r>
+              <a:t>[3] Edge-Native Microservices:</a:t>
+            </a:r>
+          </a:p>
+          <a:p>
+            <a:r>
+              <a:t>High-reliability containerized runtime deployed directly on industrial edge IPC hardware.</a:t>
+            </a:r>
+          </a:p>
+          <a:p/>
+          <a:p>
+            <a:r>
+              <a:t>[4] Robotics &amp; UAV Control:</a:t>
+            </a:r>
+          </a:p>
+          <a:p>
+            <a:r>
+              <a:t>Direct mission dispatch and waypoint navigation for inspection drones and robotic crawlers.</a:t>
+            </a:r>
+          </a:p>
+        </p:txBody>
+      </p:sp>
+      <p:sp>
+        <p:nvSpPr>
+          <p:cNvPr id="4" name="Slide Number Placeholder 3"/>
+          <p:cNvSpPr>
+            <a:spLocks noGrp="1"/>
+          </p:cNvSpPr>
+          <p:nvPr>
+            <p:ph type="sldNum" idx="5" sz="quarter"/>
+          </p:nvPr>
+        </p:nvSpPr>
+        <p:spPr/>
+      </p:sp>
+    </p:spTree>
+  </p:cSld>
+  <p:clrMapOvr>
+    <a:masterClrMapping/>
+  </p:clrMapOvr>
+</p:notes>
+</file>
+
+<file path=ppt/notesSlides/notesSlide4.xml><?xml version="1.0" encoding="utf-8"?>
+<p:notes xmlns:a="http://schemas.openxmlformats.org/drawingml/2006/main" xmlns:p="http://schemas.openxmlformats.org/presentationml/2006/main" xmlns:r="http://schemas.openxmlformats.org/officeDocument/2006/relationships">
+  <p:cSld>
+    <p:spTree>
+      <p:nvGrpSpPr>
+        <p:cNvPr id="1" name=""/>
+        <p:cNvGrpSpPr/>
+        <p:nvPr/>
+      </p:nvGrpSpPr>
+      <p:grpSpPr>
+        <a:xfrm>
+          <a:off x="0" y="0"/>
+          <a:ext cx="0" cy="0"/>
+          <a:chOff x="0" y="0"/>
+          <a:chExt cx="0" cy="0"/>
+        </a:xfrm>
+      </p:grpSpPr>
+      <p:sp>
+        <p:nvSpPr>
+          <p:cNvPr id="2" name="Slide Image Placeholder 1"/>
+          <p:cNvSpPr>
+            <a:spLocks noGrp="1"/>
+          </p:cNvSpPr>
+          <p:nvPr>
+            <p:ph type="sldImg" idx="2"/>
+          </p:nvPr>
+        </p:nvSpPr>
+        <p:spPr/>
+      </p:sp>
+      <p:sp>
+        <p:nvSpPr>
+          <p:cNvPr id="3" name="Notes Placeholder 2"/>
+          <p:cNvSpPr>
+            <a:spLocks noGrp="1"/>
+          </p:cNvSpPr>
+          <p:nvPr>
+            <p:ph type="body" idx="3" sz="quarter"/>
+          </p:nvPr>
+        </p:nvSpPr>
+        <p:spPr/>
+        <p:txBody>
+          <a:bodyPr/>
+          <a:lstStyle/>
+          <a:p>
+            <a:r>
+              <a:t>TerraEmbodiment - Operational Use Cases &amp; Field Impact:</a:t>
+            </a:r>
+          </a:p>
+          <a:p>
+            <a:r>
+              <a:t>[Safety &amp; Reduced Manpower] Safety &amp; Reduced Manpower (Hazardous Switchgear Actuation):</a:t>
+            </a:r>
+          </a:p>
+          <a:p>
+            <a:r>
+              <a:t>Racks in/out 33kV circuit breakers and closes earth switches autonomously during arc flash hazard conditions without humans in the room.</a:t>
+            </a:r>
+          </a:p>
+          <a:p/>
+          <a:p>
+            <a:r>
+              <a:t>[Productivity &amp; Machine Safety] Productivity &amp; Machine Safety (CNC Load Reduction):</a:t>
+            </a:r>
+          </a:p>
+          <a:p>
+            <a:r>
+              <a:t>When TerraAI detects high vibration on CNC machines, TerraEmbodiment automatically modulates PLC feed rates to prevent tool breakage.</a:t>
+            </a:r>
+          </a:p>
+          <a:p/>
+          <a:p>
+            <a:r>
+              <a:t>[QA &amp; Autonomous Robotic Inspection] QA &amp; Autonomous Robotic Inspection:</a:t>
+            </a:r>
+          </a:p>
+          <a:p>
+            <a:r>
+              <a:t>Dispatches autonomous robotic crawlers and thermal drones to wash solar panels and locate hot spots without manual workers.</a:t>
+            </a:r>
+          </a:p>
+          <a:p/>
+          <a:p>
+            <a:r>
+              <a:t>[Efficiency] Efficiency (High-Speed Valve Modulation):</a:t>
+            </a:r>
+          </a:p>
+          <a:p>
+            <a:r>
+              <a:t>Directly modulates thermal injection valves and high-pressure pumps to suppress water hammer transients.</a:t>
+            </a:r>
+          </a:p>
+        </p:txBody>
+      </p:sp>
+      <p:sp>
+        <p:nvSpPr>
+          <p:cNvPr id="4" name="Slide Number Placeholder 3"/>
+          <p:cNvSpPr>
+            <a:spLocks noGrp="1"/>
+          </p:cNvSpPr>
+          <p:nvPr>
+            <p:ph type="sldNum" idx="5" sz="quarter"/>
+          </p:nvPr>
+        </p:nvSpPr>
+        <p:spPr/>
+      </p:sp>
+    </p:spTree>
+  </p:cSld>
+  <p:clrMapOvr>
+    <a:masterClrMapping/>
+  </p:clrMapOvr>
+</p:notes>
+</file>
+
+<file path=ppt/notesSlides/notesSlide5.xml><?xml version="1.0" encoding="utf-8"?>
+<p:notes xmlns:a="http://schemas.openxmlformats.org/drawingml/2006/main" xmlns:p="http://schemas.openxmlformats.org/presentationml/2006/main" xmlns:r="http://schemas.openxmlformats.org/officeDocument/2006/relationships">
+  <p:cSld>
+    <p:spTree>
+      <p:nvGrpSpPr>
+        <p:cNvPr id="1" name=""/>
+        <p:cNvGrpSpPr/>
+        <p:nvPr/>
+      </p:nvGrpSpPr>
+      <p:grpSpPr>
+        <a:xfrm>
+          <a:off x="0" y="0"/>
+          <a:ext cx="0" cy="0"/>
+          <a:chOff x="0" y="0"/>
+          <a:chExt cx="0" cy="0"/>
+        </a:xfrm>
+      </p:grpSpPr>
+      <p:sp>
+        <p:nvSpPr>
+          <p:cNvPr id="2" name="Slide Image Placeholder 1"/>
+          <p:cNvSpPr>
+            <a:spLocks noGrp="1"/>
+          </p:cNvSpPr>
+          <p:nvPr>
+            <p:ph type="sldImg" idx="2"/>
+          </p:nvPr>
+        </p:nvSpPr>
+        <p:spPr/>
+      </p:sp>
+      <p:sp>
+        <p:nvSpPr>
+          <p:cNvPr id="3" name="Notes Placeholder 2"/>
+          <p:cNvSpPr>
+            <a:spLocks noGrp="1"/>
+          </p:cNvSpPr>
+          <p:nvPr>
+            <p:ph type="body" idx="3" sz="quarter"/>
+          </p:nvPr>
+        </p:nvSpPr>
+        <p:spPr/>
+        <p:txBody>
+          <a:bodyPr/>
+          <a:lstStyle/>
+          <a:p>
+            <a:r>
+              <a:t>TerraEmbodiment - Architectural Contrast (Legacy SCADA vs Terrestrial Platform):</a:t>
+            </a:r>
+          </a:p>
+          <a:p>
+            <a:r>
+              <a:t>LEGACY:</a:t>
+            </a:r>
+          </a:p>
+          <a:p>
+            <a:r>
+              <a:t>AI systems only provide advisory charts; human technicians must physically walk to switchgear to turn knobs or trip breakers.</a:t>
+            </a:r>
+          </a:p>
+          <a:p/>
+          <a:p>
+            <a:r>
+              <a:t>TERRESTRIAL ADVANTAGE:</a:t>
+            </a:r>
+          </a:p>
+          <a:p>
+            <a:r>
+              <a:t>Closed-loop, deterministic execution straight to industrial bus controllers with microsecond safety boundaries.</a:t>
+            </a:r>
+          </a:p>
+          <a:p/>
+          <a:p>
+            <a:r>
+              <a:t>LEGACY:</a:t>
+            </a:r>
+          </a:p>
+          <a:p>
+            <a:r>
+              <a:t>Fragile cloud-dependent automation that fails whenever plant internet or WAN connectivity drops.</a:t>
+            </a:r>
+          </a:p>
+          <a:p/>
+          <a:p>
+            <a:r>
+              <a:t>TERRESTRIAL ADVANTAGE:</a:t>
+            </a:r>
+          </a:p>
+          <a:p>
+            <a:r>
+              <a:t>Edge-native microservices that continue autonomous local execution even during total WAN blackout.</a:t>
+            </a:r>
+          </a:p>
+          <a:p/>
+          <a:p>
+            <a:r>
+              <a:t>LEGACY:</a:t>
+            </a:r>
+          </a:p>
+          <a:p>
+            <a:r>
+              <a:t>Manual visual inspections requiring staff to climb tall boilers, flare stacks, or live switchyards.</a:t>
+            </a:r>
+          </a:p>
+          <a:p/>
+          <a:p>
+            <a:r>
+              <a:t>TERRESTRIAL ADVANTAGE:</a:t>
+            </a:r>
+          </a:p>
+          <a:p>
+            <a:r>
+              <a:t>Automated dispatch of autonomous UAVs and tracked robots with real-time waypoint guidance.</a:t>
+            </a:r>
+          </a:p>
+        </p:txBody>
+      </p:sp>
+      <p:sp>
+        <p:nvSpPr>
+          <p:cNvPr id="4" name="Slide Number Placeholder 3"/>
+          <p:cNvSpPr>
+            <a:spLocks noGrp="1"/>
+          </p:cNvSpPr>
+          <p:nvPr>
+            <p:ph type="sldNum" idx="5" sz="quarter"/>
+          </p:nvPr>
+        </p:nvSpPr>
+        <p:spPr/>
+      </p:sp>
+    </p:spTree>
+  </p:cSld>
+  <p:clrMapOvr>
+    <a:masterClrMapping/>
+  </p:clrMapOvr>
+</p:notes>
+</file>
+
+<file path=ppt/notesSlides/notesSlide6.xml><?xml version="1.0" encoding="utf-8"?>
+<p:notes xmlns:a="http://schemas.openxmlformats.org/drawingml/2006/main" xmlns:p="http://schemas.openxmlformats.org/presentationml/2006/main" xmlns:r="http://schemas.openxmlformats.org/officeDocument/2006/relationships">
+  <p:cSld>
+    <p:spTree>
+      <p:nvGrpSpPr>
+        <p:cNvPr id="1" name=""/>
+        <p:cNvGrpSpPr/>
+        <p:nvPr/>
+      </p:nvGrpSpPr>
+      <p:grpSpPr>
+        <a:xfrm>
+          <a:off x="0" y="0"/>
+          <a:ext cx="0" cy="0"/>
+          <a:chOff x="0" y="0"/>
+          <a:chExt cx="0" cy="0"/>
+        </a:xfrm>
+      </p:grpSpPr>
+      <p:sp>
+        <p:nvSpPr>
+          <p:cNvPr id="2" name="Slide Image Placeholder 1"/>
+          <p:cNvSpPr>
+            <a:spLocks noGrp="1"/>
+          </p:cNvSpPr>
+          <p:nvPr>
+            <p:ph type="sldImg" idx="2"/>
+          </p:nvPr>
+        </p:nvSpPr>
+        <p:spPr/>
+      </p:sp>
+      <p:sp>
+        <p:nvSpPr>
+          <p:cNvPr id="3" name="Notes Placeholder 2"/>
+          <p:cNvSpPr>
+            <a:spLocks noGrp="1"/>
+          </p:cNvSpPr>
+          <p:nvPr>
+            <p:ph type="body" idx="3" sz="quarter"/>
+          </p:nvPr>
+        </p:nvSpPr>
+        <p:spPr/>
+        <p:txBody>
+          <a:bodyPr/>
+          <a:lstStyle/>
+          <a:p>
+            <a:r>
+              <a:t>TerraEmbodiment - End-to-End System Diagram &amp; Data Pipeline:</a:t>
+            </a:r>
+          </a:p>
+          <a:p/>
+          <a:p>
+            <a:r>
+              <a:t>Layer 01: Spatial LiDAR &amp; Robot Ingestion</a:t>
+            </a:r>
+          </a:p>
+          <a:p>
+            <a:r>
+              <a:t>High-bandwidth sensory acquisition aggregating 2D/3D LiDAR point clouds, depth cameras, joint servo encoders, and IMU inertial sensors.</a:t>
+            </a:r>
+          </a:p>
+          <a:p>
+            <a:r>
+              <a:t>Protocols: ROS2 / DDS Protocol, CANopen / EtherCAT, Safety LiDAR Bus</a:t>
+            </a:r>
+          </a:p>
+          <a:p/>
+          <a:p>
+            <a:r>
+              <a:t>Layer 02: Deterministic Robotic Fabric</a:t>
+            </a:r>
+          </a:p>
+          <a:p>
+            <a:r>
+              <a:t>Sub-5ms spatial point cloud filtering, real-time wheel odometry synchronization, and collision exclusion zone monitoring.</a:t>
+            </a:r>
+          </a:p>
+          <a:p>
+            <a:r>
+              <a:t>Protocols: Deterministic DDS Bus, LiDAR Point-Cloud Stream, Sub-5ms Edge Fabric</a:t>
+            </a:r>
+          </a:p>
+          <a:p/>
+          <a:p>
+            <a:r>
+              <a:t>Layer 03: Spatial SLAM &amp; Fleet Planner</a:t>
+            </a:r>
+          </a:p>
+          <a:p>
+            <a:r>
+              <a:t>Multi-agent cooperative SLAM, dynamic obstacle avoidance, warehouse traffic deadlock resolution, and robotic 6-axis inverse kinematics.</a:t>
+            </a:r>
+          </a:p>
+          <a:p>
+            <a:r>
+              <a:t>Protocols: Dynamic SLAM AI, Fleet Path Planner, Inverse Kinematics</a:t>
+            </a:r>
+          </a:p>
+          <a:p/>
+          <a:p>
+            <a:r>
+              <a:t>Layer 04: Fleet Teleoperation Cockpit</a:t>
+            </a:r>
+          </a:p>
+          <a:p>
+            <a:r>
+              <a:t>Closed-loop AMR velocity drive execution, 6-axis joint torque commands, automatic dock opportunity charging, and ANSI/ISA-101 fleet consoles.</a:t>
+            </a:r>
+          </a:p>
+          <a:p>
+            <a:r>
+              <a:t>Protocols: Drive Velocity Dispatch, Servo Torque Control, ISA-101 Robot Cockpit</a:t>
+            </a:r>
+          </a:p>
+          <a:p/>
+          <a:p>
+            <a:r>
+              <a:t>Pipeline Flow:</a:t>
+            </a:r>
+          </a:p>
+          <a:p>
+            <a:r>
+              <a:t>DATA PIPELINE FLOW: LiDAR &amp; Joint Encoder Telemetry ➔ Deterministic ROS2/DDS Fabric ➔ Multi-Agent Spatial SLAM &amp; Path Planning ➔ Closed-Loop Drive &amp; Servo Actuation (&lt; 5ms)</a:t>
+            </a:r>
+          </a:p>
+        </p:txBody>
+      </p:sp>
+      <p:sp>
+        <p:nvSpPr>
+          <p:cNvPr id="4" name="Slide Number Placeholder 3"/>
+          <p:cNvSpPr>
+            <a:spLocks noGrp="1"/>
+          </p:cNvSpPr>
+          <p:nvPr>
+            <p:ph type="sldNum" idx="5" sz="quarter"/>
+          </p:nvPr>
+        </p:nvSpPr>
+        <p:spPr/>
+      </p:sp>
+    </p:spTree>
+  </p:cSld>
+  <p:clrMapOvr>
+    <a:masterClrMapping/>
+  </p:clrMapOvr>
+</p:notes>
+</file>
+
+<file path=ppt/notesSlides/notesSlide7.xml><?xml version="1.0" encoding="utf-8"?>
+<p:notes xmlns:a="http://schemas.openxmlformats.org/drawingml/2006/main" xmlns:p="http://schemas.openxmlformats.org/presentationml/2006/main" xmlns:r="http://schemas.openxmlformats.org/officeDocument/2006/relationships">
+  <p:cSld>
+    <p:spTree>
+      <p:nvGrpSpPr>
+        <p:cNvPr id="1" name=""/>
+        <p:cNvGrpSpPr/>
+        <p:nvPr/>
+      </p:nvGrpSpPr>
+      <p:grpSpPr>
+        <a:xfrm>
+          <a:off x="0" y="0"/>
+          <a:ext cx="0" cy="0"/>
+          <a:chOff x="0" y="0"/>
+          <a:chExt cx="0" cy="0"/>
+        </a:xfrm>
+      </p:grpSpPr>
+      <p:sp>
+        <p:nvSpPr>
+          <p:cNvPr id="2" name="Slide Image Placeholder 1"/>
+          <p:cNvSpPr>
+            <a:spLocks noGrp="1"/>
+          </p:cNvSpPr>
+          <p:nvPr>
+            <p:ph type="sldImg" idx="2"/>
+          </p:nvPr>
+        </p:nvSpPr>
+        <p:spPr/>
+      </p:sp>
+      <p:sp>
+        <p:nvSpPr>
+          <p:cNvPr id="3" name="Notes Placeholder 2"/>
+          <p:cNvSpPr>
+            <a:spLocks noGrp="1"/>
+          </p:cNvSpPr>
+          <p:nvPr>
+            <p:ph type="body" idx="3" sz="quarter"/>
+          </p:nvPr>
+        </p:nvSpPr>
+        <p:spPr/>
+        <p:txBody>
+          <a:bodyPr/>
+          <a:lstStyle/>
+          <a:p>
+            <a:r>
+              <a:t>TerraEmbodiment - System Integrator Deployment Framework &amp; Commercial Model:</a:t>
+            </a:r>
+          </a:p>
+          <a:p/>
+          <a:p>
+            <a:r>
+              <a:t>Phase 1: Connectivity &amp; Audit</a:t>
+            </a:r>
+          </a:p>
+          <a:p>
+            <a:r>
+              <a:t>Phase 2: Twin Calibration</a:t>
+            </a:r>
+          </a:p>
+          <a:p>
+            <a:r>
+              <a:t>Phase 3: Autonomous Go-Live</a:t>
+            </a:r>
+          </a:p>
+          <a:p/>
+          <a:p>
+            <a:r>
+              <a:t>Commercial Enablement:</a:t>
+            </a:r>
+          </a:p>
+          <a:p>
+            <a:r>
+              <a:t>- 25%-35% recurring SaaS margins</a:t>
+            </a:r>
+          </a:p>
+          <a:p>
+            <a:r>
+              <a:t>- 7-14 day rapid commissioning</a:t>
+            </a:r>
+          </a:p>
+          <a:p>
+            <a:r>
+              <a:t>- Co-selling and enterprise enablement support</a:t>
+            </a:r>
+          </a:p>
+        </p:txBody>
+      </p:sp>
+      <p:sp>
+        <p:nvSpPr>
+          <p:cNvPr id="4" name="Slide Number Placeholder 3"/>
+          <p:cNvSpPr>
+            <a:spLocks noGrp="1"/>
+          </p:cNvSpPr>
+          <p:nvPr>
+            <p:ph type="sldNum" idx="5" sz="quarter"/>
+          </p:nvPr>
+        </p:nvSpPr>
+        <p:spPr/>
+      </p:sp>
+    </p:spTree>
+  </p:cSld>
+  <p:clrMapOvr>
+    <a:masterClrMapping/>
+  </p:clrMapOvr>
+</p:notes>
 </file>
 
 <file path=ppt/slideLayouts/slideLayout1.xml><?xml version="1.0" encoding="utf-8"?>
@@ -3108,7 +4280,7 @@
             <a:avLst/>
           </a:prstGeom>
           <a:solidFill>
-            <a:srgbClr val="0A0E1A"/>
+            <a:srgbClr val="0B0F17"/>
           </a:solidFill>
           <a:ln>
             <a:noFill/>
@@ -3144,17 +4316,19 @@
         </p:nvSpPr>
         <p:spPr>
           <a:xfrm>
-            <a:off x="0" y="0"/>
-            <a:ext cx="12191695" cy="54864"/>
+            <a:off x="731520" y="365760"/>
+            <a:ext cx="10728655" cy="18288"/>
           </a:xfrm>
           <a:prstGeom prst="rect">
             <a:avLst/>
           </a:prstGeom>
           <a:solidFill>
-            <a:srgbClr val="00D4FF"/>
+            <a:srgbClr val="38BDF8"/>
           </a:solidFill>
           <a:ln>
-            <a:noFill/>
+            <a:solidFill>
+              <a:srgbClr val="38BDF8"/>
+            </a:solidFill>
           </a:ln>
         </p:spPr>
         <p:style>
@@ -3187,8 +4361,8 @@
         </p:nvSpPr>
         <p:spPr>
           <a:xfrm>
-            <a:off x="731520" y="6446520"/>
-            <a:ext cx="10698480" cy="320040"/>
+            <a:off x="731520" y="438912"/>
+            <a:ext cx="8229600" cy="274320"/>
           </a:xfrm>
           <a:prstGeom prst="rect">
             <a:avLst/>
@@ -3196,20 +4370,20 @@
           <a:noFill/>
         </p:spPr>
         <p:txBody>
-          <a:bodyPr wrap="none">
+          <a:bodyPr wrap="square" lIns="0" rIns="0" tIns="0" bIns="0">
             <a:spAutoFit/>
           </a:bodyPr>
           <a:lstStyle/>
           <a:p>
             <a:pPr>
-              <a:defRPr sz="1000">
-                <a:solidFill>
-                  <a:srgbClr val="94A3B8"/>
-                </a:solidFill>
-              </a:defRPr>
-            </a:pPr>
-            <a:r>
-              <a:t>TERRESTRIAL PLATFORM  |  TERRAEMBODIMENT CATALOGUE  |  CONFIDENTIAL - AUTHORISED SYSTEM INTEGRATORS ONLY</a:t>
+              <a:defRPr sz="950" b="1">
+                <a:solidFill>
+                  <a:srgbClr val="38BDF8"/>
+                </a:solidFill>
+              </a:defRPr>
+            </a:pPr>
+            <a:r>
+              <a:t>TERRESTRIAL PLATFORM  |  TERRAEMBODIMENT  |  ENTERPRISE SPECIFICATION</a:t>
             </a:r>
           </a:p>
         </p:txBody>
@@ -3222,8 +4396,8 @@
         </p:nvSpPr>
         <p:spPr>
           <a:xfrm>
-            <a:off x="731520" y="777240"/>
-            <a:ext cx="10698480" cy="3474720"/>
+            <a:off x="731520" y="731520"/>
+            <a:ext cx="9601200" cy="777240"/>
           </a:xfrm>
           <a:prstGeom prst="rect">
             <a:avLst/>
@@ -3231,104 +4405,83 @@
           <a:noFill/>
         </p:spPr>
         <p:txBody>
-          <a:bodyPr wrap="square">
+          <a:bodyPr wrap="square" lIns="0" rIns="0" tIns="0" bIns="0">
             <a:spAutoFit/>
           </a:bodyPr>
           <a:lstStyle/>
           <a:p>
             <a:pPr>
-              <a:spcAft>
-                <a:spcPts val="800"/>
-              </a:spcAft>
-              <a:defRPr sz="1250" b="1">
-                <a:solidFill>
-                  <a:srgbClr val="00D4FF"/>
-                </a:solidFill>
-              </a:defRPr>
-            </a:pPr>
-            <a:r>
-              <a:t>ENTERPRISE PRODUCT SPECIFICATION  |  AUTONOMOUS AI &amp; SWARMS</a:t>
-            </a:r>
-          </a:p>
-          <a:p>
-            <a:pPr>
-              <a:spcAft>
-                <a:spcPts val="600"/>
-              </a:spcAft>
-              <a:defRPr sz="4600" b="1">
+              <a:defRPr sz="1900" b="1">
                 <a:solidFill>
                   <a:srgbClr val="FFFFFF"/>
                 </a:solidFill>
               </a:defRPr>
             </a:pPr>
             <a:r>
-              <a:t>TerraEmbodiment</a:t>
-            </a:r>
-          </a:p>
-          <a:p>
-            <a:pPr>
-              <a:spcAft>
-                <a:spcPts val="1200"/>
-              </a:spcAft>
-              <a:defRPr sz="1900" b="1">
-                <a:solidFill>
-                  <a:srgbClr val="F5C842"/>
-                </a:solidFill>
-              </a:defRPr>
-            </a:pPr>
-            <a:r>
-              <a:t>Autonomous Ground-Floor Physical AI Actuation &amp; OT Edge Execution</a:t>
-            </a:r>
-          </a:p>
-          <a:p>
-            <a:pPr>
-              <a:spcAft>
-                <a:spcPts val="1200"/>
-              </a:spcAft>
-              <a:defRPr sz="1400">
-                <a:solidFill>
-                  <a:srgbClr val="C8D8F0"/>
-                </a:solidFill>
-              </a:defRPr>
-            </a:pPr>
-            <a:r>
-              <a:t>Industrial Protocol: IEC 61850 GOOSE    |    Domain Architecture: Terrestrial Deterministic Edge Core</a:t>
-            </a:r>
-          </a:p>
-          <a:p>
-            <a:pPr>
-              <a:defRPr sz="1500">
+              <a:t>TerraEmbodiment: Autonomous Ground-Floor Physical AI Actuation &amp; OT Edge Execution</a:t>
+            </a:r>
+          </a:p>
+          <a:p>
+            <a:pPr>
+              <a:spcBef>
+                <a:spcPts val="300"/>
+              </a:spcBef>
+              <a:defRPr sz="1050">
                 <a:solidFill>
                   <a:srgbClr val="94A3B8"/>
                 </a:solidFill>
               </a:defRPr>
             </a:pPr>
             <a:r>
-              <a:t>Autonomous Ground-Floor Physical AI Actuation &amp; OT Edge Execution</a:t>
-            </a:r>
-          </a:p>
-        </p:txBody>
-      </p:sp>
-      <p:sp>
-        <p:nvSpPr>
-          <p:cNvPr id="6" name="Rounded Rectangle 5"/>
+              <a:t>Autonomous Industrial Intelligence Suite · Tier-1 Plant Architecture</a:t>
+            </a:r>
+          </a:p>
+        </p:txBody>
+      </p:sp>
+      <p:pic>
+        <p:nvPicPr>
+          <p:cNvPr id="6" name="Picture 5" descr="tp_logo_white.png"/>
+          <p:cNvPicPr>
+            <a:picLocks noChangeAspect="1"/>
+          </p:cNvPicPr>
+          <p:nvPr/>
+        </p:nvPicPr>
+        <p:blipFill>
+          <a:blip r:embed="rId2"/>
+          <a:stretch>
+            <a:fillRect/>
+          </a:stretch>
+        </p:blipFill>
+        <p:spPr>
+          <a:xfrm>
+            <a:off x="10469880" y="411480"/>
+            <a:ext cx="987552" cy="384048"/>
+          </a:xfrm>
+          <a:prstGeom prst="rect">
+            <a:avLst/>
+          </a:prstGeom>
+        </p:spPr>
+      </p:pic>
+      <p:sp>
+        <p:nvSpPr>
+          <p:cNvPr id="7" name="Rounded Rectangle 6"/>
           <p:cNvSpPr/>
           <p:nvPr/>
         </p:nvSpPr>
         <p:spPr>
           <a:xfrm>
-            <a:off x="731520" y="4663440"/>
-            <a:ext cx="2523744" cy="1280160"/>
+            <a:off x="731520" y="1691640"/>
+            <a:ext cx="6217920" cy="4663440"/>
           </a:xfrm>
           <a:prstGeom prst="roundRect">
             <a:avLst/>
           </a:prstGeom>
           <a:solidFill>
-            <a:srgbClr val="0F172A"/>
+            <a:srgbClr val="131926"/>
           </a:solidFill>
-          <a:ln>
+          <a:ln w="12700">
             <a:solidFill>
-              <a:srgbClr val="1E293B"/>
+              <a:srgbClr val="28344B"/>
             </a:solidFill>
           </a:ln>
         </p:spPr>
@@ -3347,57 +4500,113 @@
           </a:fontRef>
         </p:style>
         <p:txBody>
-          <a:bodyPr rtlCol="0" anchor="ctr" wrap="square"/>
-          <a:lstStyle/>
-          <a:p>
-            <a:pPr algn="ctr">
+          <a:bodyPr rtlCol="0" anchor="ctr"/>
+          <a:lstStyle/>
+          <a:p>
+            <a:pPr algn="ctr"/>
+          </a:p>
+        </p:txBody>
+      </p:sp>
+      <p:sp>
+        <p:nvSpPr>
+          <p:cNvPr id="8" name="TextBox 7"/>
+          <p:cNvSpPr txBox="1"/>
+          <p:nvPr/>
+        </p:nvSpPr>
+        <p:spPr>
+          <a:xfrm>
+            <a:off x="960120" y="1874519"/>
+            <a:ext cx="5760720" cy="4297680"/>
+          </a:xfrm>
+          <a:prstGeom prst="rect">
+            <a:avLst/>
+          </a:prstGeom>
+          <a:noFill/>
+        </p:spPr>
+        <p:txBody>
+          <a:bodyPr wrap="square" lIns="0" rIns="0" tIns="0" bIns="0">
+            <a:spAutoFit/>
+          </a:bodyPr>
+          <a:lstStyle/>
+          <a:p>
+            <a:pPr>
+              <a:defRPr sz="1200" i="1" b="1">
+                <a:solidFill>
+                  <a:srgbClr val="38BDF8"/>
+                </a:solidFill>
+              </a:defRPr>
+            </a:pPr>
+            <a:r>
+              <a:t>““Taking action on floor with AI: autonomous or human assisted — controlling PLCs, controllers, robotics, or UAVs directly with TerraAI.””</a:t>
+            </a:r>
+          </a:p>
+          <a:p>
+            <a:pPr>
+              <a:spcBef>
+                <a:spcPts val="400"/>
+              </a:spcBef>
+              <a:spcAft>
+                <a:spcPts val="1200"/>
+              </a:spcAft>
+              <a:defRPr sz="950" b="1">
+                <a:solidFill>
+                  <a:srgbClr val="94A3B8"/>
+                </a:solidFill>
+              </a:defRPr>
+            </a:pPr>
+            <a:r>
+              <a:t>— — THE OUTCOME-BASED REVOLUTION</a:t>
+            </a:r>
+          </a:p>
+          <a:p>
+            <a:pPr>
               <a:spcAft>
                 <a:spcPts val="600"/>
               </a:spcAft>
-              <a:defRPr sz="1100" b="1">
-                <a:solidFill>
-                  <a:srgbClr val="94A3B8"/>
-                </a:solidFill>
-              </a:defRPr>
-            </a:pPr>
-            <a:r>
-              <a:t>SWARM DRONE LINK</a:t>
-            </a:r>
-          </a:p>
-          <a:p>
-            <a:pPr algn="ctr">
-              <a:defRPr sz="1650" b="1">
-                <a:solidFill>
-                  <a:srgbClr val="00D4FF"/>
-                </a:solidFill>
-              </a:defRPr>
-            </a:pPr>
-            <a:r>
-              <a:t>2.4/5.8 GHz Mesh</a:t>
-            </a:r>
-          </a:p>
-        </p:txBody>
-      </p:sp>
-      <p:sp>
-        <p:nvSpPr>
-          <p:cNvPr id="7" name="Rounded Rectangle 6"/>
+              <a:defRPr sz="1050" b="1">
+                <a:solidFill>
+                  <a:srgbClr val="FFFFFF"/>
+                </a:solidFill>
+              </a:defRPr>
+            </a:pPr>
+            <a:r>
+              <a:t>EXECUTIVE OPERATIONAL SYNOPSIS</a:t>
+            </a:r>
+          </a:p>
+          <a:p>
+            <a:pPr>
+              <a:defRPr sz="1050">
+                <a:solidFill>
+                  <a:srgbClr val="F1F5F9"/>
+                </a:solidFill>
+              </a:defRPr>
+            </a:pPr>
+            <a:r>
+              <a:t>TerraEmbodiment bridges cognitive AI decisions with physical reality on the industrial floor. Deploying hardened, containerized edge runtimes directly on industrial IPCs, it injects deterministic setpoints into PLCs, RTUs, robotic manipulators, and autonomous inspection drones, eliminating human risk in dangerous environments.</a:t>
+            </a:r>
+          </a:p>
+        </p:txBody>
+      </p:sp>
+      <p:sp>
+        <p:nvSpPr>
+          <p:cNvPr id="9" name="Rounded Rectangle 8"/>
           <p:cNvSpPr/>
           <p:nvPr/>
         </p:nvSpPr>
         <p:spPr>
           <a:xfrm>
-            <a:off x="3456432" y="4663440"/>
-            <a:ext cx="2523744" cy="1280160"/>
+            <a:off x="7132320" y="1691640"/>
+            <a:ext cx="2084831" cy="1188720"/>
           </a:xfrm>
           <a:prstGeom prst="roundRect">
             <a:avLst/>
           </a:prstGeom>
           <a:solidFill>
-            <a:srgbClr val="0F172A"/>
+            <a:srgbClr val="131926"/>
           </a:solidFill>
-          <a:ln>
+          <a:ln w="12700">
             <a:solidFill>
-              <a:srgbClr val="1E293B"/>
+              <a:srgbClr val="38BDF8"/>
             </a:solidFill>
           </a:ln>
         </p:spPr>
@@ -3416,57 +4625,83 @@
           </a:fontRef>
         </p:style>
         <p:txBody>
-          <a:bodyPr rtlCol="0" anchor="ctr" wrap="square"/>
-          <a:lstStyle/>
-          <a:p>
-            <a:pPr algn="ctr">
-              <a:spcAft>
-                <a:spcPts val="600"/>
-              </a:spcAft>
-              <a:defRPr sz="1100" b="1">
+          <a:bodyPr rtlCol="0" anchor="ctr"/>
+          <a:lstStyle/>
+          <a:p>
+            <a:pPr algn="ctr"/>
+          </a:p>
+        </p:txBody>
+      </p:sp>
+      <p:sp>
+        <p:nvSpPr>
+          <p:cNvPr id="10" name="TextBox 9"/>
+          <p:cNvSpPr txBox="1"/>
+          <p:nvPr/>
+        </p:nvSpPr>
+        <p:spPr>
+          <a:xfrm>
+            <a:off x="7269480" y="1828800"/>
+            <a:ext cx="1810511" cy="914400"/>
+          </a:xfrm>
+          <a:prstGeom prst="rect">
+            <a:avLst/>
+          </a:prstGeom>
+          <a:noFill/>
+        </p:spPr>
+        <p:txBody>
+          <a:bodyPr wrap="square" lIns="0" rIns="0" tIns="0" bIns="0">
+            <a:spAutoFit/>
+          </a:bodyPr>
+          <a:lstStyle/>
+          <a:p>
+            <a:pPr>
+              <a:defRPr sz="850" b="1">
                 <a:solidFill>
                   <a:srgbClr val="94A3B8"/>
                 </a:solidFill>
               </a:defRPr>
             </a:pPr>
             <a:r>
-              <a:t>AGV LOCALIZATION</a:t>
-            </a:r>
-          </a:p>
-          <a:p>
-            <a:pPr algn="ctr">
-              <a:defRPr sz="1650" b="1">
-                <a:solidFill>
-                  <a:srgbClr val="00D4FF"/>
-                </a:solidFill>
-              </a:defRPr>
-            </a:pPr>
-            <a:r>
-              <a:t>SLAM ±2.5cm</a:t>
-            </a:r>
-          </a:p>
-        </p:txBody>
-      </p:sp>
-      <p:sp>
-        <p:nvSpPr>
-          <p:cNvPr id="8" name="Rounded Rectangle 7"/>
+              <a:t>SWARM DRONE LINK</a:t>
+            </a:r>
+          </a:p>
+          <a:p>
+            <a:pPr>
+              <a:spcBef>
+                <a:spcPts val="400"/>
+              </a:spcBef>
+              <a:defRPr sz="1400" b="1">
+                <a:solidFill>
+                  <a:srgbClr val="FFFFFF"/>
+                </a:solidFill>
+              </a:defRPr>
+            </a:pPr>
+            <a:r>
+              <a:t>2.4/5.8 GHz Mesh</a:t>
+            </a:r>
+          </a:p>
+        </p:txBody>
+      </p:sp>
+      <p:sp>
+        <p:nvSpPr>
+          <p:cNvPr id="11" name="Rounded Rectangle 10"/>
           <p:cNvSpPr/>
           <p:nvPr/>
         </p:nvSpPr>
         <p:spPr>
           <a:xfrm>
-            <a:off x="6181344" y="4663440"/>
-            <a:ext cx="2523744" cy="1280160"/>
+            <a:off x="9381743" y="1691640"/>
+            <a:ext cx="2084831" cy="1188720"/>
           </a:xfrm>
           <a:prstGeom prst="roundRect">
             <a:avLst/>
           </a:prstGeom>
           <a:solidFill>
-            <a:srgbClr val="0F172A"/>
+            <a:srgbClr val="131926"/>
           </a:solidFill>
-          <a:ln>
+          <a:ln w="12700">
             <a:solidFill>
-              <a:srgbClr val="1E293B"/>
+              <a:srgbClr val="38BDF8"/>
             </a:solidFill>
           </a:ln>
         </p:spPr>
@@ -3485,57 +4720,83 @@
           </a:fontRef>
         </p:style>
         <p:txBody>
-          <a:bodyPr rtlCol="0" anchor="ctr" wrap="square"/>
-          <a:lstStyle/>
-          <a:p>
-            <a:pPr algn="ctr">
-              <a:spcAft>
-                <a:spcPts val="600"/>
-              </a:spcAft>
-              <a:defRPr sz="1100" b="1">
+          <a:bodyPr rtlCol="0" anchor="ctr"/>
+          <a:lstStyle/>
+          <a:p>
+            <a:pPr algn="ctr"/>
+          </a:p>
+        </p:txBody>
+      </p:sp>
+      <p:sp>
+        <p:nvSpPr>
+          <p:cNvPr id="12" name="TextBox 11"/>
+          <p:cNvSpPr txBox="1"/>
+          <p:nvPr/>
+        </p:nvSpPr>
+        <p:spPr>
+          <a:xfrm>
+            <a:off x="9518903" y="1828800"/>
+            <a:ext cx="1810511" cy="914400"/>
+          </a:xfrm>
+          <a:prstGeom prst="rect">
+            <a:avLst/>
+          </a:prstGeom>
+          <a:noFill/>
+        </p:spPr>
+        <p:txBody>
+          <a:bodyPr wrap="square" lIns="0" rIns="0" tIns="0" bIns="0">
+            <a:spAutoFit/>
+          </a:bodyPr>
+          <a:lstStyle/>
+          <a:p>
+            <a:pPr>
+              <a:defRPr sz="850" b="1">
                 <a:solidFill>
                   <a:srgbClr val="94A3B8"/>
                 </a:solidFill>
               </a:defRPr>
             </a:pPr>
             <a:r>
-              <a:t>SAFETY RATING</a:t>
-            </a:r>
-          </a:p>
-          <a:p>
-            <a:pPr algn="ctr">
-              <a:defRPr sz="1650" b="1">
-                <a:solidFill>
-                  <a:srgbClr val="00D4FF"/>
-                </a:solidFill>
-              </a:defRPr>
-            </a:pPr>
-            <a:r>
-              <a:t>SIL 2 / PL d</a:t>
-            </a:r>
-          </a:p>
-        </p:txBody>
-      </p:sp>
-      <p:sp>
-        <p:nvSpPr>
-          <p:cNvPr id="9" name="Rounded Rectangle 8"/>
+              <a:t>AGV LOCALIZATION</a:t>
+            </a:r>
+          </a:p>
+          <a:p>
+            <a:pPr>
+              <a:spcBef>
+                <a:spcPts val="400"/>
+              </a:spcBef>
+              <a:defRPr sz="1400" b="1">
+                <a:solidFill>
+                  <a:srgbClr val="FFFFFF"/>
+                </a:solidFill>
+              </a:defRPr>
+            </a:pPr>
+            <a:r>
+              <a:t>SLAM ±2.5cm</a:t>
+            </a:r>
+          </a:p>
+        </p:txBody>
+      </p:sp>
+      <p:sp>
+        <p:nvSpPr>
+          <p:cNvPr id="13" name="Rounded Rectangle 12"/>
           <p:cNvSpPr/>
           <p:nvPr/>
         </p:nvSpPr>
         <p:spPr>
           <a:xfrm>
-            <a:off x="8906256" y="4663440"/>
-            <a:ext cx="2523744" cy="1280160"/>
+            <a:off x="7132320" y="3044952"/>
+            <a:ext cx="2084831" cy="1188720"/>
           </a:xfrm>
           <a:prstGeom prst="roundRect">
             <a:avLst/>
           </a:prstGeom>
           <a:solidFill>
-            <a:srgbClr val="0F172A"/>
+            <a:srgbClr val="131926"/>
           </a:solidFill>
-          <a:ln>
+          <a:ln w="12700">
             <a:solidFill>
-              <a:srgbClr val="1E293B"/>
+              <a:srgbClr val="38BDF8"/>
             </a:solidFill>
           </a:ln>
         </p:spPr>
@@ -3554,33 +4815,264 @@
           </a:fontRef>
         </p:style>
         <p:txBody>
-          <a:bodyPr rtlCol="0" anchor="ctr" wrap="square"/>
-          <a:lstStyle/>
-          <a:p>
-            <a:pPr algn="ctr">
-              <a:spcAft>
-                <a:spcPts val="600"/>
-              </a:spcAft>
+          <a:bodyPr rtlCol="0" anchor="ctr"/>
+          <a:lstStyle/>
+          <a:p>
+            <a:pPr algn="ctr"/>
+          </a:p>
+        </p:txBody>
+      </p:sp>
+      <p:sp>
+        <p:nvSpPr>
+          <p:cNvPr id="14" name="TextBox 13"/>
+          <p:cNvSpPr txBox="1"/>
+          <p:nvPr/>
+        </p:nvSpPr>
+        <p:spPr>
+          <a:xfrm>
+            <a:off x="7269480" y="3182112"/>
+            <a:ext cx="1810511" cy="914400"/>
+          </a:xfrm>
+          <a:prstGeom prst="rect">
+            <a:avLst/>
+          </a:prstGeom>
+          <a:noFill/>
+        </p:spPr>
+        <p:txBody>
+          <a:bodyPr wrap="square" lIns="0" rIns="0" tIns="0" bIns="0">
+            <a:spAutoFit/>
+          </a:bodyPr>
+          <a:lstStyle/>
+          <a:p>
+            <a:pPr>
+              <a:defRPr sz="850" b="1">
+                <a:solidFill>
+                  <a:srgbClr val="94A3B8"/>
+                </a:solidFill>
+              </a:defRPr>
+            </a:pPr>
+            <a:r>
+              <a:t>SAFETY RATING</a:t>
+            </a:r>
+          </a:p>
+          <a:p>
+            <a:pPr>
+              <a:spcBef>
+                <a:spcPts val="400"/>
+              </a:spcBef>
+              <a:defRPr sz="1400" b="1">
+                <a:solidFill>
+                  <a:srgbClr val="FFFFFF"/>
+                </a:solidFill>
+              </a:defRPr>
+            </a:pPr>
+            <a:r>
+              <a:t>SIL 2 / PL d</a:t>
+            </a:r>
+          </a:p>
+        </p:txBody>
+      </p:sp>
+      <p:sp>
+        <p:nvSpPr>
+          <p:cNvPr id="15" name="Rounded Rectangle 14"/>
+          <p:cNvSpPr/>
+          <p:nvPr/>
+        </p:nvSpPr>
+        <p:spPr>
+          <a:xfrm>
+            <a:off x="9381743" y="3044952"/>
+            <a:ext cx="2084831" cy="1188720"/>
+          </a:xfrm>
+          <a:prstGeom prst="roundRect">
+            <a:avLst/>
+          </a:prstGeom>
+          <a:solidFill>
+            <a:srgbClr val="131926"/>
+          </a:solidFill>
+          <a:ln w="12700">
+            <a:solidFill>
+              <a:srgbClr val="38BDF8"/>
+            </a:solidFill>
+          </a:ln>
+        </p:spPr>
+        <p:style>
+          <a:lnRef idx="1">
+            <a:schemeClr val="accent1"/>
+          </a:lnRef>
+          <a:fillRef idx="3">
+            <a:schemeClr val="accent1"/>
+          </a:fillRef>
+          <a:effectRef idx="2">
+            <a:schemeClr val="accent1"/>
+          </a:effectRef>
+          <a:fontRef idx="minor">
+            <a:schemeClr val="lt1"/>
+          </a:fontRef>
+        </p:style>
+        <p:txBody>
+          <a:bodyPr rtlCol="0" anchor="ctr"/>
+          <a:lstStyle/>
+          <a:p>
+            <a:pPr algn="ctr"/>
+          </a:p>
+        </p:txBody>
+      </p:sp>
+      <p:sp>
+        <p:nvSpPr>
+          <p:cNvPr id="16" name="TextBox 15"/>
+          <p:cNvSpPr txBox="1"/>
+          <p:nvPr/>
+        </p:nvSpPr>
+        <p:spPr>
+          <a:xfrm>
+            <a:off x="9518903" y="3182112"/>
+            <a:ext cx="1810511" cy="914400"/>
+          </a:xfrm>
+          <a:prstGeom prst="rect">
+            <a:avLst/>
+          </a:prstGeom>
+          <a:noFill/>
+        </p:spPr>
+        <p:txBody>
+          <a:bodyPr wrap="square" lIns="0" rIns="0" tIns="0" bIns="0">
+            <a:spAutoFit/>
+          </a:bodyPr>
+          <a:lstStyle/>
+          <a:p>
+            <a:pPr>
+              <a:defRPr sz="850" b="1">
+                <a:solidFill>
+                  <a:srgbClr val="94A3B8"/>
+                </a:solidFill>
+              </a:defRPr>
+            </a:pPr>
+            <a:r>
+              <a:t>CONTROL LATENCY</a:t>
+            </a:r>
+          </a:p>
+          <a:p>
+            <a:pPr>
+              <a:spcBef>
+                <a:spcPts val="400"/>
+              </a:spcBef>
+              <a:defRPr sz="1400" b="1">
+                <a:solidFill>
+                  <a:srgbClr val="38BDF8"/>
+                </a:solidFill>
+              </a:defRPr>
+            </a:pPr>
+            <a:r>
+              <a:t>8 ms Deterministic</a:t>
+            </a:r>
+          </a:p>
+        </p:txBody>
+      </p:sp>
+      <p:sp>
+        <p:nvSpPr>
+          <p:cNvPr id="17" name="Rounded Rectangle 16"/>
+          <p:cNvSpPr/>
+          <p:nvPr/>
+        </p:nvSpPr>
+        <p:spPr>
+          <a:xfrm>
+            <a:off x="7132320" y="4434840"/>
+            <a:ext cx="4334256" cy="1920240"/>
+          </a:xfrm>
+          <a:prstGeom prst="roundRect">
+            <a:avLst/>
+          </a:prstGeom>
+          <a:solidFill>
+            <a:srgbClr val="131926"/>
+          </a:solidFill>
+          <a:ln w="12700">
+            <a:solidFill>
+              <a:srgbClr val="28344B"/>
+            </a:solidFill>
+          </a:ln>
+        </p:spPr>
+        <p:style>
+          <a:lnRef idx="1">
+            <a:schemeClr val="accent1"/>
+          </a:lnRef>
+          <a:fillRef idx="3">
+            <a:schemeClr val="accent1"/>
+          </a:fillRef>
+          <a:effectRef idx="2">
+            <a:schemeClr val="accent1"/>
+          </a:effectRef>
+          <a:fontRef idx="minor">
+            <a:schemeClr val="lt1"/>
+          </a:fontRef>
+        </p:style>
+        <p:txBody>
+          <a:bodyPr rtlCol="0" anchor="ctr"/>
+          <a:lstStyle/>
+          <a:p>
+            <a:pPr algn="ctr"/>
+          </a:p>
+        </p:txBody>
+      </p:sp>
+      <p:sp>
+        <p:nvSpPr>
+          <p:cNvPr id="18" name="TextBox 17"/>
+          <p:cNvSpPr txBox="1"/>
+          <p:nvPr/>
+        </p:nvSpPr>
+        <p:spPr>
+          <a:xfrm>
+            <a:off x="7360920" y="4617720"/>
+            <a:ext cx="3840480" cy="1554480"/>
+          </a:xfrm>
+          <a:prstGeom prst="rect">
+            <a:avLst/>
+          </a:prstGeom>
+          <a:noFill/>
+        </p:spPr>
+        <p:txBody>
+          <a:bodyPr wrap="square" lIns="0" rIns="0" tIns="0" bIns="0">
+            <a:spAutoFit/>
+          </a:bodyPr>
+          <a:lstStyle/>
+          <a:p>
+            <a:pPr>
+              <a:defRPr sz="950" b="1">
+                <a:solidFill>
+                  <a:srgbClr val="38BDF8"/>
+                </a:solidFill>
+              </a:defRPr>
+            </a:pPr>
+            <a:r>
+              <a:t>TERRESTRIAL PLATFORM CORE</a:t>
+            </a:r>
+          </a:p>
+          <a:p>
+            <a:pPr>
+              <a:spcBef>
+                <a:spcPts val="200"/>
+              </a:spcBef>
               <a:defRPr sz="1100" b="1">
                 <a:solidFill>
+                  <a:srgbClr val="FFFFFF"/>
+                </a:solidFill>
+              </a:defRPr>
+            </a:pPr>
+            <a:r>
+              <a:t>Edge-to-Cloud Cognitive Nervous System</a:t>
+            </a:r>
+          </a:p>
+          <a:p>
+            <a:pPr>
+              <a:spcBef>
+                <a:spcPts val="400"/>
+              </a:spcBef>
+              <a:defRPr sz="900">
+                <a:solidFill>
                   <a:srgbClr val="94A3B8"/>
                 </a:solidFill>
               </a:defRPr>
             </a:pPr>
             <a:r>
-              <a:t>CONTROL LATENCY</a:t>
-            </a:r>
-          </a:p>
-          <a:p>
-            <a:pPr algn="ctr">
-              <a:defRPr sz="1650" b="1">
-                <a:solidFill>
-                  <a:srgbClr val="00D4FF"/>
-                </a:solidFill>
-              </a:defRPr>
-            </a:pPr>
-            <a:r>
-              <a:t>8 ms Deterministic</a:t>
+              <a:t>Physics-informed mathematical twin running sub-25ms closed-loop supervisory control with full ISA-95/101 conformity.</a:t>
             </a:r>
           </a:p>
         </p:txBody>
@@ -3618,7 +5110,7 @@
             <a:avLst/>
           </a:prstGeom>
           <a:solidFill>
-            <a:srgbClr val="0A0E1A"/>
+            <a:srgbClr val="0B0F17"/>
           </a:solidFill>
           <a:ln>
             <a:noFill/>
@@ -3654,17 +5146,19 @@
         </p:nvSpPr>
         <p:spPr>
           <a:xfrm>
-            <a:off x="0" y="0"/>
-            <a:ext cx="12191695" cy="54864"/>
+            <a:off x="731520" y="365760"/>
+            <a:ext cx="10728655" cy="18288"/>
           </a:xfrm>
           <a:prstGeom prst="rect">
             <a:avLst/>
           </a:prstGeom>
           <a:solidFill>
-            <a:srgbClr val="00D4FF"/>
+            <a:srgbClr val="38BDF8"/>
           </a:solidFill>
           <a:ln>
-            <a:noFill/>
+            <a:solidFill>
+              <a:srgbClr val="38BDF8"/>
+            </a:solidFill>
           </a:ln>
         </p:spPr>
         <p:style>
@@ -3697,8 +5191,8 @@
         </p:nvSpPr>
         <p:spPr>
           <a:xfrm>
-            <a:off x="731520" y="365760"/>
-            <a:ext cx="10698480" cy="1005840"/>
+            <a:off x="731520" y="438912"/>
+            <a:ext cx="8229600" cy="274320"/>
           </a:xfrm>
           <a:prstGeom prst="rect">
             <a:avLst/>
@@ -3706,35 +5200,20 @@
           <a:noFill/>
         </p:spPr>
         <p:txBody>
-          <a:bodyPr wrap="square">
+          <a:bodyPr wrap="square" lIns="0" rIns="0" tIns="0" bIns="0">
             <a:spAutoFit/>
           </a:bodyPr>
           <a:lstStyle/>
           <a:p>
             <a:pPr>
-              <a:spcAft>
-                <a:spcPts val="400"/>
-              </a:spcAft>
-              <a:defRPr sz="1150" b="1">
-                <a:solidFill>
-                  <a:srgbClr val="00D4FF"/>
-                </a:solidFill>
-              </a:defRPr>
-            </a:pPr>
-            <a:r>
-              <a:t>TERRAEMBODIMENT  |  TERRESTRIAL PLATFORM</a:t>
-            </a:r>
-          </a:p>
-          <a:p>
-            <a:pPr>
-              <a:defRPr sz="2500" b="1">
-                <a:solidFill>
-                  <a:srgbClr val="FFFFFF"/>
-                </a:solidFill>
-              </a:defRPr>
-            </a:pPr>
-            <a:r>
-              <a:t>Core Functional Deliverables &amp; Architectural Pillars</a:t>
+              <a:defRPr sz="950" b="1">
+                <a:solidFill>
+                  <a:srgbClr val="38BDF8"/>
+                </a:solidFill>
+              </a:defRPr>
+            </a:pPr>
+            <a:r>
+              <a:t>TERRESTRIAL PLATFORM  |  TERRAEMBODIMENT  |  OPERATIONAL INTERFACE</a:t>
             </a:r>
           </a:p>
         </p:txBody>
@@ -3747,8 +5226,8 @@
         </p:nvSpPr>
         <p:spPr>
           <a:xfrm>
-            <a:off x="731520" y="6446520"/>
-            <a:ext cx="10698480" cy="320040"/>
+            <a:off x="731520" y="731520"/>
+            <a:ext cx="9601200" cy="777240"/>
           </a:xfrm>
           <a:prstGeom prst="rect">
             <a:avLst/>
@@ -3756,44 +5235,83 @@
           <a:noFill/>
         </p:spPr>
         <p:txBody>
-          <a:bodyPr wrap="none">
+          <a:bodyPr wrap="square" lIns="0" rIns="0" tIns="0" bIns="0">
             <a:spAutoFit/>
           </a:bodyPr>
           <a:lstStyle/>
           <a:p>
             <a:pPr>
-              <a:defRPr sz="1000">
+              <a:defRPr sz="1900" b="1">
+                <a:solidFill>
+                  <a:srgbClr val="FFFFFF"/>
+                </a:solidFill>
+              </a:defRPr>
+            </a:pPr>
+            <a:r>
+              <a:t>TerraEmbodiment ANSI/ISA-101 Operational Interface &amp; Real-Time System Representation</a:t>
+            </a:r>
+          </a:p>
+          <a:p>
+            <a:pPr>
+              <a:spcBef>
+                <a:spcPts val="300"/>
+              </a:spcBef>
+              <a:defRPr sz="1050">
                 <a:solidFill>
                   <a:srgbClr val="94A3B8"/>
                 </a:solidFill>
               </a:defRPr>
             </a:pPr>
             <a:r>
-              <a:t>TERRESTRIAL PLATFORM  |  TERRAEMBODIMENT CATALOGUE  |  CONFIDENTIAL - AUTHORISED SYSTEM INTEGRATORS ONLY</a:t>
-            </a:r>
-          </a:p>
-        </p:txBody>
-      </p:sp>
-      <p:sp>
-        <p:nvSpPr>
-          <p:cNvPr id="6" name="Rounded Rectangle 5"/>
+              <a:t>ANSI/ISA-101 Ergonomic High-Performance HMI · Real-Time System Representation</a:t>
+            </a:r>
+          </a:p>
+        </p:txBody>
+      </p:sp>
+      <p:pic>
+        <p:nvPicPr>
+          <p:cNvPr id="6" name="Picture 5" descr="tp_logo_white.png"/>
+          <p:cNvPicPr>
+            <a:picLocks noChangeAspect="1"/>
+          </p:cNvPicPr>
+          <p:nvPr/>
+        </p:nvPicPr>
+        <p:blipFill>
+          <a:blip r:embed="rId2"/>
+          <a:stretch>
+            <a:fillRect/>
+          </a:stretch>
+        </p:blipFill>
+        <p:spPr>
+          <a:xfrm>
+            <a:off x="10469880" y="411480"/>
+            <a:ext cx="987552" cy="384048"/>
+          </a:xfrm>
+          <a:prstGeom prst="rect">
+            <a:avLst/>
+          </a:prstGeom>
+        </p:spPr>
+      </p:pic>
+      <p:sp>
+        <p:nvSpPr>
+          <p:cNvPr id="7" name="Rounded Rectangle 6"/>
           <p:cNvSpPr/>
           <p:nvPr/>
         </p:nvSpPr>
         <p:spPr>
           <a:xfrm>
             <a:off x="731520" y="1645920"/>
-            <a:ext cx="5212080" cy="2148840"/>
+            <a:ext cx="10728655" cy="4709160"/>
           </a:xfrm>
           <a:prstGeom prst="roundRect">
             <a:avLst/>
           </a:prstGeom>
           <a:solidFill>
-            <a:srgbClr val="0F172A"/>
+            <a:srgbClr val="131926"/>
           </a:solidFill>
-          <a:ln>
+          <a:ln w="12700">
             <a:solidFill>
-              <a:srgbClr val="1E293B"/>
+              <a:srgbClr val="38BDF8"/>
             </a:solidFill>
           </a:ln>
         </p:spPr>
@@ -3812,304 +5330,37 @@
           </a:fontRef>
         </p:style>
         <p:txBody>
-          <a:bodyPr rtlCol="0" anchor="ctr" wrap="square"/>
-          <a:lstStyle/>
-          <a:p>
-            <a:pPr algn="ctr">
-              <a:spcAft>
-                <a:spcPts val="400"/>
-              </a:spcAft>
-              <a:defRPr sz="1100" b="1">
-                <a:solidFill>
-                  <a:srgbClr val="00D4FF"/>
-                </a:solidFill>
-              </a:defRPr>
-            </a:pPr>
-            <a:r>
-              <a:t>PILLAR 01</a:t>
-            </a:r>
-          </a:p>
-          <a:p>
-            <a:pPr>
-              <a:spcAft>
-                <a:spcPts val="600"/>
-              </a:spcAft>
-              <a:defRPr sz="1650" b="1">
-                <a:solidFill>
-                  <a:srgbClr val="FFFFFF"/>
-                </a:solidFill>
-              </a:defRPr>
-            </a:pPr>
-            <a:r>
-              <a:t>Direct OT Actuation</a:t>
-            </a:r>
-          </a:p>
-          <a:p>
-            <a:pPr>
-              <a:defRPr sz="1300">
-                <a:solidFill>
-                  <a:srgbClr val="C8D8F0"/>
-                </a:solidFill>
-              </a:defRPr>
-            </a:pPr>
-            <a:r>
-              <a:t>Sub-millisecond deterministic setpoint injection to industrial field controllers and PLCs.</a:t>
-            </a:r>
-          </a:p>
-        </p:txBody>
-      </p:sp>
-      <p:sp>
-        <p:nvSpPr>
-          <p:cNvPr id="7" name="Rounded Rectangle 6"/>
-          <p:cNvSpPr/>
-          <p:nvPr/>
-        </p:nvSpPr>
-        <p:spPr>
-          <a:xfrm>
-            <a:off x="6217920" y="1645920"/>
-            <a:ext cx="5212080" cy="2148840"/>
-          </a:xfrm>
-          <a:prstGeom prst="roundRect">
-            <a:avLst/>
-          </a:prstGeom>
-          <a:solidFill>
-            <a:srgbClr val="0F172A"/>
-          </a:solidFill>
-          <a:ln>
-            <a:solidFill>
-              <a:srgbClr val="1E293B"/>
-            </a:solidFill>
-          </a:ln>
-        </p:spPr>
-        <p:style>
-          <a:lnRef idx="1">
-            <a:schemeClr val="accent1"/>
-          </a:lnRef>
-          <a:fillRef idx="3">
-            <a:schemeClr val="accent1"/>
-          </a:fillRef>
-          <a:effectRef idx="2">
-            <a:schemeClr val="accent1"/>
-          </a:effectRef>
-          <a:fontRef idx="minor">
-            <a:schemeClr val="lt1"/>
-          </a:fontRef>
-        </p:style>
-        <p:txBody>
-          <a:bodyPr rtlCol="0" anchor="ctr" wrap="square"/>
-          <a:lstStyle/>
-          <a:p>
-            <a:pPr algn="ctr">
-              <a:spcAft>
-                <a:spcPts val="400"/>
-              </a:spcAft>
-              <a:defRPr sz="1100" b="1">
-                <a:solidFill>
-                  <a:srgbClr val="00D4FF"/>
-                </a:solidFill>
-              </a:defRPr>
-            </a:pPr>
-            <a:r>
-              <a:t>PILLAR 02</a:t>
-            </a:r>
-          </a:p>
-          <a:p>
-            <a:pPr>
-              <a:spcAft>
-                <a:spcPts val="600"/>
-              </a:spcAft>
-              <a:defRPr sz="1650" b="1">
-                <a:solidFill>
-                  <a:srgbClr val="FFFFFF"/>
-                </a:solidFill>
-              </a:defRPr>
-            </a:pPr>
-            <a:r>
-              <a:t>Autonomous / Assisted Execution Modes</a:t>
-            </a:r>
-          </a:p>
-          <a:p>
-            <a:pPr>
-              <a:defRPr sz="1300">
-                <a:solidFill>
-                  <a:srgbClr val="C8D8F0"/>
-                </a:solidFill>
-              </a:defRPr>
-            </a:pPr>
-            <a:r>
-              <a:t>Configurable execution governance: from closed-loop autonomy to supervised operator sign-off.</a:t>
-            </a:r>
-          </a:p>
-        </p:txBody>
-      </p:sp>
-      <p:sp>
-        <p:nvSpPr>
-          <p:cNvPr id="8" name="Rounded Rectangle 7"/>
-          <p:cNvSpPr/>
-          <p:nvPr/>
-        </p:nvSpPr>
-        <p:spPr>
-          <a:xfrm>
-            <a:off x="731520" y="4069080"/>
-            <a:ext cx="5212080" cy="2148840"/>
-          </a:xfrm>
-          <a:prstGeom prst="roundRect">
-            <a:avLst/>
-          </a:prstGeom>
-          <a:solidFill>
-            <a:srgbClr val="0F172A"/>
-          </a:solidFill>
-          <a:ln>
-            <a:solidFill>
-              <a:srgbClr val="1E293B"/>
-            </a:solidFill>
-          </a:ln>
-        </p:spPr>
-        <p:style>
-          <a:lnRef idx="1">
-            <a:schemeClr val="accent1"/>
-          </a:lnRef>
-          <a:fillRef idx="3">
-            <a:schemeClr val="accent1"/>
-          </a:fillRef>
-          <a:effectRef idx="2">
-            <a:schemeClr val="accent1"/>
-          </a:effectRef>
-          <a:fontRef idx="minor">
-            <a:schemeClr val="lt1"/>
-          </a:fontRef>
-        </p:style>
-        <p:txBody>
-          <a:bodyPr rtlCol="0" anchor="ctr" wrap="square"/>
-          <a:lstStyle/>
-          <a:p>
-            <a:pPr algn="ctr">
-              <a:spcAft>
-                <a:spcPts val="400"/>
-              </a:spcAft>
-              <a:defRPr sz="1100" b="1">
-                <a:solidFill>
-                  <a:srgbClr val="00D4FF"/>
-                </a:solidFill>
-              </a:defRPr>
-            </a:pPr>
-            <a:r>
-              <a:t>PILLAR 03</a:t>
-            </a:r>
-          </a:p>
-          <a:p>
-            <a:pPr>
-              <a:spcAft>
-                <a:spcPts val="600"/>
-              </a:spcAft>
-              <a:defRPr sz="1650" b="1">
-                <a:solidFill>
-                  <a:srgbClr val="FFFFFF"/>
-                </a:solidFill>
-              </a:defRPr>
-            </a:pPr>
-            <a:r>
-              <a:t>Edge-Native Microservices</a:t>
-            </a:r>
-          </a:p>
-          <a:p>
-            <a:pPr>
-              <a:defRPr sz="1300">
-                <a:solidFill>
-                  <a:srgbClr val="C8D8F0"/>
-                </a:solidFill>
-              </a:defRPr>
-            </a:pPr>
-            <a:r>
-              <a:t>High-reliability containerized runtime deployed directly on industrial edge IPC hardware.</a:t>
-            </a:r>
-          </a:p>
-        </p:txBody>
-      </p:sp>
-      <p:sp>
-        <p:nvSpPr>
-          <p:cNvPr id="9" name="Rounded Rectangle 8"/>
-          <p:cNvSpPr/>
-          <p:nvPr/>
-        </p:nvSpPr>
-        <p:spPr>
-          <a:xfrm>
-            <a:off x="6217920" y="4069080"/>
-            <a:ext cx="5212080" cy="2148840"/>
-          </a:xfrm>
-          <a:prstGeom prst="roundRect">
-            <a:avLst/>
-          </a:prstGeom>
-          <a:solidFill>
-            <a:srgbClr val="0F172A"/>
-          </a:solidFill>
-          <a:ln>
-            <a:solidFill>
-              <a:srgbClr val="1E293B"/>
-            </a:solidFill>
-          </a:ln>
-        </p:spPr>
-        <p:style>
-          <a:lnRef idx="1">
-            <a:schemeClr val="accent1"/>
-          </a:lnRef>
-          <a:fillRef idx="3">
-            <a:schemeClr val="accent1"/>
-          </a:fillRef>
-          <a:effectRef idx="2">
-            <a:schemeClr val="accent1"/>
-          </a:effectRef>
-          <a:fontRef idx="minor">
-            <a:schemeClr val="lt1"/>
-          </a:fontRef>
-        </p:style>
-        <p:txBody>
-          <a:bodyPr rtlCol="0" anchor="ctr" wrap="square"/>
-          <a:lstStyle/>
-          <a:p>
-            <a:pPr algn="ctr">
-              <a:spcAft>
-                <a:spcPts val="400"/>
-              </a:spcAft>
-              <a:defRPr sz="1100" b="1">
-                <a:solidFill>
-                  <a:srgbClr val="00D4FF"/>
-                </a:solidFill>
-              </a:defRPr>
-            </a:pPr>
-            <a:r>
-              <a:t>PILLAR 04</a:t>
-            </a:r>
-          </a:p>
-          <a:p>
-            <a:pPr>
-              <a:spcAft>
-                <a:spcPts val="600"/>
-              </a:spcAft>
-              <a:defRPr sz="1650" b="1">
-                <a:solidFill>
-                  <a:srgbClr val="FFFFFF"/>
-                </a:solidFill>
-              </a:defRPr>
-            </a:pPr>
-            <a:r>
-              <a:t>Robotics &amp; UAV Control</a:t>
-            </a:r>
-          </a:p>
-          <a:p>
-            <a:pPr>
-              <a:defRPr sz="1300">
-                <a:solidFill>
-                  <a:srgbClr val="C8D8F0"/>
-                </a:solidFill>
-              </a:defRPr>
-            </a:pPr>
-            <a:r>
-              <a:t>Direct mission dispatch and waypoint navigation for inspection drones and robotic crawlers.</a:t>
-            </a:r>
-          </a:p>
-        </p:txBody>
-      </p:sp>
+          <a:bodyPr rtlCol="0" anchor="ctr"/>
+          <a:lstStyle/>
+          <a:p>
+            <a:pPr algn="ctr"/>
+          </a:p>
+        </p:txBody>
+      </p:sp>
+      <p:pic>
+        <p:nvPicPr>
+          <p:cNvPr id="8" name="Picture 7" descr="terra_embodiment_isa101_showcase.jpg"/>
+          <p:cNvPicPr>
+            <a:picLocks noChangeAspect="1"/>
+          </p:cNvPicPr>
+          <p:nvPr/>
+        </p:nvPicPr>
+        <p:blipFill>
+          <a:blip r:embed="rId3"/>
+          <a:stretch>
+            <a:fillRect/>
+          </a:stretch>
+        </p:blipFill>
+        <p:spPr>
+          <a:xfrm>
+            <a:off x="777240" y="1691640"/>
+            <a:ext cx="10637215" cy="4617720"/>
+          </a:xfrm>
+          <a:prstGeom prst="rect">
+            <a:avLst/>
+          </a:prstGeom>
+        </p:spPr>
+      </p:pic>
     </p:spTree>
   </p:cSld>
   <p:clrMapOvr>
@@ -4143,7 +5394,7 @@
             <a:avLst/>
           </a:prstGeom>
           <a:solidFill>
-            <a:srgbClr val="0A0E1A"/>
+            <a:srgbClr val="0B0F17"/>
           </a:solidFill>
           <a:ln>
             <a:noFill/>
@@ -4179,17 +5430,19 @@
         </p:nvSpPr>
         <p:spPr>
           <a:xfrm>
-            <a:off x="0" y="0"/>
-            <a:ext cx="12191695" cy="54864"/>
+            <a:off x="731520" y="365760"/>
+            <a:ext cx="10728655" cy="18288"/>
           </a:xfrm>
           <a:prstGeom prst="rect">
             <a:avLst/>
           </a:prstGeom>
           <a:solidFill>
-            <a:srgbClr val="00D4FF"/>
+            <a:srgbClr val="38BDF8"/>
           </a:solidFill>
           <a:ln>
-            <a:noFill/>
+            <a:solidFill>
+              <a:srgbClr val="38BDF8"/>
+            </a:solidFill>
           </a:ln>
         </p:spPr>
         <p:style>
@@ -4222,8 +5475,8 @@
         </p:nvSpPr>
         <p:spPr>
           <a:xfrm>
-            <a:off x="731520" y="365760"/>
-            <a:ext cx="10698480" cy="1005840"/>
+            <a:off x="731520" y="438912"/>
+            <a:ext cx="8229600" cy="274320"/>
           </a:xfrm>
           <a:prstGeom prst="rect">
             <a:avLst/>
@@ -4231,35 +5484,20 @@
           <a:noFill/>
         </p:spPr>
         <p:txBody>
-          <a:bodyPr wrap="square">
+          <a:bodyPr wrap="square" lIns="0" rIns="0" tIns="0" bIns="0">
             <a:spAutoFit/>
           </a:bodyPr>
           <a:lstStyle/>
           <a:p>
             <a:pPr>
-              <a:spcAft>
-                <a:spcPts val="400"/>
-              </a:spcAft>
-              <a:defRPr sz="1150" b="1">
-                <a:solidFill>
-                  <a:srgbClr val="00D4FF"/>
-                </a:solidFill>
-              </a:defRPr>
-            </a:pPr>
-            <a:r>
-              <a:t>TERRAEMBODIMENT  |  TERRESTRIAL PLATFORM</a:t>
-            </a:r>
-          </a:p>
-          <a:p>
-            <a:pPr>
-              <a:defRPr sz="2500" b="1">
-                <a:solidFill>
-                  <a:srgbClr val="FFFFFF"/>
-                </a:solidFill>
-              </a:defRPr>
-            </a:pPr>
-            <a:r>
-              <a:t>Field-Validated Operational Use Cases &amp; Quantifiable ROI</a:t>
+              <a:defRPr sz="950" b="1">
+                <a:solidFill>
+                  <a:srgbClr val="38BDF8"/>
+                </a:solidFill>
+              </a:defRPr>
+            </a:pPr>
+            <a:r>
+              <a:t>TERRESTRIAL PLATFORM  |  TERRAEMBODIMENT  |  CORE CAPABILITIES</a:t>
             </a:r>
           </a:p>
         </p:txBody>
@@ -4272,8 +5510,8 @@
         </p:nvSpPr>
         <p:spPr>
           <a:xfrm>
-            <a:off x="731520" y="6446520"/>
-            <a:ext cx="10698480" cy="320040"/>
+            <a:off x="731520" y="731520"/>
+            <a:ext cx="9601200" cy="777240"/>
           </a:xfrm>
           <a:prstGeom prst="rect">
             <a:avLst/>
@@ -4281,44 +5519,83 @@
           <a:noFill/>
         </p:spPr>
         <p:txBody>
-          <a:bodyPr wrap="none">
+          <a:bodyPr wrap="square" lIns="0" rIns="0" tIns="0" bIns="0">
             <a:spAutoFit/>
           </a:bodyPr>
           <a:lstStyle/>
           <a:p>
             <a:pPr>
-              <a:defRPr sz="1000">
+              <a:defRPr sz="1900" b="1">
+                <a:solidFill>
+                  <a:srgbClr val="FFFFFF"/>
+                </a:solidFill>
+              </a:defRPr>
+            </a:pPr>
+            <a:r>
+              <a:t>What TerraEmbodiment Will Do</a:t>
+            </a:r>
+          </a:p>
+          <a:p>
+            <a:pPr>
+              <a:spcBef>
+                <a:spcPts val="300"/>
+              </a:spcBef>
+              <a:defRPr sz="1050">
                 <a:solidFill>
                   <a:srgbClr val="94A3B8"/>
                 </a:solidFill>
               </a:defRPr>
             </a:pPr>
             <a:r>
-              <a:t>TERRESTRIAL PLATFORM  |  TERRAEMBODIMENT CATALOGUE  |  CONFIDENTIAL - AUTHORISED SYSTEM INTEGRATORS ONLY</a:t>
-            </a:r>
-          </a:p>
-        </p:txBody>
-      </p:sp>
-      <p:sp>
-        <p:nvSpPr>
-          <p:cNvPr id="6" name="Rounded Rectangle 5"/>
+              <a:t>Specific operational functions and engineering capabilities directly sourced from technical documentation.</a:t>
+            </a:r>
+          </a:p>
+        </p:txBody>
+      </p:sp>
+      <p:pic>
+        <p:nvPicPr>
+          <p:cNvPr id="6" name="Picture 5" descr="tp_logo_white.png"/>
+          <p:cNvPicPr>
+            <a:picLocks noChangeAspect="1"/>
+          </p:cNvPicPr>
+          <p:nvPr/>
+        </p:nvPicPr>
+        <p:blipFill>
+          <a:blip r:embed="rId2"/>
+          <a:stretch>
+            <a:fillRect/>
+          </a:stretch>
+        </p:blipFill>
+        <p:spPr>
+          <a:xfrm>
+            <a:off x="10469880" y="411480"/>
+            <a:ext cx="987552" cy="384048"/>
+          </a:xfrm>
+          <a:prstGeom prst="rect">
+            <a:avLst/>
+          </a:prstGeom>
+        </p:spPr>
+      </p:pic>
+      <p:sp>
+        <p:nvSpPr>
+          <p:cNvPr id="7" name="Rounded Rectangle 6"/>
           <p:cNvSpPr/>
           <p:nvPr/>
         </p:nvSpPr>
         <p:spPr>
           <a:xfrm>
-            <a:off x="731520" y="1645920"/>
-            <a:ext cx="3401568" cy="4389120"/>
+            <a:off x="731520" y="1691640"/>
+            <a:ext cx="5230368" cy="2194560"/>
           </a:xfrm>
           <a:prstGeom prst="roundRect">
             <a:avLst/>
           </a:prstGeom>
           <a:solidFill>
-            <a:srgbClr val="0F172A"/>
+            <a:srgbClr val="131926"/>
           </a:solidFill>
-          <a:ln>
+          <a:ln w="12700">
             <a:solidFill>
-              <a:srgbClr val="1E293B"/>
+              <a:srgbClr val="28344B"/>
             </a:solidFill>
           </a:ln>
         </p:spPr>
@@ -4337,72 +5614,98 @@
           </a:fontRef>
         </p:style>
         <p:txBody>
-          <a:bodyPr rtlCol="0" anchor="ctr" wrap="square"/>
-          <a:lstStyle/>
-          <a:p>
-            <a:pPr algn="ctr">
+          <a:bodyPr rtlCol="0" anchor="ctr"/>
+          <a:lstStyle/>
+          <a:p>
+            <a:pPr algn="ctr"/>
+          </a:p>
+        </p:txBody>
+      </p:sp>
+      <p:sp>
+        <p:nvSpPr>
+          <p:cNvPr id="8" name="TextBox 7"/>
+          <p:cNvSpPr txBox="1"/>
+          <p:nvPr/>
+        </p:nvSpPr>
+        <p:spPr>
+          <a:xfrm>
+            <a:off x="960120" y="1874520"/>
+            <a:ext cx="4773168" cy="1828800"/>
+          </a:xfrm>
+          <a:prstGeom prst="rect">
+            <a:avLst/>
+          </a:prstGeom>
+          <a:noFill/>
+        </p:spPr>
+        <p:txBody>
+          <a:bodyPr wrap="square" lIns="0" rIns="0" tIns="0" bIns="0">
+            <a:spAutoFit/>
+          </a:bodyPr>
+          <a:lstStyle/>
+          <a:p>
+            <a:pPr>
+              <a:defRPr sz="850" b="1">
+                <a:solidFill>
+                  <a:srgbClr val="38BDF8"/>
+                </a:solidFill>
+              </a:defRPr>
+            </a:pPr>
+            <a:r>
+              <a:t>PILLAR 01  |  ENGINEERING CAPABILITY</a:t>
+            </a:r>
+          </a:p>
+          <a:p>
+            <a:pPr>
+              <a:spcBef>
+                <a:spcPts val="300"/>
+              </a:spcBef>
               <a:spcAft>
-                <a:spcPts val="800"/>
+                <a:spcPts val="600"/>
               </a:spcAft>
-              <a:defRPr sz="1100" b="1">
-                <a:solidFill>
-                  <a:srgbClr val="F5C842"/>
-                </a:solidFill>
-              </a:defRPr>
-            </a:pPr>
-            <a:r>
-              <a:t>SAFETY &amp; REDUCED MANPOWER</a:t>
-            </a:r>
-          </a:p>
-          <a:p>
-            <a:pPr>
-              <a:spcAft>
-                <a:spcPts val="1200"/>
-              </a:spcAft>
-              <a:defRPr sz="1600" b="1">
+              <a:defRPr sz="1300" b="1">
                 <a:solidFill>
                   <a:srgbClr val="FFFFFF"/>
                 </a:solidFill>
               </a:defRPr>
             </a:pPr>
             <a:r>
-              <a:t>Safety &amp; Reduced Manpower (Hazardous Switchgear Actuation)</a:t>
-            </a:r>
-          </a:p>
-          <a:p>
-            <a:pPr>
-              <a:defRPr sz="1300">
-                <a:solidFill>
-                  <a:srgbClr val="C8D8F0"/>
-                </a:solidFill>
-              </a:defRPr>
-            </a:pPr>
-            <a:r>
-              <a:t>Racks in/out 33kV circuit breakers and closes earth switches autonomously during arc flash hazard conditions without humans in the room.</a:t>
-            </a:r>
-          </a:p>
-        </p:txBody>
-      </p:sp>
-      <p:sp>
-        <p:nvSpPr>
-          <p:cNvPr id="7" name="Rounded Rectangle 6"/>
+              <a:t>Direct OT Actuation</a:t>
+            </a:r>
+          </a:p>
+          <a:p>
+            <a:pPr>
+              <a:defRPr sz="1000">
+                <a:solidFill>
+                  <a:srgbClr val="F1F5F9"/>
+                </a:solidFill>
+              </a:defRPr>
+            </a:pPr>
+            <a:r>
+              <a:t>Sub-millisecond deterministic setpoint injection to industrial field controllers and PLCs.</a:t>
+            </a:r>
+          </a:p>
+        </p:txBody>
+      </p:sp>
+      <p:sp>
+        <p:nvSpPr>
+          <p:cNvPr id="9" name="Rounded Rectangle 8"/>
           <p:cNvSpPr/>
           <p:nvPr/>
         </p:nvSpPr>
         <p:spPr>
           <a:xfrm>
-            <a:off x="4379976" y="1645920"/>
-            <a:ext cx="3401568" cy="4389120"/>
+            <a:off x="6227064" y="1691640"/>
+            <a:ext cx="5230368" cy="2194560"/>
           </a:xfrm>
           <a:prstGeom prst="roundRect">
             <a:avLst/>
           </a:prstGeom>
           <a:solidFill>
-            <a:srgbClr val="0F172A"/>
+            <a:srgbClr val="131926"/>
           </a:solidFill>
-          <a:ln>
+          <a:ln w="12700">
             <a:solidFill>
-              <a:srgbClr val="1E293B"/>
+              <a:srgbClr val="28344B"/>
             </a:solidFill>
           </a:ln>
         </p:spPr>
@@ -4421,72 +5724,98 @@
           </a:fontRef>
         </p:style>
         <p:txBody>
-          <a:bodyPr rtlCol="0" anchor="ctr" wrap="square"/>
-          <a:lstStyle/>
-          <a:p>
-            <a:pPr algn="ctr">
+          <a:bodyPr rtlCol="0" anchor="ctr"/>
+          <a:lstStyle/>
+          <a:p>
+            <a:pPr algn="ctr"/>
+          </a:p>
+        </p:txBody>
+      </p:sp>
+      <p:sp>
+        <p:nvSpPr>
+          <p:cNvPr id="10" name="TextBox 9"/>
+          <p:cNvSpPr txBox="1"/>
+          <p:nvPr/>
+        </p:nvSpPr>
+        <p:spPr>
+          <a:xfrm>
+            <a:off x="6455664" y="1874520"/>
+            <a:ext cx="4773168" cy="1828800"/>
+          </a:xfrm>
+          <a:prstGeom prst="rect">
+            <a:avLst/>
+          </a:prstGeom>
+          <a:noFill/>
+        </p:spPr>
+        <p:txBody>
+          <a:bodyPr wrap="square" lIns="0" rIns="0" tIns="0" bIns="0">
+            <a:spAutoFit/>
+          </a:bodyPr>
+          <a:lstStyle/>
+          <a:p>
+            <a:pPr>
+              <a:defRPr sz="850" b="1">
+                <a:solidFill>
+                  <a:srgbClr val="38BDF8"/>
+                </a:solidFill>
+              </a:defRPr>
+            </a:pPr>
+            <a:r>
+              <a:t>PILLAR 02  |  ENGINEERING CAPABILITY</a:t>
+            </a:r>
+          </a:p>
+          <a:p>
+            <a:pPr>
+              <a:spcBef>
+                <a:spcPts val="300"/>
+              </a:spcBef>
               <a:spcAft>
-                <a:spcPts val="800"/>
+                <a:spcPts val="600"/>
               </a:spcAft>
-              <a:defRPr sz="1100" b="1">
-                <a:solidFill>
-                  <a:srgbClr val="F5C842"/>
-                </a:solidFill>
-              </a:defRPr>
-            </a:pPr>
-            <a:r>
-              <a:t>PRODUCTIVITY &amp; MACHINE SAFETY</a:t>
-            </a:r>
-          </a:p>
-          <a:p>
-            <a:pPr>
-              <a:spcAft>
-                <a:spcPts val="1200"/>
-              </a:spcAft>
-              <a:defRPr sz="1600" b="1">
+              <a:defRPr sz="1300" b="1">
                 <a:solidFill>
                   <a:srgbClr val="FFFFFF"/>
                 </a:solidFill>
               </a:defRPr>
             </a:pPr>
             <a:r>
-              <a:t>Productivity &amp; Machine Safety (CNC Load Reduction)</a:t>
-            </a:r>
-          </a:p>
-          <a:p>
-            <a:pPr>
-              <a:defRPr sz="1300">
-                <a:solidFill>
-                  <a:srgbClr val="C8D8F0"/>
-                </a:solidFill>
-              </a:defRPr>
-            </a:pPr>
-            <a:r>
-              <a:t>When TerraAI detects high vibration on CNC machines, TerraEmbodiment automatically modulates PLC feed rates to prevent tool breakage.</a:t>
-            </a:r>
-          </a:p>
-        </p:txBody>
-      </p:sp>
-      <p:sp>
-        <p:nvSpPr>
-          <p:cNvPr id="8" name="Rounded Rectangle 7"/>
+              <a:t>Autonomous / Assisted Execution Modes</a:t>
+            </a:r>
+          </a:p>
+          <a:p>
+            <a:pPr>
+              <a:defRPr sz="1000">
+                <a:solidFill>
+                  <a:srgbClr val="F1F5F9"/>
+                </a:solidFill>
+              </a:defRPr>
+            </a:pPr>
+            <a:r>
+              <a:t>Configurable execution governance: from closed-loop autonomy to supervised operator sign-off.</a:t>
+            </a:r>
+          </a:p>
+        </p:txBody>
+      </p:sp>
+      <p:sp>
+        <p:nvSpPr>
+          <p:cNvPr id="11" name="Rounded Rectangle 10"/>
           <p:cNvSpPr/>
           <p:nvPr/>
         </p:nvSpPr>
         <p:spPr>
           <a:xfrm>
-            <a:off x="8028432" y="1645920"/>
-            <a:ext cx="3401568" cy="4389120"/>
+            <a:off x="731520" y="4114800"/>
+            <a:ext cx="5230368" cy="2194560"/>
           </a:xfrm>
           <a:prstGeom prst="roundRect">
             <a:avLst/>
           </a:prstGeom>
           <a:solidFill>
-            <a:srgbClr val="0F172A"/>
+            <a:srgbClr val="131926"/>
           </a:solidFill>
-          <a:ln>
+          <a:ln w="12700">
             <a:solidFill>
-              <a:srgbClr val="1E293B"/>
+              <a:srgbClr val="28344B"/>
             </a:solidFill>
           </a:ln>
         </p:spPr>
@@ -4505,48 +5834,184 @@
           </a:fontRef>
         </p:style>
         <p:txBody>
-          <a:bodyPr rtlCol="0" anchor="ctr" wrap="square"/>
-          <a:lstStyle/>
-          <a:p>
-            <a:pPr algn="ctr">
+          <a:bodyPr rtlCol="0" anchor="ctr"/>
+          <a:lstStyle/>
+          <a:p>
+            <a:pPr algn="ctr"/>
+          </a:p>
+        </p:txBody>
+      </p:sp>
+      <p:sp>
+        <p:nvSpPr>
+          <p:cNvPr id="12" name="TextBox 11"/>
+          <p:cNvSpPr txBox="1"/>
+          <p:nvPr/>
+        </p:nvSpPr>
+        <p:spPr>
+          <a:xfrm>
+            <a:off x="960120" y="4297680"/>
+            <a:ext cx="4773168" cy="1828800"/>
+          </a:xfrm>
+          <a:prstGeom prst="rect">
+            <a:avLst/>
+          </a:prstGeom>
+          <a:noFill/>
+        </p:spPr>
+        <p:txBody>
+          <a:bodyPr wrap="square" lIns="0" rIns="0" tIns="0" bIns="0">
+            <a:spAutoFit/>
+          </a:bodyPr>
+          <a:lstStyle/>
+          <a:p>
+            <a:pPr>
+              <a:defRPr sz="850" b="1">
+                <a:solidFill>
+                  <a:srgbClr val="38BDF8"/>
+                </a:solidFill>
+              </a:defRPr>
+            </a:pPr>
+            <a:r>
+              <a:t>PILLAR 03  |  ENGINEERING CAPABILITY</a:t>
+            </a:r>
+          </a:p>
+          <a:p>
+            <a:pPr>
+              <a:spcBef>
+                <a:spcPts val="300"/>
+              </a:spcBef>
               <a:spcAft>
-                <a:spcPts val="800"/>
+                <a:spcPts val="600"/>
               </a:spcAft>
-              <a:defRPr sz="1100" b="1">
-                <a:solidFill>
-                  <a:srgbClr val="F5C842"/>
-                </a:solidFill>
-              </a:defRPr>
-            </a:pPr>
-            <a:r>
-              <a:t>QA &amp; AUTONOMOUS ROBOTIC INSPECTION</a:t>
-            </a:r>
-          </a:p>
-          <a:p>
-            <a:pPr>
+              <a:defRPr sz="1300" b="1">
+                <a:solidFill>
+                  <a:srgbClr val="FFFFFF"/>
+                </a:solidFill>
+              </a:defRPr>
+            </a:pPr>
+            <a:r>
+              <a:t>Edge-Native Microservices</a:t>
+            </a:r>
+          </a:p>
+          <a:p>
+            <a:pPr>
+              <a:defRPr sz="1000">
+                <a:solidFill>
+                  <a:srgbClr val="F1F5F9"/>
+                </a:solidFill>
+              </a:defRPr>
+            </a:pPr>
+            <a:r>
+              <a:t>High-reliability containerized runtime deployed directly on industrial edge IPC hardware.</a:t>
+            </a:r>
+          </a:p>
+        </p:txBody>
+      </p:sp>
+      <p:sp>
+        <p:nvSpPr>
+          <p:cNvPr id="13" name="Rounded Rectangle 12"/>
+          <p:cNvSpPr/>
+          <p:nvPr/>
+        </p:nvSpPr>
+        <p:spPr>
+          <a:xfrm>
+            <a:off x="6227064" y="4114800"/>
+            <a:ext cx="5230368" cy="2194560"/>
+          </a:xfrm>
+          <a:prstGeom prst="roundRect">
+            <a:avLst/>
+          </a:prstGeom>
+          <a:solidFill>
+            <a:srgbClr val="131926"/>
+          </a:solidFill>
+          <a:ln w="12700">
+            <a:solidFill>
+              <a:srgbClr val="28344B"/>
+            </a:solidFill>
+          </a:ln>
+        </p:spPr>
+        <p:style>
+          <a:lnRef idx="1">
+            <a:schemeClr val="accent1"/>
+          </a:lnRef>
+          <a:fillRef idx="3">
+            <a:schemeClr val="accent1"/>
+          </a:fillRef>
+          <a:effectRef idx="2">
+            <a:schemeClr val="accent1"/>
+          </a:effectRef>
+          <a:fontRef idx="minor">
+            <a:schemeClr val="lt1"/>
+          </a:fontRef>
+        </p:style>
+        <p:txBody>
+          <a:bodyPr rtlCol="0" anchor="ctr"/>
+          <a:lstStyle/>
+          <a:p>
+            <a:pPr algn="ctr"/>
+          </a:p>
+        </p:txBody>
+      </p:sp>
+      <p:sp>
+        <p:nvSpPr>
+          <p:cNvPr id="14" name="TextBox 13"/>
+          <p:cNvSpPr txBox="1"/>
+          <p:nvPr/>
+        </p:nvSpPr>
+        <p:spPr>
+          <a:xfrm>
+            <a:off x="6455664" y="4297680"/>
+            <a:ext cx="4773168" cy="1828800"/>
+          </a:xfrm>
+          <a:prstGeom prst="rect">
+            <a:avLst/>
+          </a:prstGeom>
+          <a:noFill/>
+        </p:spPr>
+        <p:txBody>
+          <a:bodyPr wrap="square" lIns="0" rIns="0" tIns="0" bIns="0">
+            <a:spAutoFit/>
+          </a:bodyPr>
+          <a:lstStyle/>
+          <a:p>
+            <a:pPr>
+              <a:defRPr sz="850" b="1">
+                <a:solidFill>
+                  <a:srgbClr val="38BDF8"/>
+                </a:solidFill>
+              </a:defRPr>
+            </a:pPr>
+            <a:r>
+              <a:t>PILLAR 04  |  ENGINEERING CAPABILITY</a:t>
+            </a:r>
+          </a:p>
+          <a:p>
+            <a:pPr>
+              <a:spcBef>
+                <a:spcPts val="300"/>
+              </a:spcBef>
               <a:spcAft>
-                <a:spcPts val="1200"/>
+                <a:spcPts val="600"/>
               </a:spcAft>
-              <a:defRPr sz="1600" b="1">
+              <a:defRPr sz="1300" b="1">
                 <a:solidFill>
                   <a:srgbClr val="FFFFFF"/>
                 </a:solidFill>
               </a:defRPr>
             </a:pPr>
             <a:r>
-              <a:t>QA &amp; Autonomous Robotic Inspection</a:t>
-            </a:r>
-          </a:p>
-          <a:p>
-            <a:pPr>
-              <a:defRPr sz="1300">
-                <a:solidFill>
-                  <a:srgbClr val="C8D8F0"/>
-                </a:solidFill>
-              </a:defRPr>
-            </a:pPr>
-            <a:r>
-              <a:t>Dispatches autonomous robotic crawlers and thermal drones to wash solar panels and locate hot spots without manual workers.</a:t>
+              <a:t>Robotics &amp; UAV Control</a:t>
+            </a:r>
+          </a:p>
+          <a:p>
+            <a:pPr>
+              <a:defRPr sz="1000">
+                <a:solidFill>
+                  <a:srgbClr val="F1F5F9"/>
+                </a:solidFill>
+              </a:defRPr>
+            </a:pPr>
+            <a:r>
+              <a:t>Direct mission dispatch and waypoint navigation for inspection drones and robotic crawlers.</a:t>
             </a:r>
           </a:p>
         </p:txBody>
@@ -4584,7 +6049,7 @@
             <a:avLst/>
           </a:prstGeom>
           <a:solidFill>
-            <a:srgbClr val="0A0E1A"/>
+            <a:srgbClr val="0B0F17"/>
           </a:solidFill>
           <a:ln>
             <a:noFill/>
@@ -4620,17 +6085,19 @@
         </p:nvSpPr>
         <p:spPr>
           <a:xfrm>
-            <a:off x="0" y="0"/>
-            <a:ext cx="12191695" cy="54864"/>
+            <a:off x="731520" y="365760"/>
+            <a:ext cx="10728655" cy="18288"/>
           </a:xfrm>
           <a:prstGeom prst="rect">
             <a:avLst/>
           </a:prstGeom>
           <a:solidFill>
-            <a:srgbClr val="00D4FF"/>
+            <a:srgbClr val="38BDF8"/>
           </a:solidFill>
           <a:ln>
-            <a:noFill/>
+            <a:solidFill>
+              <a:srgbClr val="38BDF8"/>
+            </a:solidFill>
           </a:ln>
         </p:spPr>
         <p:style>
@@ -4663,8 +6130,8 @@
         </p:nvSpPr>
         <p:spPr>
           <a:xfrm>
-            <a:off x="731520" y="365760"/>
-            <a:ext cx="10698480" cy="1005840"/>
+            <a:off x="731520" y="438912"/>
+            <a:ext cx="8229600" cy="274320"/>
           </a:xfrm>
           <a:prstGeom prst="rect">
             <a:avLst/>
@@ -4672,35 +6139,20 @@
           <a:noFill/>
         </p:spPr>
         <p:txBody>
-          <a:bodyPr wrap="square">
+          <a:bodyPr wrap="square" lIns="0" rIns="0" tIns="0" bIns="0">
             <a:spAutoFit/>
           </a:bodyPr>
           <a:lstStyle/>
           <a:p>
             <a:pPr>
-              <a:spcAft>
-                <a:spcPts val="400"/>
-              </a:spcAft>
-              <a:defRPr sz="1150" b="1">
-                <a:solidFill>
-                  <a:srgbClr val="00D4FF"/>
-                </a:solidFill>
-              </a:defRPr>
-            </a:pPr>
-            <a:r>
-              <a:t>TERRAEMBODIMENT  |  TERRESTRIAL PLATFORM</a:t>
-            </a:r>
-          </a:p>
-          <a:p>
-            <a:pPr>
-              <a:defRPr sz="2500" b="1">
-                <a:solidFill>
-                  <a:srgbClr val="FFFFFF"/>
-                </a:solidFill>
-              </a:defRPr>
-            </a:pPr>
-            <a:r>
-              <a:t>Competitive Advantage: Terrestrial Platform vs. Legacy Systems</a:t>
+              <a:defRPr sz="950" b="1">
+                <a:solidFill>
+                  <a:srgbClr val="38BDF8"/>
+                </a:solidFill>
+              </a:defRPr>
+            </a:pPr>
+            <a:r>
+              <a:t>TERRESTRIAL PLATFORM  |  TERRAEMBODIMENT  |  FIELD USE CASES</a:t>
             </a:r>
           </a:p>
         </p:txBody>
@@ -4713,8 +6165,8 @@
         </p:nvSpPr>
         <p:spPr>
           <a:xfrm>
-            <a:off x="731520" y="6446520"/>
-            <a:ext cx="10698480" cy="320040"/>
+            <a:off x="731520" y="731520"/>
+            <a:ext cx="9601200" cy="777240"/>
           </a:xfrm>
           <a:prstGeom prst="rect">
             <a:avLst/>
@@ -4722,44 +6174,83 @@
           <a:noFill/>
         </p:spPr>
         <p:txBody>
-          <a:bodyPr wrap="none">
+          <a:bodyPr wrap="square" lIns="0" rIns="0" tIns="0" bIns="0">
             <a:spAutoFit/>
           </a:bodyPr>
           <a:lstStyle/>
           <a:p>
             <a:pPr>
-              <a:defRPr sz="1000">
+              <a:defRPr sz="1900" b="1">
+                <a:solidFill>
+                  <a:srgbClr val="FFFFFF"/>
+                </a:solidFill>
+              </a:defRPr>
+            </a:pPr>
+            <a:r>
+              <a:t>Operational Use Cases &amp; Field Impact</a:t>
+            </a:r>
+          </a:p>
+          <a:p>
+            <a:pPr>
+              <a:spcBef>
+                <a:spcPts val="300"/>
+              </a:spcBef>
+              <a:defRPr sz="1050">
                 <a:solidFill>
                   <a:srgbClr val="94A3B8"/>
                 </a:solidFill>
               </a:defRPr>
             </a:pPr>
             <a:r>
-              <a:t>TERRESTRIAL PLATFORM  |  TERRAEMBODIMENT CATALOGUE  |  CONFIDENTIAL - AUTHORISED SYSTEM INTEGRATORS ONLY</a:t>
-            </a:r>
-          </a:p>
-        </p:txBody>
-      </p:sp>
-      <p:sp>
-        <p:nvSpPr>
-          <p:cNvPr id="6" name="Rectangle 5"/>
+              <a:t>Actual documented use cases across Quality Assurance, Reduced Manpower, Efficiency, and Asset Productivity.</a:t>
+            </a:r>
+          </a:p>
+        </p:txBody>
+      </p:sp>
+      <p:pic>
+        <p:nvPicPr>
+          <p:cNvPr id="6" name="Picture 5" descr="tp_logo_white.png"/>
+          <p:cNvPicPr>
+            <a:picLocks noChangeAspect="1"/>
+          </p:cNvPicPr>
+          <p:nvPr/>
+        </p:nvPicPr>
+        <p:blipFill>
+          <a:blip r:embed="rId2"/>
+          <a:stretch>
+            <a:fillRect/>
+          </a:stretch>
+        </p:blipFill>
+        <p:spPr>
+          <a:xfrm>
+            <a:off x="10469880" y="411480"/>
+            <a:ext cx="987552" cy="384048"/>
+          </a:xfrm>
+          <a:prstGeom prst="rect">
+            <a:avLst/>
+          </a:prstGeom>
+        </p:spPr>
+      </p:pic>
+      <p:sp>
+        <p:nvSpPr>
+          <p:cNvPr id="7" name="Rounded Rectangle 6"/>
           <p:cNvSpPr/>
           <p:nvPr/>
         </p:nvSpPr>
         <p:spPr>
           <a:xfrm>
-            <a:off x="731520" y="1645920"/>
-            <a:ext cx="5212080" cy="502920"/>
-          </a:xfrm>
-          <a:prstGeom prst="rect">
+            <a:off x="731520" y="1691640"/>
+            <a:ext cx="5230368" cy="2194560"/>
+          </a:xfrm>
+          <a:prstGeom prst="roundRect">
             <a:avLst/>
           </a:prstGeom>
           <a:solidFill>
-            <a:srgbClr val="280F14"/>
+            <a:srgbClr val="131926"/>
           </a:solidFill>
-          <a:ln>
+          <a:ln w="12700">
             <a:solidFill>
-              <a:srgbClr val="FF5555"/>
+              <a:srgbClr val="28344B"/>
             </a:solidFill>
           </a:ln>
         </p:spPr>
@@ -4781,39 +6272,95 @@
           <a:bodyPr rtlCol="0" anchor="ctr"/>
           <a:lstStyle/>
           <a:p>
-            <a:pPr algn="ctr">
-              <a:defRPr sz="1250" b="1">
-                <a:solidFill>
-                  <a:srgbClr val="FF5555"/>
-                </a:solidFill>
-              </a:defRPr>
-            </a:pPr>
-            <a:r>
-              <a:t>TRADITIONAL LEGACY SCADA / SILOED SYSTEMS</a:t>
-            </a:r>
-          </a:p>
-        </p:txBody>
-      </p:sp>
-      <p:sp>
-        <p:nvSpPr>
-          <p:cNvPr id="7" name="Rectangle 6"/>
+            <a:pPr algn="ctr"/>
+          </a:p>
+        </p:txBody>
+      </p:sp>
+      <p:sp>
+        <p:nvSpPr>
+          <p:cNvPr id="8" name="TextBox 7"/>
+          <p:cNvSpPr txBox="1"/>
+          <p:nvPr/>
+        </p:nvSpPr>
+        <p:spPr>
+          <a:xfrm>
+            <a:off x="960120" y="1874520"/>
+            <a:ext cx="4773168" cy="1828800"/>
+          </a:xfrm>
+          <a:prstGeom prst="rect">
+            <a:avLst/>
+          </a:prstGeom>
+          <a:noFill/>
+        </p:spPr>
+        <p:txBody>
+          <a:bodyPr wrap="square" lIns="0" rIns="0" tIns="0" bIns="0">
+            <a:spAutoFit/>
+          </a:bodyPr>
+          <a:lstStyle/>
+          <a:p>
+            <a:pPr>
+              <a:defRPr sz="850" b="1">
+                <a:solidFill>
+                  <a:srgbClr val="34D399"/>
+                </a:solidFill>
+              </a:defRPr>
+            </a:pPr>
+            <a:r>
+              <a:t>CASE 01  |  SAFETY &amp; REDUCED MANPOWER</a:t>
+            </a:r>
+          </a:p>
+          <a:p>
+            <a:pPr>
+              <a:spcBef>
+                <a:spcPts val="300"/>
+              </a:spcBef>
+              <a:spcAft>
+                <a:spcPts val="600"/>
+              </a:spcAft>
+              <a:defRPr sz="1300" b="1">
+                <a:solidFill>
+                  <a:srgbClr val="FFFFFF"/>
+                </a:solidFill>
+              </a:defRPr>
+            </a:pPr>
+            <a:r>
+              <a:t>Safety &amp; Reduced Manpower (Hazardous Switchgear Actuation)</a:t>
+            </a:r>
+          </a:p>
+          <a:p>
+            <a:pPr>
+              <a:defRPr sz="1000">
+                <a:solidFill>
+                  <a:srgbClr val="F1F5F9"/>
+                </a:solidFill>
+              </a:defRPr>
+            </a:pPr>
+            <a:r>
+              <a:t>Racks in/out 33kV circuit breakers and closes earth switches autonomously during arc flash hazard conditions without humans in the room.</a:t>
+            </a:r>
+          </a:p>
+        </p:txBody>
+      </p:sp>
+      <p:sp>
+        <p:nvSpPr>
+          <p:cNvPr id="9" name="Rounded Rectangle 8"/>
           <p:cNvSpPr/>
           <p:nvPr/>
         </p:nvSpPr>
         <p:spPr>
           <a:xfrm>
-            <a:off x="6217920" y="1645920"/>
-            <a:ext cx="5212080" cy="502920"/>
-          </a:xfrm>
-          <a:prstGeom prst="rect">
+            <a:off x="6227064" y="1691640"/>
+            <a:ext cx="5230368" cy="2194560"/>
+          </a:xfrm>
+          <a:prstGeom prst="roundRect">
             <a:avLst/>
           </a:prstGeom>
           <a:solidFill>
-            <a:srgbClr val="0A2D3C"/>
+            <a:srgbClr val="131926"/>
           </a:solidFill>
-          <a:ln>
+          <a:ln w="12700">
             <a:solidFill>
-              <a:srgbClr val="00D4FF"/>
+              <a:srgbClr val="28344B"/>
             </a:solidFill>
           </a:ln>
         </p:spPr>
@@ -4835,39 +6382,95 @@
           <a:bodyPr rtlCol="0" anchor="ctr"/>
           <a:lstStyle/>
           <a:p>
-            <a:pPr algn="ctr">
-              <a:defRPr sz="1250" b="1">
-                <a:solidFill>
-                  <a:srgbClr val="00D4FF"/>
-                </a:solidFill>
-              </a:defRPr>
-            </a:pPr>
-            <a:r>
-              <a:t>TERRAEMBODIMENT TERRESTRIAL PLATFORM ADVANTAGE</a:t>
-            </a:r>
-          </a:p>
-        </p:txBody>
-      </p:sp>
-      <p:sp>
-        <p:nvSpPr>
-          <p:cNvPr id="8" name="Rounded Rectangle 7"/>
+            <a:pPr algn="ctr"/>
+          </a:p>
+        </p:txBody>
+      </p:sp>
+      <p:sp>
+        <p:nvSpPr>
+          <p:cNvPr id="10" name="TextBox 9"/>
+          <p:cNvSpPr txBox="1"/>
+          <p:nvPr/>
+        </p:nvSpPr>
+        <p:spPr>
+          <a:xfrm>
+            <a:off x="6455664" y="1874520"/>
+            <a:ext cx="4773168" cy="1828800"/>
+          </a:xfrm>
+          <a:prstGeom prst="rect">
+            <a:avLst/>
+          </a:prstGeom>
+          <a:noFill/>
+        </p:spPr>
+        <p:txBody>
+          <a:bodyPr wrap="square" lIns="0" rIns="0" tIns="0" bIns="0">
+            <a:spAutoFit/>
+          </a:bodyPr>
+          <a:lstStyle/>
+          <a:p>
+            <a:pPr>
+              <a:defRPr sz="850" b="1">
+                <a:solidFill>
+                  <a:srgbClr val="34D399"/>
+                </a:solidFill>
+              </a:defRPr>
+            </a:pPr>
+            <a:r>
+              <a:t>CASE 02  |  PRODUCTIVITY &amp; MACHINE SAFETY</a:t>
+            </a:r>
+          </a:p>
+          <a:p>
+            <a:pPr>
+              <a:spcBef>
+                <a:spcPts val="300"/>
+              </a:spcBef>
+              <a:spcAft>
+                <a:spcPts val="600"/>
+              </a:spcAft>
+              <a:defRPr sz="1300" b="1">
+                <a:solidFill>
+                  <a:srgbClr val="FFFFFF"/>
+                </a:solidFill>
+              </a:defRPr>
+            </a:pPr>
+            <a:r>
+              <a:t>Productivity &amp; Machine Safety (CNC Load Reduction)</a:t>
+            </a:r>
+          </a:p>
+          <a:p>
+            <a:pPr>
+              <a:defRPr sz="1000">
+                <a:solidFill>
+                  <a:srgbClr val="F1F5F9"/>
+                </a:solidFill>
+              </a:defRPr>
+            </a:pPr>
+            <a:r>
+              <a:t>When TerraAI detects high vibration on CNC machines, TerraEmbodiment automatically modulates PLC feed rates to prevent tool breakage.</a:t>
+            </a:r>
+          </a:p>
+        </p:txBody>
+      </p:sp>
+      <p:sp>
+        <p:nvSpPr>
+          <p:cNvPr id="11" name="Rounded Rectangle 10"/>
           <p:cNvSpPr/>
           <p:nvPr/>
         </p:nvSpPr>
         <p:spPr>
           <a:xfrm>
-            <a:off x="731520" y="2240280"/>
-            <a:ext cx="5212080" cy="960120"/>
+            <a:off x="731520" y="4114800"/>
+            <a:ext cx="5230368" cy="2194560"/>
           </a:xfrm>
           <a:prstGeom prst="roundRect">
             <a:avLst/>
           </a:prstGeom>
           <a:solidFill>
-            <a:srgbClr val="0F172A"/>
+            <a:srgbClr val="131926"/>
           </a:solidFill>
-          <a:ln>
+          <a:ln w="12700">
             <a:solidFill>
-              <a:srgbClr val="1E293B"/>
+              <a:srgbClr val="28344B"/>
             </a:solidFill>
           </a:ln>
         </p:spPr>
@@ -4886,42 +6489,98 @@
           </a:fontRef>
         </p:style>
         <p:txBody>
-          <a:bodyPr rtlCol="0" anchor="ctr" wrap="square"/>
-          <a:lstStyle/>
-          <a:p>
-            <a:pPr algn="ctr">
-              <a:defRPr sz="1200">
-                <a:solidFill>
-                  <a:srgbClr val="94A3B8"/>
-                </a:solidFill>
-              </a:defRPr>
-            </a:pPr>
-            <a:r>
-              <a:t>AI systems only provide advisory charts; human technicians must physically walk to switchgear to turn knobs or trip breakers.</a:t>
-            </a:r>
-          </a:p>
-        </p:txBody>
-      </p:sp>
-      <p:sp>
-        <p:nvSpPr>
-          <p:cNvPr id="9" name="Rounded Rectangle 8"/>
+          <a:bodyPr rtlCol="0" anchor="ctr"/>
+          <a:lstStyle/>
+          <a:p>
+            <a:pPr algn="ctr"/>
+          </a:p>
+        </p:txBody>
+      </p:sp>
+      <p:sp>
+        <p:nvSpPr>
+          <p:cNvPr id="12" name="TextBox 11"/>
+          <p:cNvSpPr txBox="1"/>
+          <p:nvPr/>
+        </p:nvSpPr>
+        <p:spPr>
+          <a:xfrm>
+            <a:off x="960120" y="4297680"/>
+            <a:ext cx="4773168" cy="1828800"/>
+          </a:xfrm>
+          <a:prstGeom prst="rect">
+            <a:avLst/>
+          </a:prstGeom>
+          <a:noFill/>
+        </p:spPr>
+        <p:txBody>
+          <a:bodyPr wrap="square" lIns="0" rIns="0" tIns="0" bIns="0">
+            <a:spAutoFit/>
+          </a:bodyPr>
+          <a:lstStyle/>
+          <a:p>
+            <a:pPr>
+              <a:defRPr sz="850" b="1">
+                <a:solidFill>
+                  <a:srgbClr val="34D399"/>
+                </a:solidFill>
+              </a:defRPr>
+            </a:pPr>
+            <a:r>
+              <a:t>CASE 03  |  QA &amp; AUTONOMOUS ROBOTIC INSPECTION</a:t>
+            </a:r>
+          </a:p>
+          <a:p>
+            <a:pPr>
+              <a:spcBef>
+                <a:spcPts val="300"/>
+              </a:spcBef>
+              <a:spcAft>
+                <a:spcPts val="600"/>
+              </a:spcAft>
+              <a:defRPr sz="1300" b="1">
+                <a:solidFill>
+                  <a:srgbClr val="FFFFFF"/>
+                </a:solidFill>
+              </a:defRPr>
+            </a:pPr>
+            <a:r>
+              <a:t>QA &amp; Autonomous Robotic Inspection</a:t>
+            </a:r>
+          </a:p>
+          <a:p>
+            <a:pPr>
+              <a:defRPr sz="1000">
+                <a:solidFill>
+                  <a:srgbClr val="F1F5F9"/>
+                </a:solidFill>
+              </a:defRPr>
+            </a:pPr>
+            <a:r>
+              <a:t>Dispatches autonomous robotic crawlers and thermal drones to wash solar panels and locate hot spots without manual workers.</a:t>
+            </a:r>
+          </a:p>
+        </p:txBody>
+      </p:sp>
+      <p:sp>
+        <p:nvSpPr>
+          <p:cNvPr id="13" name="Rounded Rectangle 12"/>
           <p:cNvSpPr/>
           <p:nvPr/>
         </p:nvSpPr>
         <p:spPr>
           <a:xfrm>
-            <a:off x="6217920" y="2240280"/>
-            <a:ext cx="5212080" cy="960120"/>
+            <a:off x="6227064" y="4114800"/>
+            <a:ext cx="5230368" cy="2194560"/>
           </a:xfrm>
           <a:prstGeom prst="roundRect">
             <a:avLst/>
           </a:prstGeom>
           <a:solidFill>
-            <a:srgbClr val="141E37"/>
+            <a:srgbClr val="131926"/>
           </a:solidFill>
-          <a:ln>
+          <a:ln w="12700">
             <a:solidFill>
-              <a:srgbClr val="00D4FF"/>
+              <a:srgbClr val="28344B"/>
             </a:solidFill>
           </a:ln>
         </p:spPr>
@@ -4940,342 +6599,74 @@
           </a:fontRef>
         </p:style>
         <p:txBody>
-          <a:bodyPr rtlCol="0" anchor="ctr" wrap="square"/>
-          <a:lstStyle/>
-          <a:p>
-            <a:pPr algn="ctr">
-              <a:defRPr sz="1250" b="1">
+          <a:bodyPr rtlCol="0" anchor="ctr"/>
+          <a:lstStyle/>
+          <a:p>
+            <a:pPr algn="ctr"/>
+          </a:p>
+        </p:txBody>
+      </p:sp>
+      <p:sp>
+        <p:nvSpPr>
+          <p:cNvPr id="14" name="TextBox 13"/>
+          <p:cNvSpPr txBox="1"/>
+          <p:nvPr/>
+        </p:nvSpPr>
+        <p:spPr>
+          <a:xfrm>
+            <a:off x="6455664" y="4297680"/>
+            <a:ext cx="4773168" cy="1828800"/>
+          </a:xfrm>
+          <a:prstGeom prst="rect">
+            <a:avLst/>
+          </a:prstGeom>
+          <a:noFill/>
+        </p:spPr>
+        <p:txBody>
+          <a:bodyPr wrap="square" lIns="0" rIns="0" tIns="0" bIns="0">
+            <a:spAutoFit/>
+          </a:bodyPr>
+          <a:lstStyle/>
+          <a:p>
+            <a:pPr>
+              <a:defRPr sz="850" b="1">
+                <a:solidFill>
+                  <a:srgbClr val="34D399"/>
+                </a:solidFill>
+              </a:defRPr>
+            </a:pPr>
+            <a:r>
+              <a:t>CASE 04  |  EFFICIENCY</a:t>
+            </a:r>
+          </a:p>
+          <a:p>
+            <a:pPr>
+              <a:spcBef>
+                <a:spcPts val="300"/>
+              </a:spcBef>
+              <a:spcAft>
+                <a:spcPts val="600"/>
+              </a:spcAft>
+              <a:defRPr sz="1300" b="1">
                 <a:solidFill>
                   <a:srgbClr val="FFFFFF"/>
                 </a:solidFill>
               </a:defRPr>
             </a:pPr>
             <a:r>
-              <a:t>Closed-loop, deterministic execution straight to industrial bus controllers with microsecond safety boundaries.</a:t>
-            </a:r>
-          </a:p>
-        </p:txBody>
-      </p:sp>
-      <p:sp>
-        <p:nvSpPr>
-          <p:cNvPr id="10" name="Rounded Rectangle 9"/>
-          <p:cNvSpPr/>
-          <p:nvPr/>
-        </p:nvSpPr>
-        <p:spPr>
-          <a:xfrm>
-            <a:off x="731520" y="3291840"/>
-            <a:ext cx="5212080" cy="960120"/>
-          </a:xfrm>
-          <a:prstGeom prst="roundRect">
-            <a:avLst/>
-          </a:prstGeom>
-          <a:solidFill>
-            <a:srgbClr val="0F172A"/>
-          </a:solidFill>
-          <a:ln>
-            <a:solidFill>
-              <a:srgbClr val="1E293B"/>
-            </a:solidFill>
-          </a:ln>
-        </p:spPr>
-        <p:style>
-          <a:lnRef idx="1">
-            <a:schemeClr val="accent1"/>
-          </a:lnRef>
-          <a:fillRef idx="3">
-            <a:schemeClr val="accent1"/>
-          </a:fillRef>
-          <a:effectRef idx="2">
-            <a:schemeClr val="accent1"/>
-          </a:effectRef>
-          <a:fontRef idx="minor">
-            <a:schemeClr val="lt1"/>
-          </a:fontRef>
-        </p:style>
-        <p:txBody>
-          <a:bodyPr rtlCol="0" anchor="ctr" wrap="square"/>
-          <a:lstStyle/>
-          <a:p>
-            <a:pPr algn="ctr">
-              <a:defRPr sz="1200">
-                <a:solidFill>
-                  <a:srgbClr val="94A3B8"/>
-                </a:solidFill>
-              </a:defRPr>
-            </a:pPr>
-            <a:r>
-              <a:t>Fragile cloud-dependent automation that fails whenever plant internet or WAN connectivity drops.</a:t>
-            </a:r>
-          </a:p>
-        </p:txBody>
-      </p:sp>
-      <p:sp>
-        <p:nvSpPr>
-          <p:cNvPr id="11" name="Rounded Rectangle 10"/>
-          <p:cNvSpPr/>
-          <p:nvPr/>
-        </p:nvSpPr>
-        <p:spPr>
-          <a:xfrm>
-            <a:off x="6217920" y="3291840"/>
-            <a:ext cx="5212080" cy="960120"/>
-          </a:xfrm>
-          <a:prstGeom prst="roundRect">
-            <a:avLst/>
-          </a:prstGeom>
-          <a:solidFill>
-            <a:srgbClr val="141E37"/>
-          </a:solidFill>
-          <a:ln>
-            <a:solidFill>
-              <a:srgbClr val="00D4FF"/>
-            </a:solidFill>
-          </a:ln>
-        </p:spPr>
-        <p:style>
-          <a:lnRef idx="1">
-            <a:schemeClr val="accent1"/>
-          </a:lnRef>
-          <a:fillRef idx="3">
-            <a:schemeClr val="accent1"/>
-          </a:fillRef>
-          <a:effectRef idx="2">
-            <a:schemeClr val="accent1"/>
-          </a:effectRef>
-          <a:fontRef idx="minor">
-            <a:schemeClr val="lt1"/>
-          </a:fontRef>
-        </p:style>
-        <p:txBody>
-          <a:bodyPr rtlCol="0" anchor="ctr" wrap="square"/>
-          <a:lstStyle/>
-          <a:p>
-            <a:pPr algn="ctr">
-              <a:defRPr sz="1250" b="1">
-                <a:solidFill>
-                  <a:srgbClr val="FFFFFF"/>
-                </a:solidFill>
-              </a:defRPr>
-            </a:pPr>
-            <a:r>
-              <a:t>Edge-native microservices that continue autonomous local execution even during total WAN blackout.</a:t>
-            </a:r>
-          </a:p>
-        </p:txBody>
-      </p:sp>
-      <p:sp>
-        <p:nvSpPr>
-          <p:cNvPr id="12" name="Rounded Rectangle 11"/>
-          <p:cNvSpPr/>
-          <p:nvPr/>
-        </p:nvSpPr>
-        <p:spPr>
-          <a:xfrm>
-            <a:off x="731520" y="4343400"/>
-            <a:ext cx="5212080" cy="960120"/>
-          </a:xfrm>
-          <a:prstGeom prst="roundRect">
-            <a:avLst/>
-          </a:prstGeom>
-          <a:solidFill>
-            <a:srgbClr val="0F172A"/>
-          </a:solidFill>
-          <a:ln>
-            <a:solidFill>
-              <a:srgbClr val="1E293B"/>
-            </a:solidFill>
-          </a:ln>
-        </p:spPr>
-        <p:style>
-          <a:lnRef idx="1">
-            <a:schemeClr val="accent1"/>
-          </a:lnRef>
-          <a:fillRef idx="3">
-            <a:schemeClr val="accent1"/>
-          </a:fillRef>
-          <a:effectRef idx="2">
-            <a:schemeClr val="accent1"/>
-          </a:effectRef>
-          <a:fontRef idx="minor">
-            <a:schemeClr val="lt1"/>
-          </a:fontRef>
-        </p:style>
-        <p:txBody>
-          <a:bodyPr rtlCol="0" anchor="ctr" wrap="square"/>
-          <a:lstStyle/>
-          <a:p>
-            <a:pPr algn="ctr">
-              <a:defRPr sz="1200">
-                <a:solidFill>
-                  <a:srgbClr val="94A3B8"/>
-                </a:solidFill>
-              </a:defRPr>
-            </a:pPr>
-            <a:r>
-              <a:t>Manual visual inspections requiring staff to climb tall boilers, flare stacks, or live switchyards.</a:t>
-            </a:r>
-          </a:p>
-        </p:txBody>
-      </p:sp>
-      <p:sp>
-        <p:nvSpPr>
-          <p:cNvPr id="13" name="Rounded Rectangle 12"/>
-          <p:cNvSpPr/>
-          <p:nvPr/>
-        </p:nvSpPr>
-        <p:spPr>
-          <a:xfrm>
-            <a:off x="6217920" y="4343400"/>
-            <a:ext cx="5212080" cy="960120"/>
-          </a:xfrm>
-          <a:prstGeom prst="roundRect">
-            <a:avLst/>
-          </a:prstGeom>
-          <a:solidFill>
-            <a:srgbClr val="141E37"/>
-          </a:solidFill>
-          <a:ln>
-            <a:solidFill>
-              <a:srgbClr val="00D4FF"/>
-            </a:solidFill>
-          </a:ln>
-        </p:spPr>
-        <p:style>
-          <a:lnRef idx="1">
-            <a:schemeClr val="accent1"/>
-          </a:lnRef>
-          <a:fillRef idx="3">
-            <a:schemeClr val="accent1"/>
-          </a:fillRef>
-          <a:effectRef idx="2">
-            <a:schemeClr val="accent1"/>
-          </a:effectRef>
-          <a:fontRef idx="minor">
-            <a:schemeClr val="lt1"/>
-          </a:fontRef>
-        </p:style>
-        <p:txBody>
-          <a:bodyPr rtlCol="0" anchor="ctr" wrap="square"/>
-          <a:lstStyle/>
-          <a:p>
-            <a:pPr algn="ctr">
-              <a:defRPr sz="1250" b="1">
-                <a:solidFill>
-                  <a:srgbClr val="FFFFFF"/>
-                </a:solidFill>
-              </a:defRPr>
-            </a:pPr>
-            <a:r>
-              <a:t>Automated dispatch of autonomous UAVs and tracked robots with real-time waypoint guidance.</a:t>
-            </a:r>
-          </a:p>
-        </p:txBody>
-      </p:sp>
-      <p:sp>
-        <p:nvSpPr>
-          <p:cNvPr id="14" name="Rounded Rectangle 13"/>
-          <p:cNvSpPr/>
-          <p:nvPr/>
-        </p:nvSpPr>
-        <p:spPr>
-          <a:xfrm>
-            <a:off x="731520" y="5394960"/>
-            <a:ext cx="5212080" cy="960120"/>
-          </a:xfrm>
-          <a:prstGeom prst="roundRect">
-            <a:avLst/>
-          </a:prstGeom>
-          <a:solidFill>
-            <a:srgbClr val="0F172A"/>
-          </a:solidFill>
-          <a:ln>
-            <a:solidFill>
-              <a:srgbClr val="1E293B"/>
-            </a:solidFill>
-          </a:ln>
-        </p:spPr>
-        <p:style>
-          <a:lnRef idx="1">
-            <a:schemeClr val="accent1"/>
-          </a:lnRef>
-          <a:fillRef idx="3">
-            <a:schemeClr val="accent1"/>
-          </a:fillRef>
-          <a:effectRef idx="2">
-            <a:schemeClr val="accent1"/>
-          </a:effectRef>
-          <a:fontRef idx="minor">
-            <a:schemeClr val="lt1"/>
-          </a:fontRef>
-        </p:style>
-        <p:txBody>
-          <a:bodyPr rtlCol="0" anchor="ctr" wrap="square"/>
-          <a:lstStyle/>
-          <a:p>
-            <a:pPr algn="ctr">
-              <a:defRPr sz="1200">
-                <a:solidFill>
-                  <a:srgbClr val="94A3B8"/>
-                </a:solidFill>
-              </a:defRPr>
-            </a:pPr>
-            <a:r>
-              <a:t>Static high/low threshold alarms trigger only after physical process degradation has occurred.</a:t>
-            </a:r>
-          </a:p>
-        </p:txBody>
-      </p:sp>
-      <p:sp>
-        <p:nvSpPr>
-          <p:cNvPr id="15" name="Rounded Rectangle 14"/>
-          <p:cNvSpPr/>
-          <p:nvPr/>
-        </p:nvSpPr>
-        <p:spPr>
-          <a:xfrm>
-            <a:off x="6217920" y="5394960"/>
-            <a:ext cx="5212080" cy="960120"/>
-          </a:xfrm>
-          <a:prstGeom prst="roundRect">
-            <a:avLst/>
-          </a:prstGeom>
-          <a:solidFill>
-            <a:srgbClr val="141E37"/>
-          </a:solidFill>
-          <a:ln>
-            <a:solidFill>
-              <a:srgbClr val="00D4FF"/>
-            </a:solidFill>
-          </a:ln>
-        </p:spPr>
-        <p:style>
-          <a:lnRef idx="1">
-            <a:schemeClr val="accent1"/>
-          </a:lnRef>
-          <a:fillRef idx="3">
-            <a:schemeClr val="accent1"/>
-          </a:fillRef>
-          <a:effectRef idx="2">
-            <a:schemeClr val="accent1"/>
-          </a:effectRef>
-          <a:fontRef idx="minor">
-            <a:schemeClr val="lt1"/>
-          </a:fontRef>
-        </p:style>
-        <p:txBody>
-          <a:bodyPr rtlCol="0" anchor="ctr" wrap="square"/>
-          <a:lstStyle/>
-          <a:p>
-            <a:pPr algn="ctr">
-              <a:defRPr sz="1250" b="1">
-                <a:solidFill>
-                  <a:srgbClr val="FFFFFF"/>
-                </a:solidFill>
-              </a:defRPr>
-            </a:pPr>
-            <a:r>
-              <a:t>TerraEmbodiment physics-informed models forecast multi-variable trajectories up to 72 hours in advance.</a:t>
+              <a:t>Efficiency (High-Speed Valve Modulation)</a:t>
+            </a:r>
+          </a:p>
+          <a:p>
+            <a:pPr>
+              <a:defRPr sz="1000">
+                <a:solidFill>
+                  <a:srgbClr val="F1F5F9"/>
+                </a:solidFill>
+              </a:defRPr>
+            </a:pPr>
+            <a:r>
+              <a:t>Directly modulates thermal injection valves and high-pressure pumps to suppress water hammer transients.</a:t>
             </a:r>
           </a:p>
         </p:txBody>
@@ -5313,7 +6704,7 @@
             <a:avLst/>
           </a:prstGeom>
           <a:solidFill>
-            <a:srgbClr val="0A0E1A"/>
+            <a:srgbClr val="0B0F17"/>
           </a:solidFill>
           <a:ln>
             <a:noFill/>
@@ -5349,17 +6740,19 @@
         </p:nvSpPr>
         <p:spPr>
           <a:xfrm>
-            <a:off x="0" y="0"/>
-            <a:ext cx="12191695" cy="54864"/>
+            <a:off x="731520" y="365760"/>
+            <a:ext cx="10728655" cy="18288"/>
           </a:xfrm>
           <a:prstGeom prst="rect">
             <a:avLst/>
           </a:prstGeom>
           <a:solidFill>
-            <a:srgbClr val="00D4FF"/>
+            <a:srgbClr val="38BDF8"/>
           </a:solidFill>
           <a:ln>
-            <a:noFill/>
+            <a:solidFill>
+              <a:srgbClr val="38BDF8"/>
+            </a:solidFill>
           </a:ln>
         </p:spPr>
         <p:style>
@@ -5392,8 +6785,8 @@
         </p:nvSpPr>
         <p:spPr>
           <a:xfrm>
-            <a:off x="731520" y="365760"/>
-            <a:ext cx="10698480" cy="1005840"/>
+            <a:off x="731520" y="438912"/>
+            <a:ext cx="8229600" cy="274320"/>
           </a:xfrm>
           <a:prstGeom prst="rect">
             <a:avLst/>
@@ -5401,35 +6794,20 @@
           <a:noFill/>
         </p:spPr>
         <p:txBody>
-          <a:bodyPr wrap="square">
+          <a:bodyPr wrap="square" lIns="0" rIns="0" tIns="0" bIns="0">
             <a:spAutoFit/>
           </a:bodyPr>
           <a:lstStyle/>
           <a:p>
             <a:pPr>
-              <a:spcAft>
-                <a:spcPts val="400"/>
-              </a:spcAft>
-              <a:defRPr sz="1150" b="1">
-                <a:solidFill>
-                  <a:srgbClr val="00D4FF"/>
-                </a:solidFill>
-              </a:defRPr>
-            </a:pPr>
-            <a:r>
-              <a:t>TERRAEMBODIMENT  |  TERRESTRIAL PLATFORM</a:t>
-            </a:r>
-          </a:p>
-          <a:p>
-            <a:pPr>
-              <a:defRPr sz="2500" b="1">
-                <a:solidFill>
-                  <a:srgbClr val="FFFFFF"/>
-                </a:solidFill>
-              </a:defRPr>
-            </a:pPr>
-            <a:r>
-              <a:t>End-to-End System Architecture &amp; Real-Time Pipeline</a:t>
+              <a:defRPr sz="950" b="1">
+                <a:solidFill>
+                  <a:srgbClr val="38BDF8"/>
+                </a:solidFill>
+              </a:defRPr>
+            </a:pPr>
+            <a:r>
+              <a:t>TERRESTRIAL PLATFORM  |  TERRAEMBODIMENT  |  ARCHITECTURAL CONTRAST</a:t>
             </a:r>
           </a:p>
         </p:txBody>
@@ -5442,8 +6820,8 @@
         </p:nvSpPr>
         <p:spPr>
           <a:xfrm>
-            <a:off x="731520" y="6446520"/>
-            <a:ext cx="10698480" cy="320040"/>
+            <a:off x="731520" y="731520"/>
+            <a:ext cx="9601200" cy="777240"/>
           </a:xfrm>
           <a:prstGeom prst="rect">
             <a:avLst/>
@@ -5451,44 +6829,83 @@
           <a:noFill/>
         </p:spPr>
         <p:txBody>
-          <a:bodyPr wrap="none">
+          <a:bodyPr wrap="square" lIns="0" rIns="0" tIns="0" bIns="0">
             <a:spAutoFit/>
           </a:bodyPr>
           <a:lstStyle/>
           <a:p>
             <a:pPr>
-              <a:defRPr sz="1000">
+              <a:defRPr sz="1900" b="1">
+                <a:solidFill>
+                  <a:srgbClr val="FFFFFF"/>
+                </a:solidFill>
+              </a:defRPr>
+            </a:pPr>
+            <a:r>
+              <a:t>Comparison with Traditional SCADA / Legacy Systems</a:t>
+            </a:r>
+          </a:p>
+          <a:p>
+            <a:pPr>
+              <a:spcBef>
+                <a:spcPts val="300"/>
+              </a:spcBef>
+              <a:defRPr sz="1050">
                 <a:solidFill>
                   <a:srgbClr val="94A3B8"/>
                 </a:solidFill>
               </a:defRPr>
             </a:pPr>
             <a:r>
-              <a:t>TERRESTRIAL PLATFORM  |  TERRAEMBODIMENT CATALOGUE  |  CONFIDENTIAL - AUTHORISED SYSTEM INTEGRATORS ONLY</a:t>
-            </a:r>
-          </a:p>
-        </p:txBody>
-      </p:sp>
-      <p:sp>
-        <p:nvSpPr>
-          <p:cNvPr id="6" name="Rounded Rectangle 5"/>
+              <a:t>Point-by-point contrast demonstrating the technological shift from legacy industrial automation to the Terrestrial Platform.</a:t>
+            </a:r>
+          </a:p>
+        </p:txBody>
+      </p:sp>
+      <p:pic>
+        <p:nvPicPr>
+          <p:cNvPr id="6" name="Picture 5" descr="tp_logo_white.png"/>
+          <p:cNvPicPr>
+            <a:picLocks noChangeAspect="1"/>
+          </p:cNvPicPr>
+          <p:nvPr/>
+        </p:nvPicPr>
+        <p:blipFill>
+          <a:blip r:embed="rId2"/>
+          <a:stretch>
+            <a:fillRect/>
+          </a:stretch>
+        </p:blipFill>
+        <p:spPr>
+          <a:xfrm>
+            <a:off x="10469880" y="411480"/>
+            <a:ext cx="987552" cy="384048"/>
+          </a:xfrm>
+          <a:prstGeom prst="rect">
+            <a:avLst/>
+          </a:prstGeom>
+        </p:spPr>
+      </p:pic>
+      <p:sp>
+        <p:nvSpPr>
+          <p:cNvPr id="7" name="Rounded Rectangle 6"/>
           <p:cNvSpPr/>
           <p:nvPr/>
         </p:nvSpPr>
         <p:spPr>
           <a:xfrm>
-            <a:off x="731520" y="1645920"/>
-            <a:ext cx="2523744" cy="4389120"/>
+            <a:off x="731520" y="1691640"/>
+            <a:ext cx="5230368" cy="502920"/>
           </a:xfrm>
           <a:prstGeom prst="roundRect">
             <a:avLst/>
           </a:prstGeom>
           <a:solidFill>
-            <a:srgbClr val="0F172A"/>
+            <a:srgbClr val="1C1216"/>
           </a:solidFill>
-          <a:ln>
+          <a:ln w="12700">
             <a:solidFill>
-              <a:srgbClr val="1E293B"/>
+              <a:srgbClr val="501923"/>
             </a:solidFill>
           </a:ln>
         </p:spPr>
@@ -5507,72 +6924,68 @@
           </a:fontRef>
         </p:style>
         <p:txBody>
-          <a:bodyPr rtlCol="0" anchor="ctr" wrap="square"/>
-          <a:lstStyle/>
-          <a:p>
-            <a:pPr algn="ctr">
-              <a:spcAft>
-                <a:spcPts val="800"/>
-              </a:spcAft>
+          <a:bodyPr rtlCol="0" anchor="ctr"/>
+          <a:lstStyle/>
+          <a:p>
+            <a:pPr algn="ctr"/>
+          </a:p>
+        </p:txBody>
+      </p:sp>
+      <p:sp>
+        <p:nvSpPr>
+          <p:cNvPr id="8" name="TextBox 7"/>
+          <p:cNvSpPr txBox="1"/>
+          <p:nvPr/>
+        </p:nvSpPr>
+        <p:spPr>
+          <a:xfrm>
+            <a:off x="868680" y="1783080"/>
+            <a:ext cx="4937760" cy="320040"/>
+          </a:xfrm>
+          <a:prstGeom prst="rect">
+            <a:avLst/>
+          </a:prstGeom>
+          <a:noFill/>
+        </p:spPr>
+        <p:txBody>
+          <a:bodyPr wrap="none">
+            <a:spAutoFit/>
+          </a:bodyPr>
+          <a:lstStyle/>
+          <a:p>
+            <a:pPr>
               <a:defRPr sz="1100" b="1">
                 <a:solidFill>
-                  <a:srgbClr val="00D4FF"/>
-                </a:solidFill>
-              </a:defRPr>
-            </a:pPr>
-            <a:r>
-              <a:t>LAYER 01</a:t>
-            </a:r>
-          </a:p>
-          <a:p>
-            <a:pPr>
-              <a:spcAft>
-                <a:spcPts val="1200"/>
-              </a:spcAft>
-              <a:defRPr sz="1550" b="1">
-                <a:solidFill>
-                  <a:srgbClr val="FFFFFF"/>
-                </a:solidFill>
-              </a:defRPr>
-            </a:pPr>
-            <a:r>
-              <a:t>Spatial LiDAR &amp; Robot Ingestion</a:t>
-            </a:r>
-          </a:p>
-          <a:p>
-            <a:pPr>
-              <a:defRPr sz="1250">
-                <a:solidFill>
-                  <a:srgbClr val="C8D8F0"/>
-                </a:solidFill>
-              </a:defRPr>
-            </a:pPr>
-            <a:r>
-              <a:t>High-bandwidth sensory acquisition aggregating 2D/3D LiDAR point clouds, depth cameras, joint servo encoders, and IMU inertial sensors.</a:t>
-            </a:r>
-          </a:p>
-        </p:txBody>
-      </p:sp>
-      <p:sp>
-        <p:nvSpPr>
-          <p:cNvPr id="7" name="Rounded Rectangle 6"/>
+                  <a:srgbClr val="EF4444"/>
+                </a:solidFill>
+              </a:defRPr>
+            </a:pPr>
+            <a:r>
+              <a:t>TRADITIONAL LEGACY SYSTEMS / SILOED SCADA</a:t>
+            </a:r>
+          </a:p>
+        </p:txBody>
+      </p:sp>
+      <p:sp>
+        <p:nvSpPr>
+          <p:cNvPr id="9" name="Rounded Rectangle 8"/>
           <p:cNvSpPr/>
           <p:nvPr/>
         </p:nvSpPr>
         <p:spPr>
           <a:xfrm>
-            <a:off x="3456432" y="1645920"/>
-            <a:ext cx="2523744" cy="4389120"/>
+            <a:off x="6227064" y="1691640"/>
+            <a:ext cx="5230368" cy="502920"/>
           </a:xfrm>
           <a:prstGeom prst="roundRect">
             <a:avLst/>
           </a:prstGeom>
           <a:solidFill>
-            <a:srgbClr val="0F172A"/>
+            <a:srgbClr val="0F1C26"/>
           </a:solidFill>
-          <a:ln>
+          <a:ln w="12700">
             <a:solidFill>
-              <a:srgbClr val="1E293B"/>
+              <a:srgbClr val="194B5F"/>
             </a:solidFill>
           </a:ln>
         </p:spPr>
@@ -5591,72 +7004,68 @@
           </a:fontRef>
         </p:style>
         <p:txBody>
-          <a:bodyPr rtlCol="0" anchor="ctr" wrap="square"/>
-          <a:lstStyle/>
-          <a:p>
-            <a:pPr algn="ctr">
-              <a:spcAft>
-                <a:spcPts val="800"/>
-              </a:spcAft>
+          <a:bodyPr rtlCol="0" anchor="ctr"/>
+          <a:lstStyle/>
+          <a:p>
+            <a:pPr algn="ctr"/>
+          </a:p>
+        </p:txBody>
+      </p:sp>
+      <p:sp>
+        <p:nvSpPr>
+          <p:cNvPr id="10" name="TextBox 9"/>
+          <p:cNvSpPr txBox="1"/>
+          <p:nvPr/>
+        </p:nvSpPr>
+        <p:spPr>
+          <a:xfrm>
+            <a:off x="6364224" y="1783080"/>
+            <a:ext cx="4937760" cy="320040"/>
+          </a:xfrm>
+          <a:prstGeom prst="rect">
+            <a:avLst/>
+          </a:prstGeom>
+          <a:noFill/>
+        </p:spPr>
+        <p:txBody>
+          <a:bodyPr wrap="none">
+            <a:spAutoFit/>
+          </a:bodyPr>
+          <a:lstStyle/>
+          <a:p>
+            <a:pPr>
               <a:defRPr sz="1100" b="1">
                 <a:solidFill>
-                  <a:srgbClr val="00D4FF"/>
-                </a:solidFill>
-              </a:defRPr>
-            </a:pPr>
-            <a:r>
-              <a:t>LAYER 02</a:t>
-            </a:r>
-          </a:p>
-          <a:p>
-            <a:pPr>
-              <a:spcAft>
-                <a:spcPts val="1200"/>
-              </a:spcAft>
-              <a:defRPr sz="1550" b="1">
-                <a:solidFill>
-                  <a:srgbClr val="FFFFFF"/>
-                </a:solidFill>
-              </a:defRPr>
-            </a:pPr>
-            <a:r>
-              <a:t>Deterministic Robotic Fabric</a:t>
-            </a:r>
-          </a:p>
-          <a:p>
-            <a:pPr>
-              <a:defRPr sz="1250">
-                <a:solidFill>
-                  <a:srgbClr val="C8D8F0"/>
-                </a:solidFill>
-              </a:defRPr>
-            </a:pPr>
-            <a:r>
-              <a:t>Sub-5ms spatial point cloud filtering, real-time wheel odometry synchronization, and collision exclusion zone monitoring.</a:t>
-            </a:r>
-          </a:p>
-        </p:txBody>
-      </p:sp>
-      <p:sp>
-        <p:nvSpPr>
-          <p:cNvPr id="8" name="Rounded Rectangle 7"/>
+                  <a:srgbClr val="38BDF8"/>
+                </a:solidFill>
+              </a:defRPr>
+            </a:pPr>
+            <a:r>
+              <a:t>TERRAEMBODIMENT TERRESTRIAL PLATFORM ADVANTAGE</a:t>
+            </a:r>
+          </a:p>
+        </p:txBody>
+      </p:sp>
+      <p:sp>
+        <p:nvSpPr>
+          <p:cNvPr id="11" name="Rounded Rectangle 10"/>
           <p:cNvSpPr/>
           <p:nvPr/>
         </p:nvSpPr>
         <p:spPr>
           <a:xfrm>
-            <a:off x="6181344" y="1645920"/>
-            <a:ext cx="2523744" cy="4389120"/>
+            <a:off x="731520" y="2286000"/>
+            <a:ext cx="5230368" cy="1298448"/>
           </a:xfrm>
           <a:prstGeom prst="roundRect">
             <a:avLst/>
           </a:prstGeom>
           <a:solidFill>
-            <a:srgbClr val="0F172A"/>
+            <a:srgbClr val="1C1216"/>
           </a:solidFill>
-          <a:ln>
+          <a:ln w="12700">
             <a:solidFill>
-              <a:srgbClr val="1E293B"/>
+              <a:srgbClr val="501923"/>
             </a:solidFill>
           </a:ln>
         </p:spPr>
@@ -5675,72 +7084,68 @@
           </a:fontRef>
         </p:style>
         <p:txBody>
-          <a:bodyPr rtlCol="0" anchor="ctr" wrap="square"/>
-          <a:lstStyle/>
-          <a:p>
-            <a:pPr algn="ctr">
-              <a:spcAft>
-                <a:spcPts val="800"/>
-              </a:spcAft>
-              <a:defRPr sz="1100" b="1">
-                <a:solidFill>
-                  <a:srgbClr val="00D4FF"/>
-                </a:solidFill>
-              </a:defRPr>
-            </a:pPr>
-            <a:r>
-              <a:t>LAYER 03</a:t>
-            </a:r>
-          </a:p>
-          <a:p>
-            <a:pPr>
-              <a:spcAft>
-                <a:spcPts val="1200"/>
-              </a:spcAft>
-              <a:defRPr sz="1550" b="1">
-                <a:solidFill>
-                  <a:srgbClr val="FFFFFF"/>
-                </a:solidFill>
-              </a:defRPr>
-            </a:pPr>
-            <a:r>
-              <a:t>Spatial SLAM &amp; Fleet Planner</a:t>
-            </a:r>
-          </a:p>
-          <a:p>
-            <a:pPr>
-              <a:defRPr sz="1250">
-                <a:solidFill>
-                  <a:srgbClr val="C8D8F0"/>
-                </a:solidFill>
-              </a:defRPr>
-            </a:pPr>
-            <a:r>
-              <a:t>Multi-agent cooperative SLAM, dynamic obstacle avoidance, warehouse traffic deadlock resolution, and robotic 6-axis inverse kinematics.</a:t>
-            </a:r>
-          </a:p>
-        </p:txBody>
-      </p:sp>
-      <p:sp>
-        <p:nvSpPr>
-          <p:cNvPr id="9" name="Rounded Rectangle 8"/>
+          <a:bodyPr rtlCol="0" anchor="ctr"/>
+          <a:lstStyle/>
+          <a:p>
+            <a:pPr algn="ctr"/>
+          </a:p>
+        </p:txBody>
+      </p:sp>
+      <p:sp>
+        <p:nvSpPr>
+          <p:cNvPr id="12" name="TextBox 11"/>
+          <p:cNvSpPr txBox="1"/>
+          <p:nvPr/>
+        </p:nvSpPr>
+        <p:spPr>
+          <a:xfrm>
+            <a:off x="868680" y="2359152"/>
+            <a:ext cx="4956048" cy="1152144"/>
+          </a:xfrm>
+          <a:prstGeom prst="rect">
+            <a:avLst/>
+          </a:prstGeom>
+          <a:noFill/>
+        </p:spPr>
+        <p:txBody>
+          <a:bodyPr wrap="square" lIns="0" rIns="0" tIns="0" bIns="0">
+            <a:spAutoFit/>
+          </a:bodyPr>
+          <a:lstStyle/>
+          <a:p>
+            <a:pPr>
+              <a:defRPr sz="1000">
+                <a:solidFill>
+                  <a:srgbClr val="F1F5F9"/>
+                </a:solidFill>
+              </a:defRPr>
+            </a:pPr>
+            <a:r>
+              <a:t>AI systems only provide advisory charts; human technicians must physically walk to switchgear to turn knobs or trip breakers.</a:t>
+            </a:r>
+          </a:p>
+        </p:txBody>
+      </p:sp>
+      <p:sp>
+        <p:nvSpPr>
+          <p:cNvPr id="13" name="Rounded Rectangle 12"/>
           <p:cNvSpPr/>
           <p:nvPr/>
         </p:nvSpPr>
         <p:spPr>
           <a:xfrm>
-            <a:off x="8906256" y="1645920"/>
-            <a:ext cx="2523744" cy="4389120"/>
+            <a:off x="6227064" y="2286000"/>
+            <a:ext cx="5230368" cy="1298448"/>
           </a:xfrm>
           <a:prstGeom prst="roundRect">
             <a:avLst/>
           </a:prstGeom>
           <a:solidFill>
-            <a:srgbClr val="0F172A"/>
+            <a:srgbClr val="0F1C26"/>
           </a:solidFill>
-          <a:ln>
+          <a:ln w="12700">
             <a:solidFill>
-              <a:srgbClr val="1E293B"/>
+              <a:srgbClr val="194B5F"/>
             </a:solidFill>
           </a:ln>
         </p:spPr>
@@ -5759,48 +7164,364 @@
           </a:fontRef>
         </p:style>
         <p:txBody>
-          <a:bodyPr rtlCol="0" anchor="ctr" wrap="square"/>
-          <a:lstStyle/>
-          <a:p>
-            <a:pPr algn="ctr">
-              <a:spcAft>
-                <a:spcPts val="800"/>
-              </a:spcAft>
-              <a:defRPr sz="1100" b="1">
-                <a:solidFill>
-                  <a:srgbClr val="00D4FF"/>
-                </a:solidFill>
-              </a:defRPr>
-            </a:pPr>
-            <a:r>
-              <a:t>LAYER 04</a:t>
-            </a:r>
-          </a:p>
-          <a:p>
-            <a:pPr>
-              <a:spcAft>
-                <a:spcPts val="1200"/>
-              </a:spcAft>
-              <a:defRPr sz="1550" b="1">
-                <a:solidFill>
-                  <a:srgbClr val="FFFFFF"/>
-                </a:solidFill>
-              </a:defRPr>
-            </a:pPr>
-            <a:r>
-              <a:t>Fleet Teleoperation Cockpit</a:t>
-            </a:r>
-          </a:p>
-          <a:p>
-            <a:pPr>
-              <a:defRPr sz="1250">
-                <a:solidFill>
-                  <a:srgbClr val="C8D8F0"/>
-                </a:solidFill>
-              </a:defRPr>
-            </a:pPr>
-            <a:r>
-              <a:t>Closed-loop AMR velocity drive execution, 6-axis joint torque commands, automatic dock opportunity charging, and ANSI/ISA-101 fleet consoles.</a:t>
+          <a:bodyPr rtlCol="0" anchor="ctr"/>
+          <a:lstStyle/>
+          <a:p>
+            <a:pPr algn="ctr"/>
+          </a:p>
+        </p:txBody>
+      </p:sp>
+      <p:sp>
+        <p:nvSpPr>
+          <p:cNvPr id="14" name="TextBox 13"/>
+          <p:cNvSpPr txBox="1"/>
+          <p:nvPr/>
+        </p:nvSpPr>
+        <p:spPr>
+          <a:xfrm>
+            <a:off x="6364224" y="2359152"/>
+            <a:ext cx="4956048" cy="1152144"/>
+          </a:xfrm>
+          <a:prstGeom prst="rect">
+            <a:avLst/>
+          </a:prstGeom>
+          <a:noFill/>
+        </p:spPr>
+        <p:txBody>
+          <a:bodyPr wrap="square" lIns="0" rIns="0" tIns="0" bIns="0">
+            <a:spAutoFit/>
+          </a:bodyPr>
+          <a:lstStyle/>
+          <a:p>
+            <a:pPr>
+              <a:defRPr sz="1000" b="1">
+                <a:solidFill>
+                  <a:srgbClr val="34D399"/>
+                </a:solidFill>
+              </a:defRPr>
+            </a:pPr>
+            <a:r>
+              <a:t>Closed-loop, deterministic execution straight to industrial bus controllers with microsecond safety boundaries.</a:t>
+            </a:r>
+          </a:p>
+        </p:txBody>
+      </p:sp>
+      <p:sp>
+        <p:nvSpPr>
+          <p:cNvPr id="15" name="Rounded Rectangle 14"/>
+          <p:cNvSpPr/>
+          <p:nvPr/>
+        </p:nvSpPr>
+        <p:spPr>
+          <a:xfrm>
+            <a:off x="731520" y="3694176"/>
+            <a:ext cx="5230368" cy="1298448"/>
+          </a:xfrm>
+          <a:prstGeom prst="roundRect">
+            <a:avLst/>
+          </a:prstGeom>
+          <a:solidFill>
+            <a:srgbClr val="1C1216"/>
+          </a:solidFill>
+          <a:ln w="12700">
+            <a:solidFill>
+              <a:srgbClr val="501923"/>
+            </a:solidFill>
+          </a:ln>
+        </p:spPr>
+        <p:style>
+          <a:lnRef idx="1">
+            <a:schemeClr val="accent1"/>
+          </a:lnRef>
+          <a:fillRef idx="3">
+            <a:schemeClr val="accent1"/>
+          </a:fillRef>
+          <a:effectRef idx="2">
+            <a:schemeClr val="accent1"/>
+          </a:effectRef>
+          <a:fontRef idx="minor">
+            <a:schemeClr val="lt1"/>
+          </a:fontRef>
+        </p:style>
+        <p:txBody>
+          <a:bodyPr rtlCol="0" anchor="ctr"/>
+          <a:lstStyle/>
+          <a:p>
+            <a:pPr algn="ctr"/>
+          </a:p>
+        </p:txBody>
+      </p:sp>
+      <p:sp>
+        <p:nvSpPr>
+          <p:cNvPr id="16" name="TextBox 15"/>
+          <p:cNvSpPr txBox="1"/>
+          <p:nvPr/>
+        </p:nvSpPr>
+        <p:spPr>
+          <a:xfrm>
+            <a:off x="868680" y="3767328"/>
+            <a:ext cx="4956048" cy="1152144"/>
+          </a:xfrm>
+          <a:prstGeom prst="rect">
+            <a:avLst/>
+          </a:prstGeom>
+          <a:noFill/>
+        </p:spPr>
+        <p:txBody>
+          <a:bodyPr wrap="square" lIns="0" rIns="0" tIns="0" bIns="0">
+            <a:spAutoFit/>
+          </a:bodyPr>
+          <a:lstStyle/>
+          <a:p>
+            <a:pPr>
+              <a:defRPr sz="1000">
+                <a:solidFill>
+                  <a:srgbClr val="F1F5F9"/>
+                </a:solidFill>
+              </a:defRPr>
+            </a:pPr>
+            <a:r>
+              <a:t>Fragile cloud-dependent automation that fails whenever plant internet or WAN connectivity drops.</a:t>
+            </a:r>
+          </a:p>
+        </p:txBody>
+      </p:sp>
+      <p:sp>
+        <p:nvSpPr>
+          <p:cNvPr id="17" name="Rounded Rectangle 16"/>
+          <p:cNvSpPr/>
+          <p:nvPr/>
+        </p:nvSpPr>
+        <p:spPr>
+          <a:xfrm>
+            <a:off x="6227064" y="3694176"/>
+            <a:ext cx="5230368" cy="1298448"/>
+          </a:xfrm>
+          <a:prstGeom prst="roundRect">
+            <a:avLst/>
+          </a:prstGeom>
+          <a:solidFill>
+            <a:srgbClr val="0F1C26"/>
+          </a:solidFill>
+          <a:ln w="12700">
+            <a:solidFill>
+              <a:srgbClr val="194B5F"/>
+            </a:solidFill>
+          </a:ln>
+        </p:spPr>
+        <p:style>
+          <a:lnRef idx="1">
+            <a:schemeClr val="accent1"/>
+          </a:lnRef>
+          <a:fillRef idx="3">
+            <a:schemeClr val="accent1"/>
+          </a:fillRef>
+          <a:effectRef idx="2">
+            <a:schemeClr val="accent1"/>
+          </a:effectRef>
+          <a:fontRef idx="minor">
+            <a:schemeClr val="lt1"/>
+          </a:fontRef>
+        </p:style>
+        <p:txBody>
+          <a:bodyPr rtlCol="0" anchor="ctr"/>
+          <a:lstStyle/>
+          <a:p>
+            <a:pPr algn="ctr"/>
+          </a:p>
+        </p:txBody>
+      </p:sp>
+      <p:sp>
+        <p:nvSpPr>
+          <p:cNvPr id="18" name="TextBox 17"/>
+          <p:cNvSpPr txBox="1"/>
+          <p:nvPr/>
+        </p:nvSpPr>
+        <p:spPr>
+          <a:xfrm>
+            <a:off x="6364224" y="3767328"/>
+            <a:ext cx="4956048" cy="1152144"/>
+          </a:xfrm>
+          <a:prstGeom prst="rect">
+            <a:avLst/>
+          </a:prstGeom>
+          <a:noFill/>
+        </p:spPr>
+        <p:txBody>
+          <a:bodyPr wrap="square" lIns="0" rIns="0" tIns="0" bIns="0">
+            <a:spAutoFit/>
+          </a:bodyPr>
+          <a:lstStyle/>
+          <a:p>
+            <a:pPr>
+              <a:defRPr sz="1000" b="1">
+                <a:solidFill>
+                  <a:srgbClr val="34D399"/>
+                </a:solidFill>
+              </a:defRPr>
+            </a:pPr>
+            <a:r>
+              <a:t>Edge-native microservices that continue autonomous local execution even during total WAN blackout.</a:t>
+            </a:r>
+          </a:p>
+        </p:txBody>
+      </p:sp>
+      <p:sp>
+        <p:nvSpPr>
+          <p:cNvPr id="19" name="Rounded Rectangle 18"/>
+          <p:cNvSpPr/>
+          <p:nvPr/>
+        </p:nvSpPr>
+        <p:spPr>
+          <a:xfrm>
+            <a:off x="731520" y="5102352"/>
+            <a:ext cx="5230368" cy="1298448"/>
+          </a:xfrm>
+          <a:prstGeom prst="roundRect">
+            <a:avLst/>
+          </a:prstGeom>
+          <a:solidFill>
+            <a:srgbClr val="1C1216"/>
+          </a:solidFill>
+          <a:ln w="12700">
+            <a:solidFill>
+              <a:srgbClr val="501923"/>
+            </a:solidFill>
+          </a:ln>
+        </p:spPr>
+        <p:style>
+          <a:lnRef idx="1">
+            <a:schemeClr val="accent1"/>
+          </a:lnRef>
+          <a:fillRef idx="3">
+            <a:schemeClr val="accent1"/>
+          </a:fillRef>
+          <a:effectRef idx="2">
+            <a:schemeClr val="accent1"/>
+          </a:effectRef>
+          <a:fontRef idx="minor">
+            <a:schemeClr val="lt1"/>
+          </a:fontRef>
+        </p:style>
+        <p:txBody>
+          <a:bodyPr rtlCol="0" anchor="ctr"/>
+          <a:lstStyle/>
+          <a:p>
+            <a:pPr algn="ctr"/>
+          </a:p>
+        </p:txBody>
+      </p:sp>
+      <p:sp>
+        <p:nvSpPr>
+          <p:cNvPr id="20" name="TextBox 19"/>
+          <p:cNvSpPr txBox="1"/>
+          <p:nvPr/>
+        </p:nvSpPr>
+        <p:spPr>
+          <a:xfrm>
+            <a:off x="868680" y="5175504"/>
+            <a:ext cx="4956048" cy="1152144"/>
+          </a:xfrm>
+          <a:prstGeom prst="rect">
+            <a:avLst/>
+          </a:prstGeom>
+          <a:noFill/>
+        </p:spPr>
+        <p:txBody>
+          <a:bodyPr wrap="square" lIns="0" rIns="0" tIns="0" bIns="0">
+            <a:spAutoFit/>
+          </a:bodyPr>
+          <a:lstStyle/>
+          <a:p>
+            <a:pPr>
+              <a:defRPr sz="1000">
+                <a:solidFill>
+                  <a:srgbClr val="F1F5F9"/>
+                </a:solidFill>
+              </a:defRPr>
+            </a:pPr>
+            <a:r>
+              <a:t>Manual visual inspections requiring staff to climb tall boilers, flare stacks, or live switchyards.</a:t>
+            </a:r>
+          </a:p>
+        </p:txBody>
+      </p:sp>
+      <p:sp>
+        <p:nvSpPr>
+          <p:cNvPr id="21" name="Rounded Rectangle 20"/>
+          <p:cNvSpPr/>
+          <p:nvPr/>
+        </p:nvSpPr>
+        <p:spPr>
+          <a:xfrm>
+            <a:off x="6227064" y="5102352"/>
+            <a:ext cx="5230368" cy="1298448"/>
+          </a:xfrm>
+          <a:prstGeom prst="roundRect">
+            <a:avLst/>
+          </a:prstGeom>
+          <a:solidFill>
+            <a:srgbClr val="0F1C26"/>
+          </a:solidFill>
+          <a:ln w="12700">
+            <a:solidFill>
+              <a:srgbClr val="194B5F"/>
+            </a:solidFill>
+          </a:ln>
+        </p:spPr>
+        <p:style>
+          <a:lnRef idx="1">
+            <a:schemeClr val="accent1"/>
+          </a:lnRef>
+          <a:fillRef idx="3">
+            <a:schemeClr val="accent1"/>
+          </a:fillRef>
+          <a:effectRef idx="2">
+            <a:schemeClr val="accent1"/>
+          </a:effectRef>
+          <a:fontRef idx="minor">
+            <a:schemeClr val="lt1"/>
+          </a:fontRef>
+        </p:style>
+        <p:txBody>
+          <a:bodyPr rtlCol="0" anchor="ctr"/>
+          <a:lstStyle/>
+          <a:p>
+            <a:pPr algn="ctr"/>
+          </a:p>
+        </p:txBody>
+      </p:sp>
+      <p:sp>
+        <p:nvSpPr>
+          <p:cNvPr id="22" name="TextBox 21"/>
+          <p:cNvSpPr txBox="1"/>
+          <p:nvPr/>
+        </p:nvSpPr>
+        <p:spPr>
+          <a:xfrm>
+            <a:off x="6364224" y="5175504"/>
+            <a:ext cx="4956048" cy="1152144"/>
+          </a:xfrm>
+          <a:prstGeom prst="rect">
+            <a:avLst/>
+          </a:prstGeom>
+          <a:noFill/>
+        </p:spPr>
+        <p:txBody>
+          <a:bodyPr wrap="square" lIns="0" rIns="0" tIns="0" bIns="0">
+            <a:spAutoFit/>
+          </a:bodyPr>
+          <a:lstStyle/>
+          <a:p>
+            <a:pPr>
+              <a:defRPr sz="1000" b="1">
+                <a:solidFill>
+                  <a:srgbClr val="34D399"/>
+                </a:solidFill>
+              </a:defRPr>
+            </a:pPr>
+            <a:r>
+              <a:t>Automated dispatch of autonomous UAVs and tracked robots with real-time waypoint guidance.</a:t>
             </a:r>
           </a:p>
         </p:txBody>
@@ -5838,7 +7559,7 @@
             <a:avLst/>
           </a:prstGeom>
           <a:solidFill>
-            <a:srgbClr val="0A0E1A"/>
+            <a:srgbClr val="0B0F17"/>
           </a:solidFill>
           <a:ln>
             <a:noFill/>
@@ -5874,17 +7595,19 @@
         </p:nvSpPr>
         <p:spPr>
           <a:xfrm>
-            <a:off x="0" y="0"/>
-            <a:ext cx="12191695" cy="54864"/>
+            <a:off x="731520" y="365760"/>
+            <a:ext cx="10728655" cy="18288"/>
           </a:xfrm>
           <a:prstGeom prst="rect">
             <a:avLst/>
           </a:prstGeom>
           <a:solidFill>
-            <a:srgbClr val="00D4FF"/>
+            <a:srgbClr val="38BDF8"/>
           </a:solidFill>
           <a:ln>
-            <a:noFill/>
+            <a:solidFill>
+              <a:srgbClr val="38BDF8"/>
+            </a:solidFill>
           </a:ln>
         </p:spPr>
         <p:style>
@@ -5917,8 +7640,8 @@
         </p:nvSpPr>
         <p:spPr>
           <a:xfrm>
-            <a:off x="731520" y="365760"/>
-            <a:ext cx="10698480" cy="1005840"/>
+            <a:off x="731520" y="438912"/>
+            <a:ext cx="8229600" cy="274320"/>
           </a:xfrm>
           <a:prstGeom prst="rect">
             <a:avLst/>
@@ -5926,35 +7649,20 @@
           <a:noFill/>
         </p:spPr>
         <p:txBody>
-          <a:bodyPr wrap="square">
+          <a:bodyPr wrap="square" lIns="0" rIns="0" tIns="0" bIns="0">
             <a:spAutoFit/>
           </a:bodyPr>
           <a:lstStyle/>
           <a:p>
             <a:pPr>
-              <a:spcAft>
-                <a:spcPts val="400"/>
-              </a:spcAft>
-              <a:defRPr sz="1150" b="1">
-                <a:solidFill>
-                  <a:srgbClr val="00D4FF"/>
-                </a:solidFill>
-              </a:defRPr>
-            </a:pPr>
-            <a:r>
-              <a:t>TERRAEMBODIMENT  |  TERRESTRIAL PLATFORM</a:t>
-            </a:r>
-          </a:p>
-          <a:p>
-            <a:pPr>
-              <a:defRPr sz="2500" b="1">
-                <a:solidFill>
-                  <a:srgbClr val="FFFFFF"/>
-                </a:solidFill>
-              </a:defRPr>
-            </a:pPr>
-            <a:r>
-              <a:t>System Integrator Deployment Playbook &amp; Commercial Enablement</a:t>
+              <a:defRPr sz="950" b="1">
+                <a:solidFill>
+                  <a:srgbClr val="38BDF8"/>
+                </a:solidFill>
+              </a:defRPr>
+            </a:pPr>
+            <a:r>
+              <a:t>TERRESTRIAL PLATFORM  |  TERRAEMBODIMENT  |  SYSTEM ARCHITECTURE</a:t>
             </a:r>
           </a:p>
         </p:txBody>
@@ -5967,8 +7675,8 @@
         </p:nvSpPr>
         <p:spPr>
           <a:xfrm>
-            <a:off x="731520" y="6446520"/>
-            <a:ext cx="10698480" cy="320040"/>
+            <a:off x="731520" y="731520"/>
+            <a:ext cx="9601200" cy="777240"/>
           </a:xfrm>
           <a:prstGeom prst="rect">
             <a:avLst/>
@@ -5976,44 +7684,83 @@
           <a:noFill/>
         </p:spPr>
         <p:txBody>
-          <a:bodyPr wrap="none">
+          <a:bodyPr wrap="square" lIns="0" rIns="0" tIns="0" bIns="0">
             <a:spAutoFit/>
           </a:bodyPr>
           <a:lstStyle/>
           <a:p>
             <a:pPr>
-              <a:defRPr sz="1000">
+              <a:defRPr sz="1900" b="1">
+                <a:solidFill>
+                  <a:srgbClr val="FFFFFF"/>
+                </a:solidFill>
+              </a:defRPr>
+            </a:pPr>
+            <a:r>
+              <a:t>End-to-End System Diagram &amp; Data Pipeline</a:t>
+            </a:r>
+          </a:p>
+          <a:p>
+            <a:pPr>
+              <a:spcBef>
+                <a:spcPts val="300"/>
+              </a:spcBef>
+              <a:defRPr sz="1050">
                 <a:solidFill>
                   <a:srgbClr val="94A3B8"/>
                 </a:solidFill>
               </a:defRPr>
             </a:pPr>
             <a:r>
-              <a:t>TERRESTRIAL PLATFORM  |  TERRAEMBODIMENT CATALOGUE  |  CONFIDENTIAL - AUTHORISED SYSTEM INTEGRATORS ONLY</a:t>
-            </a:r>
-          </a:p>
-        </p:txBody>
-      </p:sp>
-      <p:sp>
-        <p:nvSpPr>
-          <p:cNvPr id="6" name="Rounded Rectangle 5"/>
+              <a:t>Visual architecture diagram representing field telemetry ingestion, deterministic edge fabric, AI reasoning, and closed-loop actuation.</a:t>
+            </a:r>
+          </a:p>
+        </p:txBody>
+      </p:sp>
+      <p:pic>
+        <p:nvPicPr>
+          <p:cNvPr id="6" name="Picture 5" descr="tp_logo_white.png"/>
+          <p:cNvPicPr>
+            <a:picLocks noChangeAspect="1"/>
+          </p:cNvPicPr>
+          <p:nvPr/>
+        </p:nvPicPr>
+        <p:blipFill>
+          <a:blip r:embed="rId2"/>
+          <a:stretch>
+            <a:fillRect/>
+          </a:stretch>
+        </p:blipFill>
+        <p:spPr>
+          <a:xfrm>
+            <a:off x="10469880" y="411480"/>
+            <a:ext cx="987552" cy="384048"/>
+          </a:xfrm>
+          <a:prstGeom prst="rect">
+            <a:avLst/>
+          </a:prstGeom>
+        </p:spPr>
+      </p:pic>
+      <p:sp>
+        <p:nvSpPr>
+          <p:cNvPr id="7" name="Rounded Rectangle 6"/>
           <p:cNvSpPr/>
           <p:nvPr/>
         </p:nvSpPr>
         <p:spPr>
           <a:xfrm>
-            <a:off x="731520" y="1645920"/>
-            <a:ext cx="3401568" cy="3200400"/>
+            <a:off x="731520" y="1691640"/>
+            <a:ext cx="2514600" cy="3611880"/>
           </a:xfrm>
           <a:prstGeom prst="roundRect">
             <a:avLst/>
           </a:prstGeom>
           <a:solidFill>
-            <a:srgbClr val="0F172A"/>
+            <a:srgbClr val="131926"/>
           </a:solidFill>
-          <a:ln>
+          <a:ln w="12700">
             <a:solidFill>
-              <a:srgbClr val="1E293B"/>
+              <a:srgbClr val="38BDF8"/>
             </a:solidFill>
           </a:ln>
         </p:spPr>
@@ -6032,72 +7779,139 @@
           </a:fontRef>
         </p:style>
         <p:txBody>
-          <a:bodyPr rtlCol="0" anchor="ctr" wrap="square"/>
-          <a:lstStyle/>
-          <a:p>
-            <a:pPr algn="ctr">
+          <a:bodyPr rtlCol="0" anchor="ctr"/>
+          <a:lstStyle/>
+          <a:p>
+            <a:pPr algn="ctr"/>
+          </a:p>
+        </p:txBody>
+      </p:sp>
+      <p:sp>
+        <p:nvSpPr>
+          <p:cNvPr id="8" name="TextBox 7"/>
+          <p:cNvSpPr txBox="1"/>
+          <p:nvPr/>
+        </p:nvSpPr>
+        <p:spPr>
+          <a:xfrm>
+            <a:off x="896112" y="1856232"/>
+            <a:ext cx="2185416" cy="3282696"/>
+          </a:xfrm>
+          <a:prstGeom prst="rect">
+            <a:avLst/>
+          </a:prstGeom>
+          <a:noFill/>
+        </p:spPr>
+        <p:txBody>
+          <a:bodyPr wrap="square" lIns="0" rIns="0" tIns="0" bIns="0">
+            <a:spAutoFit/>
+          </a:bodyPr>
+          <a:lstStyle/>
+          <a:p>
+            <a:pPr>
+              <a:defRPr sz="850" b="1">
+                <a:solidFill>
+                  <a:srgbClr val="38BDF8"/>
+                </a:solidFill>
+              </a:defRPr>
+            </a:pPr>
+            <a:r>
+              <a:t>LAYER 01</a:t>
+            </a:r>
+          </a:p>
+          <a:p>
+            <a:pPr>
+              <a:spcBef>
+                <a:spcPts val="300"/>
+              </a:spcBef>
+              <a:spcAft>
+                <a:spcPts val="600"/>
+              </a:spcAft>
+              <a:defRPr sz="1200" b="1">
+                <a:solidFill>
+                  <a:srgbClr val="FFFFFF"/>
+                </a:solidFill>
+              </a:defRPr>
+            </a:pPr>
+            <a:r>
+              <a:t>Spatial LiDAR &amp; Robot Ingestion</a:t>
+            </a:r>
+          </a:p>
+          <a:p>
+            <a:pPr>
               <a:spcAft>
                 <a:spcPts val="800"/>
               </a:spcAft>
-              <a:defRPr sz="1100" b="1">
-                <a:solidFill>
-                  <a:srgbClr val="F5C842"/>
-                </a:solidFill>
-              </a:defRPr>
-            </a:pPr>
-            <a:r>
-              <a:t>PHASE 01 | CONNECTIVITY &amp; AUDIT</a:t>
-            </a:r>
-          </a:p>
-          <a:p>
-            <a:pPr>
-              <a:spcAft>
-                <a:spcPts val="1000"/>
-              </a:spcAft>
-              <a:defRPr sz="1600" b="1">
-                <a:solidFill>
-                  <a:srgbClr val="FFFFFF"/>
-                </a:solidFill>
-              </a:defRPr>
-            </a:pPr>
-            <a:r>
-              <a:t>Zero Rip-and-Replace Onboarding</a:t>
-            </a:r>
-          </a:p>
-          <a:p>
-            <a:pPr>
-              <a:defRPr sz="1250">
-                <a:solidFill>
-                  <a:srgbClr val="C8D8F0"/>
-                </a:solidFill>
-              </a:defRPr>
-            </a:pPr>
-            <a:r>
-              <a:t>Deploy edge container onto existing industrial PC or VM. Connect to plant DCS/PLCs via IEC 61850 GOOSE. Ingest and normalize all telemetry in under 48 hours without halting production.</a:t>
-            </a:r>
-          </a:p>
-        </p:txBody>
-      </p:sp>
-      <p:sp>
-        <p:nvSpPr>
-          <p:cNvPr id="7" name="Rounded Rectangle 6"/>
+              <a:defRPr sz="900">
+                <a:solidFill>
+                  <a:srgbClr val="F1F5F9"/>
+                </a:solidFill>
+              </a:defRPr>
+            </a:pPr>
+            <a:r>
+              <a:t>High-bandwidth sensory acquisition aggregating 2D/3D LiDAR point clouds, depth cameras, joint servo encoders, and IMU inertial sensors.</a:t>
+            </a:r>
+          </a:p>
+          <a:p>
+            <a:pPr>
+              <a:spcBef>
+                <a:spcPts val="400"/>
+              </a:spcBef>
+              <a:defRPr sz="800" b="1">
+                <a:solidFill>
+                  <a:srgbClr val="94A3B8"/>
+                </a:solidFill>
+              </a:defRPr>
+            </a:pPr>
+            <a:r>
+              <a:t>PROTOCOLS &amp; STANDARDS:</a:t>
+            </a:r>
+          </a:p>
+          <a:p>
+            <a:pPr>
+              <a:spcBef>
+                <a:spcPts val="200"/>
+              </a:spcBef>
+              <a:defRPr sz="850">
+                <a:solidFill>
+                  <a:srgbClr val="34D399"/>
+                </a:solidFill>
+              </a:defRPr>
+            </a:pPr>
+            <a:r>
+              <a:t> • ROS2 / DDS Protocol</a:t>
+            </a:r>
+            <a:br/>
+            <a:r>
+              <a:t> • CANopen / EtherCAT</a:t>
+            </a:r>
+            <a:br/>
+            <a:r>
+              <a:t> • Safety LiDAR Bus</a:t>
+            </a:r>
+          </a:p>
+        </p:txBody>
+      </p:sp>
+      <p:sp>
+        <p:nvSpPr>
+          <p:cNvPr id="9" name="Rounded Rectangle 8"/>
           <p:cNvSpPr/>
           <p:nvPr/>
         </p:nvSpPr>
         <p:spPr>
           <a:xfrm>
-            <a:off x="4379976" y="1645920"/>
-            <a:ext cx="3401568" cy="3200400"/>
+            <a:off x="3465576" y="1691640"/>
+            <a:ext cx="2514600" cy="3611880"/>
           </a:xfrm>
           <a:prstGeom prst="roundRect">
             <a:avLst/>
           </a:prstGeom>
           <a:solidFill>
-            <a:srgbClr val="0F172A"/>
+            <a:srgbClr val="131926"/>
           </a:solidFill>
-          <a:ln>
+          <a:ln w="12700">
             <a:solidFill>
-              <a:srgbClr val="1E293B"/>
+              <a:srgbClr val="38BDF8"/>
             </a:solidFill>
           </a:ln>
         </p:spPr>
@@ -6116,72 +7930,139 @@
           </a:fontRef>
         </p:style>
         <p:txBody>
-          <a:bodyPr rtlCol="0" anchor="ctr" wrap="square"/>
-          <a:lstStyle/>
-          <a:p>
-            <a:pPr algn="ctr">
+          <a:bodyPr rtlCol="0" anchor="ctr"/>
+          <a:lstStyle/>
+          <a:p>
+            <a:pPr algn="ctr"/>
+          </a:p>
+        </p:txBody>
+      </p:sp>
+      <p:sp>
+        <p:nvSpPr>
+          <p:cNvPr id="10" name="TextBox 9"/>
+          <p:cNvSpPr txBox="1"/>
+          <p:nvPr/>
+        </p:nvSpPr>
+        <p:spPr>
+          <a:xfrm>
+            <a:off x="3630168" y="1856232"/>
+            <a:ext cx="2185416" cy="3282696"/>
+          </a:xfrm>
+          <a:prstGeom prst="rect">
+            <a:avLst/>
+          </a:prstGeom>
+          <a:noFill/>
+        </p:spPr>
+        <p:txBody>
+          <a:bodyPr wrap="square" lIns="0" rIns="0" tIns="0" bIns="0">
+            <a:spAutoFit/>
+          </a:bodyPr>
+          <a:lstStyle/>
+          <a:p>
+            <a:pPr>
+              <a:defRPr sz="850" b="1">
+                <a:solidFill>
+                  <a:srgbClr val="38BDF8"/>
+                </a:solidFill>
+              </a:defRPr>
+            </a:pPr>
+            <a:r>
+              <a:t>LAYER 02</a:t>
+            </a:r>
+          </a:p>
+          <a:p>
+            <a:pPr>
+              <a:spcBef>
+                <a:spcPts val="300"/>
+              </a:spcBef>
+              <a:spcAft>
+                <a:spcPts val="600"/>
+              </a:spcAft>
+              <a:defRPr sz="1200" b="1">
+                <a:solidFill>
+                  <a:srgbClr val="FFFFFF"/>
+                </a:solidFill>
+              </a:defRPr>
+            </a:pPr>
+            <a:r>
+              <a:t>Deterministic Robotic Fabric</a:t>
+            </a:r>
+          </a:p>
+          <a:p>
+            <a:pPr>
               <a:spcAft>
                 <a:spcPts val="800"/>
               </a:spcAft>
-              <a:defRPr sz="1100" b="1">
-                <a:solidFill>
-                  <a:srgbClr val="F5C842"/>
-                </a:solidFill>
-              </a:defRPr>
-            </a:pPr>
-            <a:r>
-              <a:t>PHASE 02 | TWIN CALIBRATION</a:t>
-            </a:r>
-          </a:p>
-          <a:p>
-            <a:pPr>
-              <a:spcAft>
-                <a:spcPts val="1000"/>
-              </a:spcAft>
-              <a:defRPr sz="1600" b="1">
-                <a:solidFill>
-                  <a:srgbClr val="FFFFFF"/>
-                </a:solidFill>
-              </a:defRPr>
-            </a:pPr>
-            <a:r>
-              <a:t>Physics-Model Synchronization</a:t>
-            </a:r>
-          </a:p>
-          <a:p>
-            <a:pPr>
-              <a:defRPr sz="1250">
-                <a:solidFill>
-                  <a:srgbClr val="C8D8F0"/>
-                </a:solidFill>
-              </a:defRPr>
-            </a:pPr>
-            <a:r>
-              <a:t>Feed historical historian data into TerraEmbodiment models. Automatically build directed causal relationship graphs, calibrate thermodynamics/kinematics, and train edge neural operators.</a:t>
-            </a:r>
-          </a:p>
-        </p:txBody>
-      </p:sp>
-      <p:sp>
-        <p:nvSpPr>
-          <p:cNvPr id="8" name="Rounded Rectangle 7"/>
+              <a:defRPr sz="900">
+                <a:solidFill>
+                  <a:srgbClr val="F1F5F9"/>
+                </a:solidFill>
+              </a:defRPr>
+            </a:pPr>
+            <a:r>
+              <a:t>Sub-5ms spatial point cloud filtering, real-time wheel odometry synchronization, and collision exclusion zone monitoring.</a:t>
+            </a:r>
+          </a:p>
+          <a:p>
+            <a:pPr>
+              <a:spcBef>
+                <a:spcPts val="400"/>
+              </a:spcBef>
+              <a:defRPr sz="800" b="1">
+                <a:solidFill>
+                  <a:srgbClr val="94A3B8"/>
+                </a:solidFill>
+              </a:defRPr>
+            </a:pPr>
+            <a:r>
+              <a:t>PROTOCOLS &amp; STANDARDS:</a:t>
+            </a:r>
+          </a:p>
+          <a:p>
+            <a:pPr>
+              <a:spcBef>
+                <a:spcPts val="200"/>
+              </a:spcBef>
+              <a:defRPr sz="850">
+                <a:solidFill>
+                  <a:srgbClr val="34D399"/>
+                </a:solidFill>
+              </a:defRPr>
+            </a:pPr>
+            <a:r>
+              <a:t> • Deterministic DDS Bus</a:t>
+            </a:r>
+            <a:br/>
+            <a:r>
+              <a:t> • LiDAR Point-Cloud Stream</a:t>
+            </a:r>
+            <a:br/>
+            <a:r>
+              <a:t> • Sub-5ms Edge Fabric</a:t>
+            </a:r>
+          </a:p>
+        </p:txBody>
+      </p:sp>
+      <p:sp>
+        <p:nvSpPr>
+          <p:cNvPr id="11" name="Rounded Rectangle 10"/>
           <p:cNvSpPr/>
           <p:nvPr/>
         </p:nvSpPr>
         <p:spPr>
           <a:xfrm>
-            <a:off x="8028432" y="1645920"/>
-            <a:ext cx="3401568" cy="3200400"/>
+            <a:off x="6199632" y="1691640"/>
+            <a:ext cx="2514600" cy="3611880"/>
           </a:xfrm>
           <a:prstGeom prst="roundRect">
             <a:avLst/>
           </a:prstGeom>
           <a:solidFill>
-            <a:srgbClr val="0F172A"/>
+            <a:srgbClr val="131926"/>
           </a:solidFill>
-          <a:ln>
+          <a:ln w="12700">
             <a:solidFill>
-              <a:srgbClr val="1E293B"/>
+              <a:srgbClr val="38BDF8"/>
             </a:solidFill>
           </a:ln>
         </p:spPr>
@@ -6200,72 +8081,139 @@
           </a:fontRef>
         </p:style>
         <p:txBody>
-          <a:bodyPr rtlCol="0" anchor="ctr" wrap="square"/>
-          <a:lstStyle/>
-          <a:p>
-            <a:pPr algn="ctr">
+          <a:bodyPr rtlCol="0" anchor="ctr"/>
+          <a:lstStyle/>
+          <a:p>
+            <a:pPr algn="ctr"/>
+          </a:p>
+        </p:txBody>
+      </p:sp>
+      <p:sp>
+        <p:nvSpPr>
+          <p:cNvPr id="12" name="TextBox 11"/>
+          <p:cNvSpPr txBox="1"/>
+          <p:nvPr/>
+        </p:nvSpPr>
+        <p:spPr>
+          <a:xfrm>
+            <a:off x="6364224" y="1856232"/>
+            <a:ext cx="2185416" cy="3282696"/>
+          </a:xfrm>
+          <a:prstGeom prst="rect">
+            <a:avLst/>
+          </a:prstGeom>
+          <a:noFill/>
+        </p:spPr>
+        <p:txBody>
+          <a:bodyPr wrap="square" lIns="0" rIns="0" tIns="0" bIns="0">
+            <a:spAutoFit/>
+          </a:bodyPr>
+          <a:lstStyle/>
+          <a:p>
+            <a:pPr>
+              <a:defRPr sz="850" b="1">
+                <a:solidFill>
+                  <a:srgbClr val="38BDF8"/>
+                </a:solidFill>
+              </a:defRPr>
+            </a:pPr>
+            <a:r>
+              <a:t>LAYER 03</a:t>
+            </a:r>
+          </a:p>
+          <a:p>
+            <a:pPr>
+              <a:spcBef>
+                <a:spcPts val="300"/>
+              </a:spcBef>
+              <a:spcAft>
+                <a:spcPts val="600"/>
+              </a:spcAft>
+              <a:defRPr sz="1200" b="1">
+                <a:solidFill>
+                  <a:srgbClr val="FFFFFF"/>
+                </a:solidFill>
+              </a:defRPr>
+            </a:pPr>
+            <a:r>
+              <a:t>Spatial SLAM &amp; Fleet Planner</a:t>
+            </a:r>
+          </a:p>
+          <a:p>
+            <a:pPr>
               <a:spcAft>
                 <a:spcPts val="800"/>
               </a:spcAft>
-              <a:defRPr sz="1100" b="1">
-                <a:solidFill>
-                  <a:srgbClr val="F5C842"/>
-                </a:solidFill>
-              </a:defRPr>
-            </a:pPr>
-            <a:r>
-              <a:t>PHASE 03 | AUTONOMOUS GO-LIVE</a:t>
-            </a:r>
-          </a:p>
-          <a:p>
-            <a:pPr>
-              <a:spcAft>
-                <a:spcPts val="1000"/>
-              </a:spcAft>
-              <a:defRPr sz="1600" b="1">
-                <a:solidFill>
-                  <a:srgbClr val="FFFFFF"/>
-                </a:solidFill>
-              </a:defRPr>
-            </a:pPr>
-            <a:r>
-              <a:t>Closed-Loop Setpoint Actuation</a:t>
-            </a:r>
-          </a:p>
-          <a:p>
-            <a:pPr>
-              <a:defRPr sz="1250">
-                <a:solidFill>
-                  <a:srgbClr val="C8D8F0"/>
-                </a:solidFill>
-              </a:defRPr>
-            </a:pPr>
-            <a:r>
-              <a:t>Transition from advisory warnings to sub-25ms supervisory actuation. Sync alarm suppressions with plant operators and link work orders into SAP/ERP for verifiable recurring ROI.</a:t>
-            </a:r>
-          </a:p>
-        </p:txBody>
-      </p:sp>
-      <p:sp>
-        <p:nvSpPr>
-          <p:cNvPr id="9" name="Rounded Rectangle 8"/>
+              <a:defRPr sz="900">
+                <a:solidFill>
+                  <a:srgbClr val="F1F5F9"/>
+                </a:solidFill>
+              </a:defRPr>
+            </a:pPr>
+            <a:r>
+              <a:t>Multi-agent cooperative SLAM, dynamic obstacle avoidance, warehouse traffic deadlock resolution, and robotic 6-axis inverse kinematics.</a:t>
+            </a:r>
+          </a:p>
+          <a:p>
+            <a:pPr>
+              <a:spcBef>
+                <a:spcPts val="400"/>
+              </a:spcBef>
+              <a:defRPr sz="800" b="1">
+                <a:solidFill>
+                  <a:srgbClr val="94A3B8"/>
+                </a:solidFill>
+              </a:defRPr>
+            </a:pPr>
+            <a:r>
+              <a:t>PROTOCOLS &amp; STANDARDS:</a:t>
+            </a:r>
+          </a:p>
+          <a:p>
+            <a:pPr>
+              <a:spcBef>
+                <a:spcPts val="200"/>
+              </a:spcBef>
+              <a:defRPr sz="850">
+                <a:solidFill>
+                  <a:srgbClr val="34D399"/>
+                </a:solidFill>
+              </a:defRPr>
+            </a:pPr>
+            <a:r>
+              <a:t> • Dynamic SLAM AI</a:t>
+            </a:r>
+            <a:br/>
+            <a:r>
+              <a:t> • Fleet Path Planner</a:t>
+            </a:r>
+            <a:br/>
+            <a:r>
+              <a:t> • Inverse Kinematics</a:t>
+            </a:r>
+          </a:p>
+        </p:txBody>
+      </p:sp>
+      <p:sp>
+        <p:nvSpPr>
+          <p:cNvPr id="13" name="Rounded Rectangle 12"/>
           <p:cNvSpPr/>
           <p:nvPr/>
         </p:nvSpPr>
         <p:spPr>
           <a:xfrm>
-            <a:off x="731520" y="5029200"/>
-            <a:ext cx="10698480" cy="1188720"/>
+            <a:off x="8933688" y="1691640"/>
+            <a:ext cx="2514600" cy="3611880"/>
           </a:xfrm>
           <a:prstGeom prst="roundRect">
             <a:avLst/>
           </a:prstGeom>
           <a:solidFill>
-            <a:srgbClr val="0C1C34"/>
+            <a:srgbClr val="131926"/>
           </a:solidFill>
-          <a:ln>
+          <a:ln w="12700">
             <a:solidFill>
-              <a:srgbClr val="00D4FF"/>
+              <a:srgbClr val="38BDF8"/>
             </a:solidFill>
           </a:ln>
         </p:spPr>
@@ -6284,16 +8232,830 @@
           </a:fontRef>
         </p:style>
         <p:txBody>
-          <a:bodyPr rtlCol="0" anchor="ctr" wrap="square"/>
-          <a:lstStyle/>
-          <a:p>
-            <a:pPr algn="ctr">
+          <a:bodyPr rtlCol="0" anchor="ctr"/>
+          <a:lstStyle/>
+          <a:p>
+            <a:pPr algn="ctr"/>
+          </a:p>
+        </p:txBody>
+      </p:sp>
+      <p:sp>
+        <p:nvSpPr>
+          <p:cNvPr id="14" name="TextBox 13"/>
+          <p:cNvSpPr txBox="1"/>
+          <p:nvPr/>
+        </p:nvSpPr>
+        <p:spPr>
+          <a:xfrm>
+            <a:off x="9098280" y="1856232"/>
+            <a:ext cx="2185416" cy="3282696"/>
+          </a:xfrm>
+          <a:prstGeom prst="rect">
+            <a:avLst/>
+          </a:prstGeom>
+          <a:noFill/>
+        </p:spPr>
+        <p:txBody>
+          <a:bodyPr wrap="square" lIns="0" rIns="0" tIns="0" bIns="0">
+            <a:spAutoFit/>
+          </a:bodyPr>
+          <a:lstStyle/>
+          <a:p>
+            <a:pPr>
+              <a:defRPr sz="850" b="1">
+                <a:solidFill>
+                  <a:srgbClr val="38BDF8"/>
+                </a:solidFill>
+              </a:defRPr>
+            </a:pPr>
+            <a:r>
+              <a:t>LAYER 04</a:t>
+            </a:r>
+          </a:p>
+          <a:p>
+            <a:pPr>
+              <a:spcBef>
+                <a:spcPts val="300"/>
+              </a:spcBef>
               <a:spcAft>
+                <a:spcPts val="600"/>
+              </a:spcAft>
+              <a:defRPr sz="1200" b="1">
+                <a:solidFill>
+                  <a:srgbClr val="FFFFFF"/>
+                </a:solidFill>
+              </a:defRPr>
+            </a:pPr>
+            <a:r>
+              <a:t>Fleet Teleoperation Cockpit</a:t>
+            </a:r>
+          </a:p>
+          <a:p>
+            <a:pPr>
+              <a:spcAft>
+                <a:spcPts val="800"/>
+              </a:spcAft>
+              <a:defRPr sz="900">
+                <a:solidFill>
+                  <a:srgbClr val="F1F5F9"/>
+                </a:solidFill>
+              </a:defRPr>
+            </a:pPr>
+            <a:r>
+              <a:t>Closed-loop AMR velocity drive execution, 6-axis joint torque commands, automatic dock opportunity charging, and ANSI/ISA-101 fleet consoles.</a:t>
+            </a:r>
+          </a:p>
+          <a:p>
+            <a:pPr>
+              <a:spcBef>
                 <a:spcPts val="400"/>
+              </a:spcBef>
+              <a:defRPr sz="800" b="1">
+                <a:solidFill>
+                  <a:srgbClr val="94A3B8"/>
+                </a:solidFill>
+              </a:defRPr>
+            </a:pPr>
+            <a:r>
+              <a:t>PROTOCOLS &amp; STANDARDS:</a:t>
+            </a:r>
+          </a:p>
+          <a:p>
+            <a:pPr>
+              <a:spcBef>
+                <a:spcPts val="200"/>
+              </a:spcBef>
+              <a:defRPr sz="850">
+                <a:solidFill>
+                  <a:srgbClr val="34D399"/>
+                </a:solidFill>
+              </a:defRPr>
+            </a:pPr>
+            <a:r>
+              <a:t> • Drive Velocity Dispatch</a:t>
+            </a:r>
+            <a:br/>
+            <a:r>
+              <a:t> • Servo Torque Control</a:t>
+            </a:r>
+            <a:br/>
+            <a:r>
+              <a:t> • ISA-101 Robot Cockpit</a:t>
+            </a:r>
+          </a:p>
+        </p:txBody>
+      </p:sp>
+      <p:sp>
+        <p:nvSpPr>
+          <p:cNvPr id="15" name="Rounded Rectangle 14"/>
+          <p:cNvSpPr/>
+          <p:nvPr/>
+        </p:nvSpPr>
+        <p:spPr>
+          <a:xfrm>
+            <a:off x="731520" y="5486400"/>
+            <a:ext cx="10728655" cy="868680"/>
+          </a:xfrm>
+          <a:prstGeom prst="roundRect">
+            <a:avLst/>
+          </a:prstGeom>
+          <a:solidFill>
+            <a:srgbClr val="131926"/>
+          </a:solidFill>
+          <a:ln w="12700">
+            <a:solidFill>
+              <a:srgbClr val="38BDF8"/>
+            </a:solidFill>
+          </a:ln>
+        </p:spPr>
+        <p:style>
+          <a:lnRef idx="1">
+            <a:schemeClr val="accent1"/>
+          </a:lnRef>
+          <a:fillRef idx="3">
+            <a:schemeClr val="accent1"/>
+          </a:fillRef>
+          <a:effectRef idx="2">
+            <a:schemeClr val="accent1"/>
+          </a:effectRef>
+          <a:fontRef idx="minor">
+            <a:schemeClr val="lt1"/>
+          </a:fontRef>
+        </p:style>
+        <p:txBody>
+          <a:bodyPr rtlCol="0" anchor="ctr"/>
+          <a:lstStyle/>
+          <a:p>
+            <a:pPr algn="ctr"/>
+          </a:p>
+        </p:txBody>
+      </p:sp>
+      <p:sp>
+        <p:nvSpPr>
+          <p:cNvPr id="16" name="TextBox 15"/>
+          <p:cNvSpPr txBox="1"/>
+          <p:nvPr/>
+        </p:nvSpPr>
+        <p:spPr>
+          <a:xfrm>
+            <a:off x="960120" y="5596128"/>
+            <a:ext cx="10241280" cy="640080"/>
+          </a:xfrm>
+          <a:prstGeom prst="rect">
+            <a:avLst/>
+          </a:prstGeom>
+          <a:noFill/>
+        </p:spPr>
+        <p:txBody>
+          <a:bodyPr wrap="square" lIns="0" rIns="0" tIns="0" bIns="0">
+            <a:spAutoFit/>
+          </a:bodyPr>
+          <a:lstStyle/>
+          <a:p>
+            <a:pPr>
+              <a:defRPr sz="850" b="1">
+                <a:solidFill>
+                  <a:srgbClr val="38BDF8"/>
+                </a:solidFill>
+              </a:defRPr>
+            </a:pPr>
+            <a:r>
+              <a:t>UNIFIED DATA PIPELINE FLOW</a:t>
+            </a:r>
+          </a:p>
+          <a:p>
+            <a:pPr>
+              <a:spcBef>
+                <a:spcPts val="200"/>
+              </a:spcBef>
+              <a:defRPr sz="950" b="1">
+                <a:solidFill>
+                  <a:srgbClr val="FFFFFF"/>
+                </a:solidFill>
+              </a:defRPr>
+            </a:pPr>
+            <a:r>
+              <a:t>LiDAR &amp; Joint Encoder Telemetry ➔ Deterministic ROS2/DDS Fabric ➔ Multi-Agent Spatial SLAM &amp; Path Planning ➔ Closed-Loop Drive &amp; Servo Actuation (&lt; 5ms)</a:t>
+            </a:r>
+          </a:p>
+        </p:txBody>
+      </p:sp>
+    </p:spTree>
+  </p:cSld>
+  <p:clrMapOvr>
+    <a:masterClrMapping/>
+  </p:clrMapOvr>
+</p:sld>
+</file>
+
+<file path=ppt/slides/slide7.xml><?xml version="1.0" encoding="utf-8"?>
+<p:sld xmlns:a="http://schemas.openxmlformats.org/drawingml/2006/main" xmlns:p="http://schemas.openxmlformats.org/presentationml/2006/main" xmlns:r="http://schemas.openxmlformats.org/officeDocument/2006/relationships">
+  <p:cSld>
+    <p:spTree>
+      <p:nvGrpSpPr>
+        <p:cNvPr id="1" name=""/>
+        <p:cNvGrpSpPr/>
+        <p:nvPr/>
+      </p:nvGrpSpPr>
+      <p:grpSpPr/>
+      <p:sp>
+        <p:nvSpPr>
+          <p:cNvPr id="2" name="Rectangle 1"/>
+          <p:cNvSpPr/>
+          <p:nvPr/>
+        </p:nvSpPr>
+        <p:spPr>
+          <a:xfrm>
+            <a:off x="0" y="0"/>
+            <a:ext cx="12191695" cy="6858000"/>
+          </a:xfrm>
+          <a:prstGeom prst="rect">
+            <a:avLst/>
+          </a:prstGeom>
+          <a:solidFill>
+            <a:srgbClr val="0B0F17"/>
+          </a:solidFill>
+          <a:ln>
+            <a:noFill/>
+          </a:ln>
+        </p:spPr>
+        <p:style>
+          <a:lnRef idx="1">
+            <a:schemeClr val="accent1"/>
+          </a:lnRef>
+          <a:fillRef idx="3">
+            <a:schemeClr val="accent1"/>
+          </a:fillRef>
+          <a:effectRef idx="2">
+            <a:schemeClr val="accent1"/>
+          </a:effectRef>
+          <a:fontRef idx="minor">
+            <a:schemeClr val="lt1"/>
+          </a:fontRef>
+        </p:style>
+        <p:txBody>
+          <a:bodyPr rtlCol="0" anchor="ctr"/>
+          <a:lstStyle/>
+          <a:p>
+            <a:pPr algn="ctr"/>
+          </a:p>
+        </p:txBody>
+      </p:sp>
+      <p:sp>
+        <p:nvSpPr>
+          <p:cNvPr id="3" name="Rectangle 2"/>
+          <p:cNvSpPr/>
+          <p:nvPr/>
+        </p:nvSpPr>
+        <p:spPr>
+          <a:xfrm>
+            <a:off x="731520" y="365760"/>
+            <a:ext cx="10728655" cy="18288"/>
+          </a:xfrm>
+          <a:prstGeom prst="rect">
+            <a:avLst/>
+          </a:prstGeom>
+          <a:solidFill>
+            <a:srgbClr val="38BDF8"/>
+          </a:solidFill>
+          <a:ln>
+            <a:solidFill>
+              <a:srgbClr val="38BDF8"/>
+            </a:solidFill>
+          </a:ln>
+        </p:spPr>
+        <p:style>
+          <a:lnRef idx="1">
+            <a:schemeClr val="accent1"/>
+          </a:lnRef>
+          <a:fillRef idx="3">
+            <a:schemeClr val="accent1"/>
+          </a:fillRef>
+          <a:effectRef idx="2">
+            <a:schemeClr val="accent1"/>
+          </a:effectRef>
+          <a:fontRef idx="minor">
+            <a:schemeClr val="lt1"/>
+          </a:fontRef>
+        </p:style>
+        <p:txBody>
+          <a:bodyPr rtlCol="0" anchor="ctr"/>
+          <a:lstStyle/>
+          <a:p>
+            <a:pPr algn="ctr"/>
+          </a:p>
+        </p:txBody>
+      </p:sp>
+      <p:sp>
+        <p:nvSpPr>
+          <p:cNvPr id="4" name="TextBox 3"/>
+          <p:cNvSpPr txBox="1"/>
+          <p:nvPr/>
+        </p:nvSpPr>
+        <p:spPr>
+          <a:xfrm>
+            <a:off x="731520" y="438912"/>
+            <a:ext cx="8229600" cy="274320"/>
+          </a:xfrm>
+          <a:prstGeom prst="rect">
+            <a:avLst/>
+          </a:prstGeom>
+          <a:noFill/>
+        </p:spPr>
+        <p:txBody>
+          <a:bodyPr wrap="square" lIns="0" rIns="0" tIns="0" bIns="0">
+            <a:spAutoFit/>
+          </a:bodyPr>
+          <a:lstStyle/>
+          <a:p>
+            <a:pPr>
+              <a:defRPr sz="950" b="1">
+                <a:solidFill>
+                  <a:srgbClr val="38BDF8"/>
+                </a:solidFill>
+              </a:defRPr>
+            </a:pPr>
+            <a:r>
+              <a:t>TERRESTRIAL PLATFORM  |  TERRAEMBODIMENT  |  DEPLOYMENT &amp; SI VALUE</a:t>
+            </a:r>
+          </a:p>
+        </p:txBody>
+      </p:sp>
+      <p:sp>
+        <p:nvSpPr>
+          <p:cNvPr id="5" name="TextBox 4"/>
+          <p:cNvSpPr txBox="1"/>
+          <p:nvPr/>
+        </p:nvSpPr>
+        <p:spPr>
+          <a:xfrm>
+            <a:off x="731520" y="731520"/>
+            <a:ext cx="9601200" cy="777240"/>
+          </a:xfrm>
+          <a:prstGeom prst="rect">
+            <a:avLst/>
+          </a:prstGeom>
+          <a:noFill/>
+        </p:spPr>
+        <p:txBody>
+          <a:bodyPr wrap="square" lIns="0" rIns="0" tIns="0" bIns="0">
+            <a:spAutoFit/>
+          </a:bodyPr>
+          <a:lstStyle/>
+          <a:p>
+            <a:pPr>
+              <a:defRPr sz="1900" b="1">
+                <a:solidFill>
+                  <a:srgbClr val="FFFFFF"/>
+                </a:solidFill>
+              </a:defRPr>
+            </a:pPr>
+            <a:r>
+              <a:t>System Integrator Deployment Framework &amp; Commercial Model</a:t>
+            </a:r>
+          </a:p>
+          <a:p>
+            <a:pPr>
+              <a:spcBef>
+                <a:spcPts val="300"/>
+              </a:spcBef>
+              <a:defRPr sz="1050">
+                <a:solidFill>
+                  <a:srgbClr val="94A3B8"/>
+                </a:solidFill>
+              </a:defRPr>
+            </a:pPr>
+            <a:r>
+              <a:t>Zero rip-and-replace turnkey onboarding with recurring enterprise margins and co-selling enablement.</a:t>
+            </a:r>
+          </a:p>
+        </p:txBody>
+      </p:sp>
+      <p:pic>
+        <p:nvPicPr>
+          <p:cNvPr id="6" name="Picture 5" descr="tp_logo_white.png"/>
+          <p:cNvPicPr>
+            <a:picLocks noChangeAspect="1"/>
+          </p:cNvPicPr>
+          <p:nvPr/>
+        </p:nvPicPr>
+        <p:blipFill>
+          <a:blip r:embed="rId2"/>
+          <a:stretch>
+            <a:fillRect/>
+          </a:stretch>
+        </p:blipFill>
+        <p:spPr>
+          <a:xfrm>
+            <a:off x="10469880" y="411480"/>
+            <a:ext cx="987552" cy="384048"/>
+          </a:xfrm>
+          <a:prstGeom prst="rect">
+            <a:avLst/>
+          </a:prstGeom>
+        </p:spPr>
+      </p:pic>
+      <p:sp>
+        <p:nvSpPr>
+          <p:cNvPr id="7" name="Rounded Rectangle 6"/>
+          <p:cNvSpPr/>
+          <p:nvPr/>
+        </p:nvSpPr>
+        <p:spPr>
+          <a:xfrm>
+            <a:off x="731520" y="1691640"/>
+            <a:ext cx="3429000" cy="2651760"/>
+          </a:xfrm>
+          <a:prstGeom prst="roundRect">
+            <a:avLst/>
+          </a:prstGeom>
+          <a:solidFill>
+            <a:srgbClr val="131926"/>
+          </a:solidFill>
+          <a:ln w="12700">
+            <a:solidFill>
+              <a:srgbClr val="28344B"/>
+            </a:solidFill>
+          </a:ln>
+        </p:spPr>
+        <p:style>
+          <a:lnRef idx="1">
+            <a:schemeClr val="accent1"/>
+          </a:lnRef>
+          <a:fillRef idx="3">
+            <a:schemeClr val="accent1"/>
+          </a:fillRef>
+          <a:effectRef idx="2">
+            <a:schemeClr val="accent1"/>
+          </a:effectRef>
+          <a:fontRef idx="minor">
+            <a:schemeClr val="lt1"/>
+          </a:fontRef>
+        </p:style>
+        <p:txBody>
+          <a:bodyPr rtlCol="0" anchor="ctr"/>
+          <a:lstStyle/>
+          <a:p>
+            <a:pPr algn="ctr"/>
+          </a:p>
+        </p:txBody>
+      </p:sp>
+      <p:sp>
+        <p:nvSpPr>
+          <p:cNvPr id="8" name="TextBox 7"/>
+          <p:cNvSpPr txBox="1"/>
+          <p:nvPr/>
+        </p:nvSpPr>
+        <p:spPr>
+          <a:xfrm>
+            <a:off x="914400" y="1856232"/>
+            <a:ext cx="3063240" cy="2322576"/>
+          </a:xfrm>
+          <a:prstGeom prst="rect">
+            <a:avLst/>
+          </a:prstGeom>
+          <a:noFill/>
+        </p:spPr>
+        <p:txBody>
+          <a:bodyPr wrap="square" lIns="0" rIns="0" tIns="0" bIns="0">
+            <a:spAutoFit/>
+          </a:bodyPr>
+          <a:lstStyle/>
+          <a:p>
+            <a:pPr>
+              <a:defRPr sz="850" b="1">
+                <a:solidFill>
+                  <a:srgbClr val="38BDF8"/>
+                </a:solidFill>
+              </a:defRPr>
+            </a:pPr>
+            <a:r>
+              <a:t>PHASE 01 | CONNECTIVITY &amp; AUDIT</a:t>
+            </a:r>
+          </a:p>
+          <a:p>
+            <a:pPr>
+              <a:spcBef>
+                <a:spcPts val="300"/>
+              </a:spcBef>
+              <a:spcAft>
+                <a:spcPts val="600"/>
               </a:spcAft>
-              <a:defRPr sz="1150" b="1">
-                <a:solidFill>
-                  <a:srgbClr val="00D4FF"/>
+              <a:defRPr sz="1200" b="1">
+                <a:solidFill>
+                  <a:srgbClr val="FFFFFF"/>
+                </a:solidFill>
+              </a:defRPr>
+            </a:pPr>
+            <a:r>
+              <a:t>Zero Rip-and-Replace Onboarding</a:t>
+            </a:r>
+          </a:p>
+          <a:p>
+            <a:pPr>
+              <a:defRPr sz="950">
+                <a:solidFill>
+                  <a:srgbClr val="F1F5F9"/>
+                </a:solidFill>
+              </a:defRPr>
+            </a:pPr>
+            <a:r>
+              <a:t>Non-intrusive protocol discovery across field PLCs, RTUs, and historians. Plug-and-play mapping of tags into the unified TPIM semantic namespace without stopping ongoing plant production.</a:t>
+            </a:r>
+          </a:p>
+        </p:txBody>
+      </p:sp>
+      <p:sp>
+        <p:nvSpPr>
+          <p:cNvPr id="9" name="Rounded Rectangle 8"/>
+          <p:cNvSpPr/>
+          <p:nvPr/>
+        </p:nvSpPr>
+        <p:spPr>
+          <a:xfrm>
+            <a:off x="4379976" y="1691640"/>
+            <a:ext cx="3429000" cy="2651760"/>
+          </a:xfrm>
+          <a:prstGeom prst="roundRect">
+            <a:avLst/>
+          </a:prstGeom>
+          <a:solidFill>
+            <a:srgbClr val="131926"/>
+          </a:solidFill>
+          <a:ln w="12700">
+            <a:solidFill>
+              <a:srgbClr val="28344B"/>
+            </a:solidFill>
+          </a:ln>
+        </p:spPr>
+        <p:style>
+          <a:lnRef idx="1">
+            <a:schemeClr val="accent1"/>
+          </a:lnRef>
+          <a:fillRef idx="3">
+            <a:schemeClr val="accent1"/>
+          </a:fillRef>
+          <a:effectRef idx="2">
+            <a:schemeClr val="accent1"/>
+          </a:effectRef>
+          <a:fontRef idx="minor">
+            <a:schemeClr val="lt1"/>
+          </a:fontRef>
+        </p:style>
+        <p:txBody>
+          <a:bodyPr rtlCol="0" anchor="ctr"/>
+          <a:lstStyle/>
+          <a:p>
+            <a:pPr algn="ctr"/>
+          </a:p>
+        </p:txBody>
+      </p:sp>
+      <p:sp>
+        <p:nvSpPr>
+          <p:cNvPr id="10" name="TextBox 9"/>
+          <p:cNvSpPr txBox="1"/>
+          <p:nvPr/>
+        </p:nvSpPr>
+        <p:spPr>
+          <a:xfrm>
+            <a:off x="4562856" y="1856232"/>
+            <a:ext cx="3063240" cy="2322576"/>
+          </a:xfrm>
+          <a:prstGeom prst="rect">
+            <a:avLst/>
+          </a:prstGeom>
+          <a:noFill/>
+        </p:spPr>
+        <p:txBody>
+          <a:bodyPr wrap="square" lIns="0" rIns="0" tIns="0" bIns="0">
+            <a:spAutoFit/>
+          </a:bodyPr>
+          <a:lstStyle/>
+          <a:p>
+            <a:pPr>
+              <a:defRPr sz="850" b="1">
+                <a:solidFill>
+                  <a:srgbClr val="38BDF8"/>
+                </a:solidFill>
+              </a:defRPr>
+            </a:pPr>
+            <a:r>
+              <a:t>PHASE 02 | TWIN CALIBRATION</a:t>
+            </a:r>
+          </a:p>
+          <a:p>
+            <a:pPr>
+              <a:spcBef>
+                <a:spcPts val="300"/>
+              </a:spcBef>
+              <a:spcAft>
+                <a:spcPts val="600"/>
+              </a:spcAft>
+              <a:defRPr sz="1200" b="1">
+                <a:solidFill>
+                  <a:srgbClr val="FFFFFF"/>
+                </a:solidFill>
+              </a:defRPr>
+            </a:pPr>
+            <a:r>
+              <a:t>Physics-Model Synchronization</a:t>
+            </a:r>
+          </a:p>
+          <a:p>
+            <a:pPr>
+              <a:defRPr sz="950">
+                <a:solidFill>
+                  <a:srgbClr val="F1F5F9"/>
+                </a:solidFill>
+              </a:defRPr>
+            </a:pPr>
+            <a:r>
+              <a:t>Deploy high-frequency Edge Gateway on premise. Calibrate first-principles thermodynamic and kinematic models against historical telemetry to achieve 99.4%+ deterministic accuracy.</a:t>
+            </a:r>
+          </a:p>
+        </p:txBody>
+      </p:sp>
+      <p:sp>
+        <p:nvSpPr>
+          <p:cNvPr id="11" name="Rounded Rectangle 10"/>
+          <p:cNvSpPr/>
+          <p:nvPr/>
+        </p:nvSpPr>
+        <p:spPr>
+          <a:xfrm>
+            <a:off x="8028432" y="1691640"/>
+            <a:ext cx="3429000" cy="2651760"/>
+          </a:xfrm>
+          <a:prstGeom prst="roundRect">
+            <a:avLst/>
+          </a:prstGeom>
+          <a:solidFill>
+            <a:srgbClr val="131926"/>
+          </a:solidFill>
+          <a:ln w="12700">
+            <a:solidFill>
+              <a:srgbClr val="28344B"/>
+            </a:solidFill>
+          </a:ln>
+        </p:spPr>
+        <p:style>
+          <a:lnRef idx="1">
+            <a:schemeClr val="accent1"/>
+          </a:lnRef>
+          <a:fillRef idx="3">
+            <a:schemeClr val="accent1"/>
+          </a:fillRef>
+          <a:effectRef idx="2">
+            <a:schemeClr val="accent1"/>
+          </a:effectRef>
+          <a:fontRef idx="minor">
+            <a:schemeClr val="lt1"/>
+          </a:fontRef>
+        </p:style>
+        <p:txBody>
+          <a:bodyPr rtlCol="0" anchor="ctr"/>
+          <a:lstStyle/>
+          <a:p>
+            <a:pPr algn="ctr"/>
+          </a:p>
+        </p:txBody>
+      </p:sp>
+      <p:sp>
+        <p:nvSpPr>
+          <p:cNvPr id="12" name="TextBox 11"/>
+          <p:cNvSpPr txBox="1"/>
+          <p:nvPr/>
+        </p:nvSpPr>
+        <p:spPr>
+          <a:xfrm>
+            <a:off x="8211312" y="1856232"/>
+            <a:ext cx="3063240" cy="2322576"/>
+          </a:xfrm>
+          <a:prstGeom prst="rect">
+            <a:avLst/>
+          </a:prstGeom>
+          <a:noFill/>
+        </p:spPr>
+        <p:txBody>
+          <a:bodyPr wrap="square" lIns="0" rIns="0" tIns="0" bIns="0">
+            <a:spAutoFit/>
+          </a:bodyPr>
+          <a:lstStyle/>
+          <a:p>
+            <a:pPr>
+              <a:defRPr sz="850" b="1">
+                <a:solidFill>
+                  <a:srgbClr val="38BDF8"/>
+                </a:solidFill>
+              </a:defRPr>
+            </a:pPr>
+            <a:r>
+              <a:t>PHASE 03 | AUTONOMOUS GO-LIVE</a:t>
+            </a:r>
+          </a:p>
+          <a:p>
+            <a:pPr>
+              <a:spcBef>
+                <a:spcPts val="300"/>
+              </a:spcBef>
+              <a:spcAft>
+                <a:spcPts val="600"/>
+              </a:spcAft>
+              <a:defRPr sz="1200" b="1">
+                <a:solidFill>
+                  <a:srgbClr val="FFFFFF"/>
+                </a:solidFill>
+              </a:defRPr>
+            </a:pPr>
+            <a:r>
+              <a:t>Closed-Loop Setpoint Actuation</a:t>
+            </a:r>
+          </a:p>
+          <a:p>
+            <a:pPr>
+              <a:defRPr sz="950">
+                <a:solidFill>
+                  <a:srgbClr val="F1F5F9"/>
+                </a:solidFill>
+              </a:defRPr>
+            </a:pPr>
+            <a:r>
+              <a:t>Supervisory closed-loop setpoint dispatch with bumpless transfer. Comprehensive ISA-101 verified cockpit handoff with continuous SI recurring monitoring and support tiers.</a:t>
+            </a:r>
+          </a:p>
+        </p:txBody>
+      </p:sp>
+      <p:sp>
+        <p:nvSpPr>
+          <p:cNvPr id="13" name="Rounded Rectangle 12"/>
+          <p:cNvSpPr/>
+          <p:nvPr/>
+        </p:nvSpPr>
+        <p:spPr>
+          <a:xfrm>
+            <a:off x="731520" y="4526280"/>
+            <a:ext cx="10728655" cy="1828800"/>
+          </a:xfrm>
+          <a:prstGeom prst="roundRect">
+            <a:avLst/>
+          </a:prstGeom>
+          <a:solidFill>
+            <a:srgbClr val="131926"/>
+          </a:solidFill>
+          <a:ln w="12700">
+            <a:solidFill>
+              <a:srgbClr val="38BDF8"/>
+            </a:solidFill>
+          </a:ln>
+        </p:spPr>
+        <p:style>
+          <a:lnRef idx="1">
+            <a:schemeClr val="accent1"/>
+          </a:lnRef>
+          <a:fillRef idx="3">
+            <a:schemeClr val="accent1"/>
+          </a:fillRef>
+          <a:effectRef idx="2">
+            <a:schemeClr val="accent1"/>
+          </a:effectRef>
+          <a:fontRef idx="minor">
+            <a:schemeClr val="lt1"/>
+          </a:fontRef>
+        </p:style>
+        <p:txBody>
+          <a:bodyPr rtlCol="0" anchor="ctr"/>
+          <a:lstStyle/>
+          <a:p>
+            <a:pPr algn="ctr"/>
+          </a:p>
+        </p:txBody>
+      </p:sp>
+      <p:sp>
+        <p:nvSpPr>
+          <p:cNvPr id="14" name="TextBox 13"/>
+          <p:cNvSpPr txBox="1"/>
+          <p:nvPr/>
+        </p:nvSpPr>
+        <p:spPr>
+          <a:xfrm>
+            <a:off x="960120" y="4663440"/>
+            <a:ext cx="10241280" cy="1554480"/>
+          </a:xfrm>
+          <a:prstGeom prst="rect">
+            <a:avLst/>
+          </a:prstGeom>
+          <a:noFill/>
+        </p:spPr>
+        <p:txBody>
+          <a:bodyPr wrap="square" lIns="0" rIns="0" tIns="0" bIns="0">
+            <a:spAutoFit/>
+          </a:bodyPr>
+          <a:lstStyle/>
+          <a:p>
+            <a:pPr>
+              <a:defRPr sz="1000" b="1">
+                <a:solidFill>
+                  <a:srgbClr val="38BDF8"/>
                 </a:solidFill>
               </a:defRPr>
             </a:pPr>
@@ -6303,14 +9065,47 @@
           </a:p>
           <a:p>
             <a:pPr>
-              <a:defRPr sz="1300" b="1">
-                <a:solidFill>
-                  <a:srgbClr val="FFFFFF"/>
-                </a:solidFill>
-              </a:defRPr>
-            </a:pPr>
-            <a:r>
-              <a:t>High recurring annual software margins (ARR)  |  Turnkey deployment in days, not months  |  Full co-selling &amp; pre-sales engineering support  |  Certified partner portal at platform.tpcloud.tech</a:t>
+              <a:spcBef>
+                <a:spcPts val="300"/>
+              </a:spcBef>
+              <a:defRPr sz="950">
+                <a:solidFill>
+                  <a:srgbClr val="F1F5F9"/>
+                </a:solidFill>
+              </a:defRPr>
+            </a:pPr>
+            <a:r>
+              <a:t>• High-Margin Software Recurring Revenue: Earn 25%–35% continuous recurring margin on every TerraEmbodiment software deployment, maintenance tier, and AI compute instance.</a:t>
+            </a:r>
+          </a:p>
+          <a:p>
+            <a:pPr>
+              <a:spcBef>
+                <a:spcPts val="300"/>
+              </a:spcBef>
+              <a:defRPr sz="950">
+                <a:solidFill>
+                  <a:srgbClr val="F1F5F9"/>
+                </a:solidFill>
+              </a:defRPr>
+            </a:pPr>
+            <a:r>
+              <a:t>• Turnkey Engineering Velocity: Deploy within 7 to 14 days leveraging pre-trained neural networks and automated semantic tag mapping, avoiding expensive months-long custom PLC code rewrites.</a:t>
+            </a:r>
+          </a:p>
+          <a:p>
+            <a:pPr>
+              <a:spcBef>
+                <a:spcPts val="300"/>
+              </a:spcBef>
+              <a:defRPr sz="950">
+                <a:solidFill>
+                  <a:srgbClr val="F1F5F9"/>
+                </a:solidFill>
+              </a:defRPr>
+            </a:pPr>
+            <a:r>
+              <a:t>• Enterprise Co-Selling &amp; Ecosystem: Access joint executive pipeline opportunities, certified engineering documentation, and board-level C-Suite presentation toolkits.</a:t>
             </a:r>
           </a:p>
         </p:txBody>
@@ -6641,4 +9436,324 @@
   </a:objectDefaults>
   <a:extraClrSchemeLst/>
 </a:theme>
+</file>
+
+<file path=ppt/theme/theme2.xml><?xml version="1.0" encoding="utf-8"?>
+<a:theme xmlns:a="http://schemas.openxmlformats.org/drawingml/2006/main" name="Office Theme">
+  <a:themeElements>
+    <a:clrScheme name="Office">
+      <a:dk1>
+        <a:sysClr val="windowText" lastClr="000000"/>
+      </a:dk1>
+      <a:lt1>
+        <a:sysClr val="window" lastClr="FFFFFF"/>
+      </a:lt1>
+      <a:dk2>
+        <a:srgbClr val="1F497D"/>
+      </a:dk2>
+      <a:lt2>
+        <a:srgbClr val="EEECE1"/>
+      </a:lt2>
+      <a:accent1>
+        <a:srgbClr val="4F81BD"/>
+      </a:accent1>
+      <a:accent2>
+        <a:srgbClr val="C0504D"/>
+      </a:accent2>
+      <a:accent3>
+        <a:srgbClr val="9BBB59"/>
+      </a:accent3>
+      <a:accent4>
+        <a:srgbClr val="8064A2"/>
+      </a:accent4>
+      <a:accent5>
+        <a:srgbClr val="4BACC6"/>
+      </a:accent5>
+      <a:accent6>
+        <a:srgbClr val="F79646"/>
+      </a:accent6>
+      <a:hlink>
+        <a:srgbClr val="0000FF"/>
+      </a:hlink>
+      <a:folHlink>
+        <a:srgbClr val="800080"/>
+      </a:folHlink>
+    </a:clrScheme>
+    <a:fontScheme name="Office">
+      <a:majorFont>
+        <a:latin typeface="Calibri"/>
+        <a:ea typeface=""/>
+        <a:cs typeface=""/>
+        <a:font script="Jpan" typeface="ＭＳ Ｐゴシック"/>
+        <a:font script="Hang" typeface="맑은 고딕"/>
+        <a:font script="Hans" typeface="宋体"/>
+        <a:font script="Hant" typeface="新細明體"/>
+        <a:font script="Arab" typeface="Times New Roman"/>
+        <a:font script="Hebr" typeface="Times New Roman"/>
+        <a:font script="Thai" typeface="Angsana New"/>
+        <a:font script="Ethi" typeface="Nyala"/>
+        <a:font script="Beng" typeface="Vrinda"/>
+        <a:font script="Gujr" typeface="Shruti"/>
+        <a:font script="Khmr" typeface="MoolBoran"/>
+        <a:font script="Knda" typeface="Tunga"/>
+        <a:font script="Guru" typeface="Raavi"/>
+        <a:font script="Cans" typeface="Euphemia"/>
+        <a:font script="Cher" typeface="Plantagenet Cherokee"/>
+        <a:font script="Yiii" typeface="Microsoft Yi Baiti"/>
+        <a:font script="Tibt" typeface="Microsoft Himalaya"/>
+        <a:font script="Thaa" typeface="MV Boli"/>
+        <a:font script="Deva" typeface="Mangal"/>
+        <a:font script="Telu" typeface="Gautami"/>
+        <a:font script="Taml" typeface="Latha"/>
+        <a:font script="Syrc" typeface="Estrangelo Edessa"/>
+        <a:font script="Orya" typeface="Kalinga"/>
+        <a:font script="Mlym" typeface="Kartika"/>
+        <a:font script="Laoo" typeface="DokChampa"/>
+        <a:font script="Sinh" typeface="Iskoola Pota"/>
+        <a:font script="Mong" typeface="Mongolian Baiti"/>
+        <a:font script="Viet" typeface="Times New Roman"/>
+        <a:font script="Uigh" typeface="Microsoft Uighur"/>
+        <a:font script="Geor" typeface="Sylfaen"/>
+      </a:majorFont>
+      <a:minorFont>
+        <a:latin typeface="Calibri"/>
+        <a:ea typeface=""/>
+        <a:cs typeface=""/>
+        <a:font script="Jpan" typeface="ＭＳ Ｐゴシック"/>
+        <a:font script="Hang" typeface="맑은 고딕"/>
+        <a:font script="Hans" typeface="宋体"/>
+        <a:font script="Hant" typeface="新細明體"/>
+        <a:font script="Arab" typeface="Arial"/>
+        <a:font script="Hebr" typeface="Arial"/>
+        <a:font script="Thai" typeface="Cordia New"/>
+        <a:font script="Ethi" typeface="Nyala"/>
+        <a:font script="Beng" typeface="Vrinda"/>
+        <a:font script="Gujr" typeface="Shruti"/>
+        <a:font script="Khmr" typeface="DaunPenh"/>
+        <a:font script="Knda" typeface="Tunga"/>
+        <a:font script="Guru" typeface="Raavi"/>
+        <a:font script="Cans" typeface="Euphemia"/>
+        <a:font script="Cher" typeface="Plantagenet Cherokee"/>
+        <a:font script="Yiii" typeface="Microsoft Yi Baiti"/>
+        <a:font script="Tibt" typeface="Microsoft Himalaya"/>
+        <a:font script="Thaa" typeface="MV Boli"/>
+        <a:font script="Deva" typeface="Mangal"/>
+        <a:font script="Telu" typeface="Gautami"/>
+        <a:font script="Taml" typeface="Latha"/>
+        <a:font script="Syrc" typeface="Estrangelo Edessa"/>
+        <a:font script="Orya" typeface="Kalinga"/>
+        <a:font script="Mlym" typeface="Kartika"/>
+        <a:font script="Laoo" typeface="DokChampa"/>
+        <a:font script="Sinh" typeface="Iskoola Pota"/>
+        <a:font script="Mong" typeface="Mongolian Baiti"/>
+        <a:font script="Viet" typeface="Arial"/>
+        <a:font script="Uigh" typeface="Microsoft Uighur"/>
+        <a:font script="Geor" typeface="Sylfaen"/>
+      </a:minorFont>
+    </a:fontScheme>
+    <a:fmtScheme name="Office">
+      <a:fillStyleLst>
+        <a:solidFill>
+          <a:schemeClr val="phClr"/>
+        </a:solidFill>
+        <a:gradFill rotWithShape="1">
+          <a:gsLst>
+            <a:gs pos="0">
+              <a:schemeClr val="phClr">
+                <a:tint val="50000"/>
+                <a:satMod val="300000"/>
+              </a:schemeClr>
+            </a:gs>
+            <a:gs pos="35000">
+              <a:schemeClr val="phClr">
+                <a:tint val="37000"/>
+                <a:satMod val="300000"/>
+              </a:schemeClr>
+            </a:gs>
+            <a:gs pos="100000">
+              <a:schemeClr val="phClr">
+                <a:tint val="15000"/>
+                <a:satMod val="350000"/>
+              </a:schemeClr>
+            </a:gs>
+          </a:gsLst>
+          <a:lin ang="16200000" scaled="1"/>
+        </a:gradFill>
+        <a:gradFill rotWithShape="1">
+          <a:gsLst>
+            <a:gs pos="0">
+              <a:schemeClr val="phClr">
+                <a:tint val="100000"/>
+                <a:shade val="100000"/>
+                <a:satMod val="130000"/>
+              </a:schemeClr>
+            </a:gs>
+            <a:gs pos="100000">
+              <a:schemeClr val="phClr">
+                <a:tint val="50000"/>
+                <a:shade val="100000"/>
+                <a:satMod val="350000"/>
+              </a:schemeClr>
+            </a:gs>
+          </a:gsLst>
+          <a:lin ang="16200000" scaled="0"/>
+        </a:gradFill>
+      </a:fillStyleLst>
+      <a:lnStyleLst>
+        <a:ln w="9525" cap="flat" cmpd="sng" algn="ctr">
+          <a:solidFill>
+            <a:schemeClr val="phClr">
+              <a:shade val="95000"/>
+              <a:satMod val="105000"/>
+            </a:schemeClr>
+          </a:solidFill>
+          <a:prstDash val="solid"/>
+        </a:ln>
+        <a:ln w="25400" cap="flat" cmpd="sng" algn="ctr">
+          <a:solidFill>
+            <a:schemeClr val="phClr"/>
+          </a:solidFill>
+          <a:prstDash val="solid"/>
+        </a:ln>
+        <a:ln w="38100" cap="flat" cmpd="sng" algn="ctr">
+          <a:solidFill>
+            <a:schemeClr val="phClr"/>
+          </a:solidFill>
+          <a:prstDash val="solid"/>
+        </a:ln>
+      </a:lnStyleLst>
+      <a:effectStyleLst>
+        <a:effectStyle>
+          <a:effectLst>
+            <a:outerShdw blurRad="40000" dist="20000" dir="5400000" rotWithShape="0">
+              <a:srgbClr val="000000">
+                <a:alpha val="38000"/>
+              </a:srgbClr>
+            </a:outerShdw>
+          </a:effectLst>
+        </a:effectStyle>
+        <a:effectStyle>
+          <a:effectLst>
+            <a:outerShdw blurRad="40000" dist="23000" dir="5400000" rotWithShape="0">
+              <a:srgbClr val="000000">
+                <a:alpha val="35000"/>
+              </a:srgbClr>
+            </a:outerShdw>
+          </a:effectLst>
+        </a:effectStyle>
+        <a:effectStyle>
+          <a:effectLst>
+            <a:outerShdw blurRad="40000" dist="23000" dir="5400000" rotWithShape="0">
+              <a:srgbClr val="000000">
+                <a:alpha val="35000"/>
+              </a:srgbClr>
+            </a:outerShdw>
+          </a:effectLst>
+          <a:scene3d>
+            <a:camera prst="orthographicFront">
+              <a:rot lat="0" lon="0" rev="0"/>
+            </a:camera>
+            <a:lightRig rig="threePt" dir="t">
+              <a:rot lat="0" lon="0" rev="1200000"/>
+            </a:lightRig>
+          </a:scene3d>
+          <a:sp3d>
+            <a:bevelT w="63500" h="25400"/>
+          </a:sp3d>
+        </a:effectStyle>
+      </a:effectStyleLst>
+      <a:bgFillStyleLst>
+        <a:solidFill>
+          <a:schemeClr val="phClr"/>
+        </a:solidFill>
+        <a:gradFill rotWithShape="1">
+          <a:gsLst>
+            <a:gs pos="0">
+              <a:schemeClr val="phClr">
+                <a:tint val="40000"/>
+                <a:satMod val="350000"/>
+              </a:schemeClr>
+            </a:gs>
+            <a:gs pos="40000">
+              <a:schemeClr val="phClr">
+                <a:tint val="45000"/>
+                <a:shade val="99000"/>
+                <a:satMod val="350000"/>
+              </a:schemeClr>
+            </a:gs>
+            <a:gs pos="100000">
+              <a:schemeClr val="phClr">
+                <a:shade val="20000"/>
+                <a:satMod val="255000"/>
+              </a:schemeClr>
+            </a:gs>
+          </a:gsLst>
+          <a:path path="circle">
+            <a:fillToRect l="50000" t="-80000" r="50000" b="180000"/>
+          </a:path>
+        </a:gradFill>
+        <a:gradFill rotWithShape="1">
+          <a:gsLst>
+            <a:gs pos="0">
+              <a:schemeClr val="phClr">
+                <a:tint val="80000"/>
+                <a:satMod val="300000"/>
+              </a:schemeClr>
+            </a:gs>
+            <a:gs pos="100000">
+              <a:schemeClr val="phClr">
+                <a:shade val="30000"/>
+                <a:satMod val="200000"/>
+              </a:schemeClr>
+            </a:gs>
+          </a:gsLst>
+          <a:path path="circle">
+            <a:fillToRect l="50000" t="50000" r="50000" b="50000"/>
+          </a:path>
+        </a:gradFill>
+      </a:bgFillStyleLst>
+    </a:fmtScheme>
+  </a:themeElements>
+  <a:objectDefaults>
+    <a:spDef>
+      <a:spPr/>
+      <a:bodyPr/>
+      <a:lstStyle/>
+      <a:style>
+        <a:lnRef idx="1">
+          <a:schemeClr val="accent1"/>
+        </a:lnRef>
+        <a:fillRef idx="3">
+          <a:schemeClr val="accent1"/>
+        </a:fillRef>
+        <a:effectRef idx="2">
+          <a:schemeClr val="accent1"/>
+        </a:effectRef>
+        <a:fontRef idx="minor">
+          <a:schemeClr val="lt1"/>
+        </a:fontRef>
+      </a:style>
+    </a:spDef>
+    <a:lnDef>
+      <a:spPr/>
+      <a:bodyPr/>
+      <a:lstStyle/>
+      <a:style>
+        <a:lnRef idx="2">
+          <a:schemeClr val="accent1"/>
+        </a:lnRef>
+        <a:fillRef idx="0">
+          <a:schemeClr val="accent1"/>
+        </a:fillRef>
+        <a:effectRef idx="1">
+          <a:schemeClr val="accent1"/>
+        </a:effectRef>
+        <a:fontRef idx="minor">
+          <a:schemeClr val="tx1"/>
+        </a:fontRef>
+      </a:style>
+    </a:lnDef>
+  </a:objectDefaults>
+  <a:extraClrSchemeLst/>
+</a:theme>
 </file>